--- a/docs/entregables/Presentacion_Chompas_Mabel.pptx
+++ b/docs/entregables/Presentacion_Chompas_Mabel.pptx
@@ -3461,7 +3461,7 @@
                 </a:solidFill>
                 <a:latin typeface="Arial"/>
               </a:rPr>
-              <a:t>Colaborador: ______________________________</a:t>
+              <a:t>Colaborador: CRUZ SALAZAR Jorge Luis</a:t>
             </a:r>
           </a:p>
         </p:txBody>

--- a/docs/entregables/Presentacion_Chompas_Mabel.pptx
+++ b/docs/entregables/Presentacion_Chompas_Mabel.pptx
@@ -3420,13 +3420,13 @@
           <a:p>
             <a:pPr algn="l"/>
             <a:r>
-              <a:rPr sz="1200" b="0">
+              <a:rPr sz="1200">
                 <a:solidFill>
                   <a:srgbClr val="E2E8F0"/>
                 </a:solidFill>
                 <a:latin typeface="Arial"/>
               </a:rPr>
-              <a:t>Presentado por: ANGULO GONZALES Diego Gabriel</a:t>
+              <a:t>Integrantes:</a:t>
             </a:r>
           </a:p>
         </p:txBody>
@@ -3440,7 +3440,7 @@
         <p:spPr>
           <a:xfrm>
             <a:off x="667512" y="5230368"/>
-            <a:ext cx="4754880" cy="274320"/>
+            <a:ext cx="4754880" cy="502920"/>
           </a:xfrm>
           <a:prstGeom prst="rect">
             <a:avLst/>
@@ -3455,13 +3455,14 @@
           <a:p>
             <a:pPr algn="l"/>
             <a:r>
-              <a:rPr sz="1200" b="0">
+              <a:rPr sz="1200">
                 <a:solidFill>
                   <a:srgbClr val="E2E8F0"/>
                 </a:solidFill>
                 <a:latin typeface="Arial"/>
               </a:rPr>
-              <a:t>Colaborador: CRUZ SALAZAR Jorge Luis</a:t>
+              <a:t>ANGULO GONZALES Diego Gabriel
+CRUZ SALAZAR Jorge Luis</a:t>
             </a:r>
           </a:p>
         </p:txBody>

--- a/docs/entregables/Presentacion_Chompas_Mabel.pptx
+++ b/docs/entregables/Presentacion_Chompas_Mabel.pptx
@@ -4752,7 +4752,7 @@
                 </a:solidFill>
                 <a:latin typeface="Arial"/>
               </a:rPr>
-              <a:t>API REST y validaciones</a:t>
+              <a:t>API REST y validaciónes</a:t>
             </a:r>
           </a:p>
         </p:txBody>
@@ -4787,7 +4787,7 @@
                 </a:solidFill>
                 <a:latin typeface="Arial"/>
               </a:rPr>
-              <a:t>Endpoints solicitados y reglas de entrada</a:t>
+              <a:t>Endpoints principales y reglas de entrada</a:t>
             </a:r>
           </a:p>
         </p:txBody>
@@ -4836,7 +4836,7 @@
         <p:spPr>
           <a:xfrm>
             <a:off x="502920" y="1024128"/>
-            <a:ext cx="11155680" cy="2"/>
+            <a:ext cx="11155680" cy="12700"/>
           </a:xfrm>
           <a:prstGeom prst="rect">
             <a:avLst/>
@@ -4878,8 +4878,8 @@
         </p:nvSpPr>
         <p:spPr>
           <a:xfrm>
-            <a:off x="731520" y="1097280"/>
-            <a:ext cx="3383280" cy="2011680"/>
+            <a:off x="777240" y="1234440"/>
+            <a:ext cx="3246120" cy="2743200"/>
           </a:xfrm>
           <a:prstGeom prst="roundRect">
             <a:avLst/>
@@ -4923,8 +4923,8 @@
         </p:nvSpPr>
         <p:spPr>
           <a:xfrm>
-            <a:off x="731520" y="1097280"/>
-            <a:ext cx="73152" cy="2011680"/>
+            <a:off x="777240" y="1234440"/>
+            <a:ext cx="73152" cy="2743200"/>
           </a:xfrm>
           <a:prstGeom prst="rect">
             <a:avLst/>
@@ -4966,8 +4966,8 @@
         </p:nvSpPr>
         <p:spPr>
           <a:xfrm>
-            <a:off x="932688" y="1261872"/>
-            <a:ext cx="3063240" cy="274320"/>
+            <a:off x="978408" y="1380744"/>
+            <a:ext cx="2916936" cy="292608"/>
           </a:xfrm>
           <a:prstGeom prst="rect">
             <a:avLst/>
@@ -4982,7 +4982,7 @@
           <a:p>
             <a:pPr algn="l"/>
             <a:r>
-              <a:rPr sz="1500" b="1">
+              <a:rPr sz="1800" b="1">
                 <a:solidFill>
                   <a:srgbClr val="0F172A"/>
                 </a:solidFill>
@@ -5001,8 +5001,8 @@
         </p:nvSpPr>
         <p:spPr>
           <a:xfrm>
-            <a:off x="932688" y="1600200"/>
-            <a:ext cx="3063240" cy="1417320"/>
+            <a:off x="978408" y="1737360"/>
+            <a:ext cx="2916936" cy="2176272"/>
           </a:xfrm>
           <a:prstGeom prst="rect">
             <a:avLst/>
@@ -5017,7 +5017,7 @@
           <a:p>
             <a:pPr algn="l"/>
             <a:r>
-              <a:rPr sz="1080" b="0">
+              <a:rPr sz="1300" b="0">
                 <a:solidFill>
                   <a:srgbClr val="334155"/>
                 </a:solidFill>
@@ -5039,8 +5039,8 @@
         </p:nvSpPr>
         <p:spPr>
           <a:xfrm>
-            <a:off x="4434840" y="1097280"/>
-            <a:ext cx="3383280" cy="2011680"/>
+            <a:off x="4480559" y="1234440"/>
+            <a:ext cx="3246120" cy="2743200"/>
           </a:xfrm>
           <a:prstGeom prst="roundRect">
             <a:avLst/>
@@ -5084,8 +5084,8 @@
         </p:nvSpPr>
         <p:spPr>
           <a:xfrm>
-            <a:off x="4434840" y="1097280"/>
-            <a:ext cx="73152" cy="2011680"/>
+            <a:off x="4480559" y="1234440"/>
+            <a:ext cx="73152" cy="2743200"/>
           </a:xfrm>
           <a:prstGeom prst="rect">
             <a:avLst/>
@@ -5127,8 +5127,8 @@
         </p:nvSpPr>
         <p:spPr>
           <a:xfrm>
-            <a:off x="4636007" y="1261872"/>
-            <a:ext cx="3063240" cy="274320"/>
+            <a:off x="4681727" y="1380744"/>
+            <a:ext cx="2916936" cy="292608"/>
           </a:xfrm>
           <a:prstGeom prst="rect">
             <a:avLst/>
@@ -5143,7 +5143,7 @@
           <a:p>
             <a:pPr algn="l"/>
             <a:r>
-              <a:rPr sz="1500" b="1">
+              <a:rPr sz="1800" b="1">
                 <a:solidFill>
                   <a:srgbClr val="0F172A"/>
                 </a:solidFill>
@@ -5162,8 +5162,8 @@
         </p:nvSpPr>
         <p:spPr>
           <a:xfrm>
-            <a:off x="4636007" y="1600200"/>
-            <a:ext cx="3063240" cy="1417320"/>
+            <a:off x="4681727" y="1737360"/>
+            <a:ext cx="2916936" cy="2176272"/>
           </a:xfrm>
           <a:prstGeom prst="rect">
             <a:avLst/>
@@ -5178,7 +5178,7 @@
           <a:p>
             <a:pPr algn="l"/>
             <a:r>
-              <a:rPr sz="1080" b="0">
+              <a:rPr sz="1300" b="0">
                 <a:solidFill>
                   <a:srgbClr val="334155"/>
                 </a:solidFill>
@@ -5186,7 +5186,8 @@
               </a:rPr>
               <a:t>GET /api/clientes
 POST /api/clientes
-Validación de nombre y correo.</a:t>
+Correo válido
+Nombre mínimo</a:t>
             </a:r>
           </a:p>
         </p:txBody>
@@ -5199,8 +5200,8 @@
         </p:nvSpPr>
         <p:spPr>
           <a:xfrm>
-            <a:off x="8138160" y="1097280"/>
-            <a:ext cx="3383280" cy="2011680"/>
+            <a:off x="8183879" y="1234440"/>
+            <a:ext cx="3246120" cy="2743200"/>
           </a:xfrm>
           <a:prstGeom prst="roundRect">
             <a:avLst/>
@@ -5244,8 +5245,8 @@
         </p:nvSpPr>
         <p:spPr>
           <a:xfrm>
-            <a:off x="8138160" y="1097280"/>
-            <a:ext cx="73152" cy="2011680"/>
+            <a:off x="8183879" y="1234440"/>
+            <a:ext cx="73152" cy="2743200"/>
           </a:xfrm>
           <a:prstGeom prst="rect">
             <a:avLst/>
@@ -5287,8 +5288,8 @@
         </p:nvSpPr>
         <p:spPr>
           <a:xfrm>
-            <a:off x="8339328" y="1261872"/>
-            <a:ext cx="3063240" cy="274320"/>
+            <a:off x="8385048" y="1380744"/>
+            <a:ext cx="2916936" cy="292608"/>
           </a:xfrm>
           <a:prstGeom prst="rect">
             <a:avLst/>
@@ -5303,7 +5304,7 @@
           <a:p>
             <a:pPr algn="l"/>
             <a:r>
-              <a:rPr sz="1500" b="1">
+              <a:rPr sz="1800" b="1">
                 <a:solidFill>
                   <a:srgbClr val="0F172A"/>
                 </a:solidFill>
@@ -5322,8 +5323,8 @@
         </p:nvSpPr>
         <p:spPr>
           <a:xfrm>
-            <a:off x="8339328" y="1600200"/>
-            <a:ext cx="3063240" cy="1417320"/>
+            <a:off x="8385048" y="1737360"/>
+            <a:ext cx="2916936" cy="2176272"/>
           </a:xfrm>
           <a:prstGeom prst="rect">
             <a:avLst/>
@@ -5338,7 +5339,7 @@
           <a:p>
             <a:pPr algn="l"/>
             <a:r>
-              <a:rPr sz="1080" b="0">
+              <a:rPr sz="1300" b="0">
                 <a:solidFill>
                   <a:srgbClr val="334155"/>
                 </a:solidFill>
@@ -5346,7 +5347,8 @@
               </a:rPr>
               <a:t>GET /api/pedidos
 POST /api/pedidos
-Calcula total, detalle, venta y stock.</a:t>
+Detalle de productos
+Descuento de stock</a:t>
             </a:r>
           </a:p>
         </p:txBody>
@@ -5359,8 +5361,8 @@
         </p:nvSpPr>
         <p:spPr>
           <a:xfrm>
-            <a:off x="731520" y="3886200"/>
-            <a:ext cx="10789920" cy="1143000"/>
+            <a:off x="777240" y="4709160"/>
+            <a:ext cx="5166360" cy="914400"/>
           </a:xfrm>
           <a:prstGeom prst="roundRect">
             <a:avLst/>
@@ -5404,8 +5406,8 @@
         </p:nvSpPr>
         <p:spPr>
           <a:xfrm>
-            <a:off x="731520" y="3886200"/>
-            <a:ext cx="73152" cy="1143000"/>
+            <a:off x="777240" y="4709160"/>
+            <a:ext cx="73152" cy="914400"/>
           </a:xfrm>
           <a:prstGeom prst="rect">
             <a:avLst/>
@@ -5447,8 +5449,8 @@
         </p:nvSpPr>
         <p:spPr>
           <a:xfrm>
-            <a:off x="932688" y="4050791"/>
-            <a:ext cx="10469880" cy="274320"/>
+            <a:off x="978408" y="4855464"/>
+            <a:ext cx="4837176" cy="292608"/>
           </a:xfrm>
           <a:prstGeom prst="rect">
             <a:avLst/>
@@ -5469,7 +5471,7 @@
                 </a:solidFill>
                 <a:latin typeface="Arial"/>
               </a:rPr>
-              <a:t>Validaciones</a:t>
+              <a:t>Validaciónes Angular</a:t>
             </a:r>
           </a:p>
         </p:txBody>
@@ -5482,8 +5484,8 @@
         </p:nvSpPr>
         <p:spPr>
           <a:xfrm>
-            <a:off x="932688" y="4389120"/>
-            <a:ext cx="10469880" cy="548640"/>
+            <a:off x="978408" y="5212080"/>
+            <a:ext cx="4837176" cy="347472"/>
           </a:xfrm>
           <a:prstGeom prst="rect">
             <a:avLst/>
@@ -5498,13 +5500,171 @@
           <a:p>
             <a:pPr algn="l"/>
             <a:r>
-              <a:rPr sz="1080" b="0">
+              <a:rPr sz="1200" b="0">
                 <a:solidFill>
                   <a:srgbClr val="334155"/>
                 </a:solidFill>
                 <a:latin typeface="Arial"/>
               </a:rPr>
-              <a:t>Angular valida campos obligatorios, correo, precio, stock y longitud mínima. Spring Boot valida DTOs con jakarta.validation y maneja errores REST.</a:t>
+              <a:t>Campos obligatorios, correo válido, precio &gt;= 0, stock &gt;= 0 y nombre mínimo.</a:t>
+            </a:r>
+          </a:p>
+        </p:txBody>
+      </p:sp>
+      <p:sp>
+        <p:nvSpPr>
+          <p:cNvPr id="24" name="Rounded Rectangle 23"/>
+          <p:cNvSpPr/>
+          <p:nvPr/>
+        </p:nvSpPr>
+        <p:spPr>
+          <a:xfrm>
+            <a:off x="6355080" y="4709160"/>
+            <a:ext cx="5166360" cy="914400"/>
+          </a:xfrm>
+          <a:prstGeom prst="roundRect">
+            <a:avLst/>
+          </a:prstGeom>
+          <a:solidFill>
+            <a:srgbClr val="FFFFFF"/>
+          </a:solidFill>
+          <a:ln w="15240">
+            <a:solidFill>
+              <a:srgbClr val="CBD5E1"/>
+            </a:solidFill>
+          </a:ln>
+        </p:spPr>
+        <p:style>
+          <a:lnRef idx="1">
+            <a:schemeClr val="accent1"/>
+          </a:lnRef>
+          <a:fillRef idx="3">
+            <a:schemeClr val="accent1"/>
+          </a:fillRef>
+          <a:effectRef idx="2">
+            <a:schemeClr val="accent1"/>
+          </a:effectRef>
+          <a:fontRef idx="minor">
+            <a:schemeClr val="lt1"/>
+          </a:fontRef>
+        </p:style>
+        <p:txBody>
+          <a:bodyPr rtlCol="0" anchor="ctr"/>
+          <a:lstStyle/>
+          <a:p>
+            <a:pPr algn="ctr"/>
+          </a:p>
+        </p:txBody>
+      </p:sp>
+      <p:sp>
+        <p:nvSpPr>
+          <p:cNvPr id="25" name="Rectangle 24"/>
+          <p:cNvSpPr/>
+          <p:nvPr/>
+        </p:nvSpPr>
+        <p:spPr>
+          <a:xfrm>
+            <a:off x="6355080" y="4709160"/>
+            <a:ext cx="73152" cy="914400"/>
+          </a:xfrm>
+          <a:prstGeom prst="rect">
+            <a:avLst/>
+          </a:prstGeom>
+          <a:solidFill>
+            <a:srgbClr val="4F46E5"/>
+          </a:solidFill>
+          <a:ln>
+            <a:noFill/>
+          </a:ln>
+        </p:spPr>
+        <p:style>
+          <a:lnRef idx="1">
+            <a:schemeClr val="accent1"/>
+          </a:lnRef>
+          <a:fillRef idx="3">
+            <a:schemeClr val="accent1"/>
+          </a:fillRef>
+          <a:effectRef idx="2">
+            <a:schemeClr val="accent1"/>
+          </a:effectRef>
+          <a:fontRef idx="minor">
+            <a:schemeClr val="lt1"/>
+          </a:fontRef>
+        </p:style>
+        <p:txBody>
+          <a:bodyPr rtlCol="0" anchor="ctr"/>
+          <a:lstStyle/>
+          <a:p>
+            <a:pPr algn="ctr"/>
+          </a:p>
+        </p:txBody>
+      </p:sp>
+      <p:sp>
+        <p:nvSpPr>
+          <p:cNvPr id="26" name="TextBox 25"/>
+          <p:cNvSpPr txBox="1"/>
+          <p:nvPr/>
+        </p:nvSpPr>
+        <p:spPr>
+          <a:xfrm>
+            <a:off x="6556248" y="4855464"/>
+            <a:ext cx="4837176" cy="292608"/>
+          </a:xfrm>
+          <a:prstGeom prst="rect">
+            <a:avLst/>
+          </a:prstGeom>
+          <a:noFill/>
+        </p:spPr>
+        <p:txBody>
+          <a:bodyPr wrap="square">
+            <a:spAutoFit/>
+          </a:bodyPr>
+          <a:lstStyle/>
+          <a:p>
+            <a:pPr algn="l"/>
+            <a:r>
+              <a:rPr sz="1500" b="1">
+                <a:solidFill>
+                  <a:srgbClr val="0F172A"/>
+                </a:solidFill>
+                <a:latin typeface="Arial"/>
+              </a:rPr>
+              <a:t>Validaciónes Spring Boot</a:t>
+            </a:r>
+          </a:p>
+        </p:txBody>
+      </p:sp>
+      <p:sp>
+        <p:nvSpPr>
+          <p:cNvPr id="27" name="TextBox 26"/>
+          <p:cNvSpPr txBox="1"/>
+          <p:nvPr/>
+        </p:nvSpPr>
+        <p:spPr>
+          <a:xfrm>
+            <a:off x="6556248" y="5212080"/>
+            <a:ext cx="4837176" cy="347472"/>
+          </a:xfrm>
+          <a:prstGeom prst="rect">
+            <a:avLst/>
+          </a:prstGeom>
+          <a:noFill/>
+        </p:spPr>
+        <p:txBody>
+          <a:bodyPr wrap="square">
+            <a:spAutoFit/>
+          </a:bodyPr>
+          <a:lstStyle/>
+          <a:p>
+            <a:pPr algn="l"/>
+            <a:r>
+              <a:rPr sz="1200" b="0">
+                <a:solidFill>
+                  <a:srgbClr val="334155"/>
+                </a:solidFill>
+                <a:latin typeface="Arial"/>
+              </a:rPr>
+              <a:t>DTOs con jakarta.validation y respuestas de error controladas.</a:t>
             </a:r>
           </a:p>
         </p:txBody>
@@ -5727,7 +5887,7 @@
         <p:spPr>
           <a:xfrm>
             <a:off x="502920" y="1024128"/>
-            <a:ext cx="11155680" cy="2"/>
+            <a:ext cx="11155680" cy="12700"/>
           </a:xfrm>
           <a:prstGeom prst="rect">
             <a:avLst/>
@@ -5763,25 +5923,93 @@
       </p:sp>
       <p:sp>
         <p:nvSpPr>
-          <p:cNvPr id="8" name="Rounded Rectangle 7"/>
+          <p:cNvPr id="8" name="TextBox 7"/>
+          <p:cNvSpPr txBox="1"/>
+          <p:nvPr/>
+        </p:nvSpPr>
+        <p:spPr>
+          <a:xfrm>
+            <a:off x="777240" y="1261872"/>
+            <a:ext cx="4846320" cy="256032"/>
+          </a:xfrm>
+          <a:prstGeom prst="rect">
+            <a:avLst/>
+          </a:prstGeom>
+          <a:noFill/>
+        </p:spPr>
+        <p:txBody>
+          <a:bodyPr wrap="none" lIns="18288" rIns="18288" tIns="9144" bIns="9144" anchor="t">
+            <a:spAutoFit/>
+          </a:bodyPr>
+          <a:lstStyle/>
+          <a:p>
+            <a:pPr algn="l"/>
+            <a:r>
+              <a:rPr sz="1400" b="1">
+                <a:solidFill>
+                  <a:srgbClr val="0F172A"/>
+                </a:solidFill>
+                <a:latin typeface="Aptos"/>
+              </a:rPr>
+              <a:t>Flujo para levantar el sistema</a:t>
+            </a:r>
+          </a:p>
+        </p:txBody>
+      </p:sp>
+      <p:sp>
+        <p:nvSpPr>
+          <p:cNvPr id="9" name="TextBox 8"/>
+          <p:cNvSpPr txBox="1"/>
+          <p:nvPr/>
+        </p:nvSpPr>
+        <p:spPr>
+          <a:xfrm>
+            <a:off x="777240" y="1536192"/>
+            <a:ext cx="5303520" cy="201168"/>
+          </a:xfrm>
+          <a:prstGeom prst="rect">
+            <a:avLst/>
+          </a:prstGeom>
+          <a:noFill/>
+        </p:spPr>
+        <p:txBody>
+          <a:bodyPr wrap="none" lIns="18288" rIns="18288" tIns="9144" bIns="9144" anchor="t">
+            <a:spAutoFit/>
+          </a:bodyPr>
+          <a:lstStyle/>
+          <a:p>
+            <a:pPr algn="l"/>
+            <a:r>
+              <a:rPr sz="880" b="0">
+                <a:solidFill>
+                  <a:srgbClr val="475569"/>
+                </a:solidFill>
+                <a:latin typeface="Aptos"/>
+              </a:rPr>
+              <a:t>Comandos principales para replicar desde GitHub</a:t>
+            </a:r>
+          </a:p>
+        </p:txBody>
+      </p:sp>
+      <p:sp>
+        <p:nvSpPr>
+          <p:cNvPr id="10" name="Rectangle 9"/>
           <p:cNvSpPr/>
           <p:nvPr/>
         </p:nvSpPr>
         <p:spPr>
           <a:xfrm>
-            <a:off x="914400" y="1234440"/>
-            <a:ext cx="10332720" cy="685800"/>
-          </a:xfrm>
-          <a:prstGeom prst="roundRect">
-            <a:avLst/>
-          </a:prstGeom>
-          <a:solidFill>
-            <a:srgbClr val="FFFFFF"/>
-          </a:solidFill>
-          <a:ln w="15240">
-            <a:solidFill>
-              <a:srgbClr val="CBD5E1"/>
-            </a:solidFill>
+            <a:off x="1115568" y="1901952"/>
+            <a:ext cx="32004" cy="3063240"/>
+          </a:xfrm>
+          <a:prstGeom prst="rect">
+            <a:avLst/>
+          </a:prstGeom>
+          <a:solidFill>
+            <a:srgbClr val="CBD5E1"/>
+          </a:solidFill>
+          <a:ln>
+            <a:noFill/>
           </a:ln>
         </p:spPr>
         <p:style>
@@ -5808,16 +6036,16 @@
       </p:sp>
       <p:sp>
         <p:nvSpPr>
-          <p:cNvPr id="9" name="Rectangle 8"/>
+          <p:cNvPr id="11" name="Oval 10"/>
           <p:cNvSpPr/>
           <p:nvPr/>
         </p:nvSpPr>
         <p:spPr>
           <a:xfrm>
-            <a:off x="914400" y="1234440"/>
-            <a:ext cx="73152" cy="685800"/>
-          </a:xfrm>
-          <a:prstGeom prst="rect">
+            <a:off x="932688" y="1828800"/>
+            <a:ext cx="420624" cy="420624"/>
+          </a:xfrm>
+          <a:prstGeom prst="ellipse">
             <a:avLst/>
           </a:prstGeom>
           <a:solidFill>
@@ -5851,22 +6079,57 @@
       </p:sp>
       <p:sp>
         <p:nvSpPr>
-          <p:cNvPr id="10" name="TextBox 9"/>
-          <p:cNvSpPr txBox="1"/>
-          <p:nvPr/>
-        </p:nvSpPr>
-        <p:spPr>
-          <a:xfrm>
-            <a:off x="1115568" y="1399032"/>
-            <a:ext cx="10012680" cy="274320"/>
-          </a:xfrm>
-          <a:prstGeom prst="rect">
-            <a:avLst/>
-          </a:prstGeom>
-          <a:noFill/>
-        </p:spPr>
-        <p:txBody>
-          <a:bodyPr wrap="square">
+          <p:cNvPr id="12" name="TextBox 11"/>
+          <p:cNvSpPr txBox="1"/>
+          <p:nvPr/>
+        </p:nvSpPr>
+        <p:spPr>
+          <a:xfrm>
+            <a:off x="932688" y="1901952"/>
+            <a:ext cx="420624" cy="164592"/>
+          </a:xfrm>
+          <a:prstGeom prst="rect">
+            <a:avLst/>
+          </a:prstGeom>
+          <a:noFill/>
+        </p:spPr>
+        <p:txBody>
+          <a:bodyPr wrap="none" lIns="18288" rIns="18288" tIns="9144" bIns="9144" anchor="t">
+            <a:spAutoFit/>
+          </a:bodyPr>
+          <a:lstStyle/>
+          <a:p>
+            <a:pPr algn="ctr"/>
+            <a:r>
+              <a:rPr sz="1000" b="1">
+                <a:solidFill>
+                  <a:srgbClr val="FFFFFF"/>
+                </a:solidFill>
+                <a:latin typeface="Aptos"/>
+              </a:rPr>
+              <a:t>1</a:t>
+            </a:r>
+          </a:p>
+        </p:txBody>
+      </p:sp>
+      <p:sp>
+        <p:nvSpPr>
+          <p:cNvPr id="13" name="TextBox 12"/>
+          <p:cNvSpPr txBox="1"/>
+          <p:nvPr/>
+        </p:nvSpPr>
+        <p:spPr>
+          <a:xfrm>
+            <a:off x="1536192" y="1819656"/>
+            <a:ext cx="4526280" cy="246888"/>
+          </a:xfrm>
+          <a:prstGeom prst="rect">
+            <a:avLst/>
+          </a:prstGeom>
+          <a:noFill/>
+        </p:spPr>
+        <p:txBody>
+          <a:bodyPr wrap="none" lIns="18288" rIns="18288" tIns="9144" bIns="9144" anchor="t">
             <a:spAutoFit/>
           </a:bodyPr>
           <a:lstStyle/>
@@ -5877,68 +6140,35 @@
                 <a:solidFill>
                   <a:srgbClr val="0F172A"/>
                 </a:solidFill>
-                <a:latin typeface="Arial"/>
-              </a:rPr>
-              <a:t>Paso 1</a:t>
-            </a:r>
-          </a:p>
-        </p:txBody>
-      </p:sp>
-      <p:sp>
-        <p:nvSpPr>
-          <p:cNvPr id="11" name="TextBox 10"/>
-          <p:cNvSpPr txBox="1"/>
-          <p:nvPr/>
-        </p:nvSpPr>
-        <p:spPr>
-          <a:xfrm>
-            <a:off x="1115568" y="1737360"/>
-            <a:ext cx="10012680" cy="91439"/>
-          </a:xfrm>
-          <a:prstGeom prst="rect">
-            <a:avLst/>
-          </a:prstGeom>
-          <a:noFill/>
-        </p:spPr>
-        <p:txBody>
-          <a:bodyPr wrap="square">
-            <a:spAutoFit/>
-          </a:bodyPr>
-          <a:lstStyle/>
-          <a:p>
-            <a:pPr algn="l"/>
-            <a:r>
-              <a:rPr sz="1080" b="0">
-                <a:solidFill>
-                  <a:srgbClr val="334155"/>
-                </a:solidFill>
-                <a:latin typeface="Arial"/>
-              </a:rPr>
-              <a:t>git clone https://github.com/DiegoA199/Chompas_Mabel.git</a:t>
-            </a:r>
-          </a:p>
-        </p:txBody>
-      </p:sp>
-      <p:sp>
-        <p:nvSpPr>
-          <p:cNvPr id="12" name="Rounded Rectangle 11"/>
+                <a:latin typeface="Aptos"/>
+              </a:rPr>
+              <a:t>Clonar repositorio</a:t>
+            </a:r>
+          </a:p>
+        </p:txBody>
+      </p:sp>
+      <p:sp>
+        <p:nvSpPr>
+          <p:cNvPr id="14" name="Rounded Rectangle 13"/>
           <p:cNvSpPr/>
           <p:nvPr/>
         </p:nvSpPr>
         <p:spPr>
           <a:xfrm>
-            <a:off x="914400" y="2194560"/>
-            <a:ext cx="10332720" cy="685800"/>
+            <a:off x="1536192" y="2139696"/>
+            <a:ext cx="4526280" cy="347472"/>
           </a:xfrm>
           <a:prstGeom prst="roundRect">
-            <a:avLst/>
-          </a:prstGeom>
-          <a:solidFill>
-            <a:srgbClr val="FFFFFF"/>
-          </a:solidFill>
-          <a:ln w="15240">
+            <a:avLst>
+              <a:gd name="adj" fmla="val 12000"/>
+            </a:avLst>
+          </a:prstGeom>
+          <a:solidFill>
+            <a:srgbClr val="F1F5F9"/>
+          </a:solidFill>
+          <a:ln w="10160">
             <a:solidFill>
-              <a:srgbClr val="CBD5E1"/>
+              <a:srgbClr val="E2E8F0"/>
             </a:solidFill>
           </a:ln>
         </p:spPr>
@@ -5966,16 +6196,51 @@
       </p:sp>
       <p:sp>
         <p:nvSpPr>
-          <p:cNvPr id="13" name="Rectangle 12"/>
+          <p:cNvPr id="15" name="TextBox 14"/>
+          <p:cNvSpPr txBox="1"/>
+          <p:nvPr/>
+        </p:nvSpPr>
+        <p:spPr>
+          <a:xfrm>
+            <a:off x="1664208" y="2221992"/>
+            <a:ext cx="4279392" cy="146304"/>
+          </a:xfrm>
+          <a:prstGeom prst="rect">
+            <a:avLst/>
+          </a:prstGeom>
+          <a:noFill/>
+        </p:spPr>
+        <p:txBody>
+          <a:bodyPr wrap="none" lIns="18288" rIns="18288" tIns="9144" bIns="9144" anchor="t">
+            <a:spAutoFit/>
+          </a:bodyPr>
+          <a:lstStyle/>
+          <a:p>
+            <a:pPr algn="l"/>
+            <a:r>
+              <a:rPr sz="860" b="0">
+                <a:solidFill>
+                  <a:srgbClr val="475569"/>
+                </a:solidFill>
+                <a:latin typeface="Consolas"/>
+              </a:rPr>
+              <a:t>git clone https://github.com/DiegoA199/Chompas_Mabel.git</a:t>
+            </a:r>
+          </a:p>
+        </p:txBody>
+      </p:sp>
+      <p:sp>
+        <p:nvSpPr>
+          <p:cNvPr id="16" name="Oval 15"/>
           <p:cNvSpPr/>
           <p:nvPr/>
         </p:nvSpPr>
         <p:spPr>
           <a:xfrm>
-            <a:off x="914400" y="2194560"/>
-            <a:ext cx="73152" cy="685800"/>
-          </a:xfrm>
-          <a:prstGeom prst="rect">
+            <a:off x="932688" y="2633472"/>
+            <a:ext cx="420624" cy="420624"/>
+          </a:xfrm>
+          <a:prstGeom prst="ellipse">
             <a:avLst/>
           </a:prstGeom>
           <a:solidFill>
@@ -6009,22 +6274,57 @@
       </p:sp>
       <p:sp>
         <p:nvSpPr>
-          <p:cNvPr id="14" name="TextBox 13"/>
-          <p:cNvSpPr txBox="1"/>
-          <p:nvPr/>
-        </p:nvSpPr>
-        <p:spPr>
-          <a:xfrm>
-            <a:off x="1115568" y="2359152"/>
-            <a:ext cx="10012680" cy="274320"/>
-          </a:xfrm>
-          <a:prstGeom prst="rect">
-            <a:avLst/>
-          </a:prstGeom>
-          <a:noFill/>
-        </p:spPr>
-        <p:txBody>
-          <a:bodyPr wrap="square">
+          <p:cNvPr id="17" name="TextBox 16"/>
+          <p:cNvSpPr txBox="1"/>
+          <p:nvPr/>
+        </p:nvSpPr>
+        <p:spPr>
+          <a:xfrm>
+            <a:off x="932688" y="2706624"/>
+            <a:ext cx="420624" cy="164592"/>
+          </a:xfrm>
+          <a:prstGeom prst="rect">
+            <a:avLst/>
+          </a:prstGeom>
+          <a:noFill/>
+        </p:spPr>
+        <p:txBody>
+          <a:bodyPr wrap="none" lIns="18288" rIns="18288" tIns="9144" bIns="9144" anchor="t">
+            <a:spAutoFit/>
+          </a:bodyPr>
+          <a:lstStyle/>
+          <a:p>
+            <a:pPr algn="ctr"/>
+            <a:r>
+              <a:rPr sz="1000" b="1">
+                <a:solidFill>
+                  <a:srgbClr val="FFFFFF"/>
+                </a:solidFill>
+                <a:latin typeface="Aptos"/>
+              </a:rPr>
+              <a:t>2</a:t>
+            </a:r>
+          </a:p>
+        </p:txBody>
+      </p:sp>
+      <p:sp>
+        <p:nvSpPr>
+          <p:cNvPr id="18" name="TextBox 17"/>
+          <p:cNvSpPr txBox="1"/>
+          <p:nvPr/>
+        </p:nvSpPr>
+        <p:spPr>
+          <a:xfrm>
+            <a:off x="1536192" y="2624328"/>
+            <a:ext cx="4526280" cy="246888"/>
+          </a:xfrm>
+          <a:prstGeom prst="rect">
+            <a:avLst/>
+          </a:prstGeom>
+          <a:noFill/>
+        </p:spPr>
+        <p:txBody>
+          <a:bodyPr wrap="none" lIns="18288" rIns="18288" tIns="9144" bIns="9144" anchor="t">
             <a:spAutoFit/>
           </a:bodyPr>
           <a:lstStyle/>
@@ -6035,68 +6335,35 @@
                 <a:solidFill>
                   <a:srgbClr val="0F172A"/>
                 </a:solidFill>
-                <a:latin typeface="Arial"/>
-              </a:rPr>
-              <a:t>Paso 2</a:t>
-            </a:r>
-          </a:p>
-        </p:txBody>
-      </p:sp>
-      <p:sp>
-        <p:nvSpPr>
-          <p:cNvPr id="15" name="TextBox 14"/>
-          <p:cNvSpPr txBox="1"/>
-          <p:nvPr/>
-        </p:nvSpPr>
-        <p:spPr>
-          <a:xfrm>
-            <a:off x="1115568" y="2697480"/>
-            <a:ext cx="10012680" cy="91439"/>
-          </a:xfrm>
-          <a:prstGeom prst="rect">
-            <a:avLst/>
-          </a:prstGeom>
-          <a:noFill/>
-        </p:spPr>
-        <p:txBody>
-          <a:bodyPr wrap="square">
-            <a:spAutoFit/>
-          </a:bodyPr>
-          <a:lstStyle/>
-          <a:p>
-            <a:pPr algn="l"/>
-            <a:r>
-              <a:rPr sz="1080" b="0">
-                <a:solidFill>
-                  <a:srgbClr val="334155"/>
-                </a:solidFill>
-                <a:latin typeface="Arial"/>
-              </a:rPr>
-              <a:t>docker compose up -d mysql</a:t>
-            </a:r>
-          </a:p>
-        </p:txBody>
-      </p:sp>
-      <p:sp>
-        <p:nvSpPr>
-          <p:cNvPr id="16" name="Rounded Rectangle 15"/>
+                <a:latin typeface="Aptos"/>
+              </a:rPr>
+              <a:t>Levantar MySQL</a:t>
+            </a:r>
+          </a:p>
+        </p:txBody>
+      </p:sp>
+      <p:sp>
+        <p:nvSpPr>
+          <p:cNvPr id="19" name="Rounded Rectangle 18"/>
           <p:cNvSpPr/>
           <p:nvPr/>
         </p:nvSpPr>
         <p:spPr>
           <a:xfrm>
-            <a:off x="914400" y="3154680"/>
-            <a:ext cx="10332720" cy="685800"/>
+            <a:off x="1536192" y="2944368"/>
+            <a:ext cx="4526280" cy="347472"/>
           </a:xfrm>
           <a:prstGeom prst="roundRect">
-            <a:avLst/>
-          </a:prstGeom>
-          <a:solidFill>
-            <a:srgbClr val="FFFFFF"/>
-          </a:solidFill>
-          <a:ln w="15240">
+            <a:avLst>
+              <a:gd name="adj" fmla="val 12000"/>
+            </a:avLst>
+          </a:prstGeom>
+          <a:solidFill>
+            <a:srgbClr val="F1F5F9"/>
+          </a:solidFill>
+          <a:ln w="10160">
             <a:solidFill>
-              <a:srgbClr val="CBD5E1"/>
+              <a:srgbClr val="E2E8F0"/>
             </a:solidFill>
           </a:ln>
         </p:spPr>
@@ -6124,16 +6391,51 @@
       </p:sp>
       <p:sp>
         <p:nvSpPr>
-          <p:cNvPr id="17" name="Rectangle 16"/>
+          <p:cNvPr id="20" name="TextBox 19"/>
+          <p:cNvSpPr txBox="1"/>
+          <p:nvPr/>
+        </p:nvSpPr>
+        <p:spPr>
+          <a:xfrm>
+            <a:off x="1664208" y="3026664"/>
+            <a:ext cx="4279392" cy="146304"/>
+          </a:xfrm>
+          <a:prstGeom prst="rect">
+            <a:avLst/>
+          </a:prstGeom>
+          <a:noFill/>
+        </p:spPr>
+        <p:txBody>
+          <a:bodyPr wrap="none" lIns="18288" rIns="18288" tIns="9144" bIns="9144" anchor="t">
+            <a:spAutoFit/>
+          </a:bodyPr>
+          <a:lstStyle/>
+          <a:p>
+            <a:pPr algn="l"/>
+            <a:r>
+              <a:rPr sz="860" b="0">
+                <a:solidFill>
+                  <a:srgbClr val="475569"/>
+                </a:solidFill>
+                <a:latin typeface="Consolas"/>
+              </a:rPr>
+              <a:t>docker compose up -d mysql</a:t>
+            </a:r>
+          </a:p>
+        </p:txBody>
+      </p:sp>
+      <p:sp>
+        <p:nvSpPr>
+          <p:cNvPr id="21" name="Oval 20"/>
           <p:cNvSpPr/>
           <p:nvPr/>
         </p:nvSpPr>
         <p:spPr>
           <a:xfrm>
-            <a:off x="914400" y="3154680"/>
-            <a:ext cx="73152" cy="685800"/>
-          </a:xfrm>
-          <a:prstGeom prst="rect">
+            <a:off x="932688" y="3438144"/>
+            <a:ext cx="420624" cy="420624"/>
+          </a:xfrm>
+          <a:prstGeom prst="ellipse">
             <a:avLst/>
           </a:prstGeom>
           <a:solidFill>
@@ -6167,22 +6469,57 @@
       </p:sp>
       <p:sp>
         <p:nvSpPr>
-          <p:cNvPr id="18" name="TextBox 17"/>
-          <p:cNvSpPr txBox="1"/>
-          <p:nvPr/>
-        </p:nvSpPr>
-        <p:spPr>
-          <a:xfrm>
-            <a:off x="1115568" y="3319272"/>
-            <a:ext cx="10012680" cy="274320"/>
-          </a:xfrm>
-          <a:prstGeom prst="rect">
-            <a:avLst/>
-          </a:prstGeom>
-          <a:noFill/>
-        </p:spPr>
-        <p:txBody>
-          <a:bodyPr wrap="square">
+          <p:cNvPr id="22" name="TextBox 21"/>
+          <p:cNvSpPr txBox="1"/>
+          <p:nvPr/>
+        </p:nvSpPr>
+        <p:spPr>
+          <a:xfrm>
+            <a:off x="932688" y="3511296"/>
+            <a:ext cx="420624" cy="164592"/>
+          </a:xfrm>
+          <a:prstGeom prst="rect">
+            <a:avLst/>
+          </a:prstGeom>
+          <a:noFill/>
+        </p:spPr>
+        <p:txBody>
+          <a:bodyPr wrap="none" lIns="18288" rIns="18288" tIns="9144" bIns="9144" anchor="t">
+            <a:spAutoFit/>
+          </a:bodyPr>
+          <a:lstStyle/>
+          <a:p>
+            <a:pPr algn="ctr"/>
+            <a:r>
+              <a:rPr sz="1000" b="1">
+                <a:solidFill>
+                  <a:srgbClr val="FFFFFF"/>
+                </a:solidFill>
+                <a:latin typeface="Aptos"/>
+              </a:rPr>
+              <a:t>3</a:t>
+            </a:r>
+          </a:p>
+        </p:txBody>
+      </p:sp>
+      <p:sp>
+        <p:nvSpPr>
+          <p:cNvPr id="23" name="TextBox 22"/>
+          <p:cNvSpPr txBox="1"/>
+          <p:nvPr/>
+        </p:nvSpPr>
+        <p:spPr>
+          <a:xfrm>
+            <a:off x="1536192" y="3429000"/>
+            <a:ext cx="4526280" cy="246888"/>
+          </a:xfrm>
+          <a:prstGeom prst="rect">
+            <a:avLst/>
+          </a:prstGeom>
+          <a:noFill/>
+        </p:spPr>
+        <p:txBody>
+          <a:bodyPr wrap="none" lIns="18288" rIns="18288" tIns="9144" bIns="9144" anchor="t">
             <a:spAutoFit/>
           </a:bodyPr>
           <a:lstStyle/>
@@ -6193,68 +6530,35 @@
                 <a:solidFill>
                   <a:srgbClr val="0F172A"/>
                 </a:solidFill>
-                <a:latin typeface="Arial"/>
-              </a:rPr>
-              <a:t>Paso 3</a:t>
-            </a:r>
-          </a:p>
-        </p:txBody>
-      </p:sp>
-      <p:sp>
-        <p:nvSpPr>
-          <p:cNvPr id="19" name="TextBox 18"/>
-          <p:cNvSpPr txBox="1"/>
-          <p:nvPr/>
-        </p:nvSpPr>
-        <p:spPr>
-          <a:xfrm>
-            <a:off x="1115568" y="3657600"/>
-            <a:ext cx="10012680" cy="91439"/>
-          </a:xfrm>
-          <a:prstGeom prst="rect">
-            <a:avLst/>
-          </a:prstGeom>
-          <a:noFill/>
-        </p:spPr>
-        <p:txBody>
-          <a:bodyPr wrap="square">
-            <a:spAutoFit/>
-          </a:bodyPr>
-          <a:lstStyle/>
-          <a:p>
-            <a:pPr algn="l"/>
-            <a:r>
-              <a:rPr sz="1080" b="0">
-                <a:solidFill>
-                  <a:srgbClr val="334155"/>
-                </a:solidFill>
-                <a:latin typeface="Arial"/>
-              </a:rPr>
-              <a:t>cd backend-springboot &amp;&amp; mvn spring-boot:run</a:t>
-            </a:r>
-          </a:p>
-        </p:txBody>
-      </p:sp>
-      <p:sp>
-        <p:nvSpPr>
-          <p:cNvPr id="20" name="Rounded Rectangle 19"/>
+                <a:latin typeface="Aptos"/>
+              </a:rPr>
+              <a:t>Ejecutar backend</a:t>
+            </a:r>
+          </a:p>
+        </p:txBody>
+      </p:sp>
+      <p:sp>
+        <p:nvSpPr>
+          <p:cNvPr id="24" name="Rounded Rectangle 23"/>
           <p:cNvSpPr/>
           <p:nvPr/>
         </p:nvSpPr>
         <p:spPr>
           <a:xfrm>
-            <a:off x="914400" y="4114800"/>
-            <a:ext cx="10332720" cy="685800"/>
+            <a:off x="1536192" y="3749039"/>
+            <a:ext cx="4526280" cy="347472"/>
           </a:xfrm>
           <a:prstGeom prst="roundRect">
-            <a:avLst/>
-          </a:prstGeom>
-          <a:solidFill>
-            <a:srgbClr val="FFFFFF"/>
-          </a:solidFill>
-          <a:ln w="15240">
+            <a:avLst>
+              <a:gd name="adj" fmla="val 12000"/>
+            </a:avLst>
+          </a:prstGeom>
+          <a:solidFill>
+            <a:srgbClr val="F1F5F9"/>
+          </a:solidFill>
+          <a:ln w="10160">
             <a:solidFill>
-              <a:srgbClr val="CBD5E1"/>
+              <a:srgbClr val="E2E8F0"/>
             </a:solidFill>
           </a:ln>
         </p:spPr>
@@ -6282,16 +6586,51 @@
       </p:sp>
       <p:sp>
         <p:nvSpPr>
-          <p:cNvPr id="21" name="Rectangle 20"/>
+          <p:cNvPr id="25" name="TextBox 24"/>
+          <p:cNvSpPr txBox="1"/>
+          <p:nvPr/>
+        </p:nvSpPr>
+        <p:spPr>
+          <a:xfrm>
+            <a:off x="1664208" y="3831335"/>
+            <a:ext cx="4279392" cy="146304"/>
+          </a:xfrm>
+          <a:prstGeom prst="rect">
+            <a:avLst/>
+          </a:prstGeom>
+          <a:noFill/>
+        </p:spPr>
+        <p:txBody>
+          <a:bodyPr wrap="none" lIns="18288" rIns="18288" tIns="9144" bIns="9144" anchor="t">
+            <a:spAutoFit/>
+          </a:bodyPr>
+          <a:lstStyle/>
+          <a:p>
+            <a:pPr algn="l"/>
+            <a:r>
+              <a:rPr sz="860" b="0">
+                <a:solidFill>
+                  <a:srgbClr val="475569"/>
+                </a:solidFill>
+                <a:latin typeface="Consolas"/>
+              </a:rPr>
+              <a:t>cd backend-springboot &amp;&amp; mvn spring-boot:run</a:t>
+            </a:r>
+          </a:p>
+        </p:txBody>
+      </p:sp>
+      <p:sp>
+        <p:nvSpPr>
+          <p:cNvPr id="26" name="Oval 25"/>
           <p:cNvSpPr/>
           <p:nvPr/>
         </p:nvSpPr>
         <p:spPr>
           <a:xfrm>
-            <a:off x="914400" y="4114800"/>
-            <a:ext cx="73152" cy="685800"/>
-          </a:xfrm>
-          <a:prstGeom prst="rect">
+            <a:off x="932688" y="4242816"/>
+            <a:ext cx="420624" cy="420624"/>
+          </a:xfrm>
+          <a:prstGeom prst="ellipse">
             <a:avLst/>
           </a:prstGeom>
           <a:solidFill>
@@ -6325,22 +6664,57 @@
       </p:sp>
       <p:sp>
         <p:nvSpPr>
-          <p:cNvPr id="22" name="TextBox 21"/>
-          <p:cNvSpPr txBox="1"/>
-          <p:nvPr/>
-        </p:nvSpPr>
-        <p:spPr>
-          <a:xfrm>
-            <a:off x="1115568" y="4279392"/>
-            <a:ext cx="10012680" cy="274320"/>
-          </a:xfrm>
-          <a:prstGeom prst="rect">
-            <a:avLst/>
-          </a:prstGeom>
-          <a:noFill/>
-        </p:spPr>
-        <p:txBody>
-          <a:bodyPr wrap="square">
+          <p:cNvPr id="27" name="TextBox 26"/>
+          <p:cNvSpPr txBox="1"/>
+          <p:nvPr/>
+        </p:nvSpPr>
+        <p:spPr>
+          <a:xfrm>
+            <a:off x="932688" y="4315968"/>
+            <a:ext cx="420624" cy="164592"/>
+          </a:xfrm>
+          <a:prstGeom prst="rect">
+            <a:avLst/>
+          </a:prstGeom>
+          <a:noFill/>
+        </p:spPr>
+        <p:txBody>
+          <a:bodyPr wrap="none" lIns="18288" rIns="18288" tIns="9144" bIns="9144" anchor="t">
+            <a:spAutoFit/>
+          </a:bodyPr>
+          <a:lstStyle/>
+          <a:p>
+            <a:pPr algn="ctr"/>
+            <a:r>
+              <a:rPr sz="1000" b="1">
+                <a:solidFill>
+                  <a:srgbClr val="FFFFFF"/>
+                </a:solidFill>
+                <a:latin typeface="Aptos"/>
+              </a:rPr>
+              <a:t>4</a:t>
+            </a:r>
+          </a:p>
+        </p:txBody>
+      </p:sp>
+      <p:sp>
+        <p:nvSpPr>
+          <p:cNvPr id="28" name="TextBox 27"/>
+          <p:cNvSpPr txBox="1"/>
+          <p:nvPr/>
+        </p:nvSpPr>
+        <p:spPr>
+          <a:xfrm>
+            <a:off x="1536192" y="4233672"/>
+            <a:ext cx="4526280" cy="246888"/>
+          </a:xfrm>
+          <a:prstGeom prst="rect">
+            <a:avLst/>
+          </a:prstGeom>
+          <a:noFill/>
+        </p:spPr>
+        <p:txBody>
+          <a:bodyPr wrap="none" lIns="18288" rIns="18288" tIns="9144" bIns="9144" anchor="t">
             <a:spAutoFit/>
           </a:bodyPr>
           <a:lstStyle/>
@@ -6351,68 +6725,35 @@
                 <a:solidFill>
                   <a:srgbClr val="0F172A"/>
                 </a:solidFill>
-                <a:latin typeface="Arial"/>
-              </a:rPr>
-              <a:t>Paso 4</a:t>
-            </a:r>
-          </a:p>
-        </p:txBody>
-      </p:sp>
-      <p:sp>
-        <p:nvSpPr>
-          <p:cNvPr id="23" name="TextBox 22"/>
-          <p:cNvSpPr txBox="1"/>
-          <p:nvPr/>
-        </p:nvSpPr>
-        <p:spPr>
-          <a:xfrm>
-            <a:off x="1115568" y="4617720"/>
-            <a:ext cx="10012680" cy="91439"/>
-          </a:xfrm>
-          <a:prstGeom prst="rect">
-            <a:avLst/>
-          </a:prstGeom>
-          <a:noFill/>
-        </p:spPr>
-        <p:txBody>
-          <a:bodyPr wrap="square">
-            <a:spAutoFit/>
-          </a:bodyPr>
-          <a:lstStyle/>
-          <a:p>
-            <a:pPr algn="l"/>
-            <a:r>
-              <a:rPr sz="1080" b="0">
-                <a:solidFill>
-                  <a:srgbClr val="334155"/>
-                </a:solidFill>
-                <a:latin typeface="Arial"/>
-              </a:rPr>
-              <a:t>cd frontend-angular &amp;&amp; npm install &amp;&amp; npm start</a:t>
-            </a:r>
-          </a:p>
-        </p:txBody>
-      </p:sp>
-      <p:sp>
-        <p:nvSpPr>
-          <p:cNvPr id="24" name="Rounded Rectangle 23"/>
+                <a:latin typeface="Aptos"/>
+              </a:rPr>
+              <a:t>Ejecutar frontend</a:t>
+            </a:r>
+          </a:p>
+        </p:txBody>
+      </p:sp>
+      <p:sp>
+        <p:nvSpPr>
+          <p:cNvPr id="29" name="Rounded Rectangle 28"/>
           <p:cNvSpPr/>
           <p:nvPr/>
         </p:nvSpPr>
         <p:spPr>
           <a:xfrm>
-            <a:off x="914400" y="5349240"/>
-            <a:ext cx="10332720" cy="685800"/>
+            <a:off x="1536192" y="4553712"/>
+            <a:ext cx="4526280" cy="347472"/>
           </a:xfrm>
           <a:prstGeom prst="roundRect">
-            <a:avLst/>
-          </a:prstGeom>
-          <a:solidFill>
-            <a:srgbClr val="FFFFFF"/>
-          </a:solidFill>
-          <a:ln w="15240">
+            <a:avLst>
+              <a:gd name="adj" fmla="val 12000"/>
+            </a:avLst>
+          </a:prstGeom>
+          <a:solidFill>
+            <a:srgbClr val="F1F5F9"/>
+          </a:solidFill>
+          <a:ln w="10160">
             <a:solidFill>
-              <a:srgbClr val="CBD5E1"/>
+              <a:srgbClr val="E2E8F0"/>
             </a:solidFill>
           </a:ln>
         </p:spPr>
@@ -6440,23 +6781,62 @@
       </p:sp>
       <p:sp>
         <p:nvSpPr>
-          <p:cNvPr id="25" name="Rectangle 24"/>
+          <p:cNvPr id="30" name="TextBox 29"/>
+          <p:cNvSpPr txBox="1"/>
+          <p:nvPr/>
+        </p:nvSpPr>
+        <p:spPr>
+          <a:xfrm>
+            <a:off x="1664208" y="4636007"/>
+            <a:ext cx="4279392" cy="146304"/>
+          </a:xfrm>
+          <a:prstGeom prst="rect">
+            <a:avLst/>
+          </a:prstGeom>
+          <a:noFill/>
+        </p:spPr>
+        <p:txBody>
+          <a:bodyPr wrap="none" lIns="18288" rIns="18288" tIns="9144" bIns="9144" anchor="t">
+            <a:spAutoFit/>
+          </a:bodyPr>
+          <a:lstStyle/>
+          <a:p>
+            <a:pPr algn="l"/>
+            <a:r>
+              <a:rPr sz="860" b="0">
+                <a:solidFill>
+                  <a:srgbClr val="475569"/>
+                </a:solidFill>
+                <a:latin typeface="Consolas"/>
+              </a:rPr>
+              <a:t>cd frontend-angular &amp;&amp; npm install &amp;&amp; npm start</a:t>
+            </a:r>
+          </a:p>
+        </p:txBody>
+      </p:sp>
+      <p:sp>
+        <p:nvSpPr>
+          <p:cNvPr id="31" name="Rounded Rectangle 30"/>
           <p:cNvSpPr/>
           <p:nvPr/>
         </p:nvSpPr>
         <p:spPr>
           <a:xfrm>
-            <a:off x="914400" y="5349240"/>
-            <a:ext cx="73152" cy="685800"/>
-          </a:xfrm>
-          <a:prstGeom prst="rect">
-            <a:avLst/>
-          </a:prstGeom>
-          <a:solidFill>
-            <a:srgbClr val="4F46E5"/>
-          </a:solidFill>
-          <a:ln>
-            <a:noFill/>
+            <a:off x="6446520" y="1261872"/>
+            <a:ext cx="4800600" cy="1783080"/>
+          </a:xfrm>
+          <a:prstGeom prst="roundRect">
+            <a:avLst>
+              <a:gd name="adj" fmla="val 8000"/>
+            </a:avLst>
+          </a:prstGeom>
+          <a:solidFill>
+            <a:srgbClr val="FFFFFF"/>
+          </a:solidFill>
+          <a:ln w="12700">
+            <a:solidFill>
+              <a:srgbClr val="CBD5E1"/>
+            </a:solidFill>
           </a:ln>
         </p:spPr>
         <p:style>
@@ -6483,70 +6863,1015 @@
       </p:sp>
       <p:sp>
         <p:nvSpPr>
-          <p:cNvPr id="26" name="TextBox 25"/>
-          <p:cNvSpPr txBox="1"/>
-          <p:nvPr/>
-        </p:nvSpPr>
-        <p:spPr>
-          <a:xfrm>
-            <a:off x="1115568" y="5513831"/>
-            <a:ext cx="10012680" cy="274320"/>
-          </a:xfrm>
-          <a:prstGeom prst="rect">
-            <a:avLst/>
-          </a:prstGeom>
-          <a:noFill/>
-        </p:spPr>
-        <p:txBody>
-          <a:bodyPr wrap="square">
+          <p:cNvPr id="32" name="Rectangle 31"/>
+          <p:cNvSpPr/>
+          <p:nvPr/>
+        </p:nvSpPr>
+        <p:spPr>
+          <a:xfrm>
+            <a:off x="6446520" y="1261872"/>
+            <a:ext cx="73152" cy="1783080"/>
+          </a:xfrm>
+          <a:prstGeom prst="rect">
+            <a:avLst/>
+          </a:prstGeom>
+          <a:solidFill>
+            <a:srgbClr val="4F46E5"/>
+          </a:solidFill>
+          <a:ln>
+            <a:noFill/>
+          </a:ln>
+        </p:spPr>
+        <p:style>
+          <a:lnRef idx="1">
+            <a:schemeClr val="accent1"/>
+          </a:lnRef>
+          <a:fillRef idx="3">
+            <a:schemeClr val="accent1"/>
+          </a:fillRef>
+          <a:effectRef idx="2">
+            <a:schemeClr val="accent1"/>
+          </a:effectRef>
+          <a:fontRef idx="minor">
+            <a:schemeClr val="lt1"/>
+          </a:fontRef>
+        </p:style>
+        <p:txBody>
+          <a:bodyPr rtlCol="0" anchor="ctr"/>
+          <a:lstStyle/>
+          <a:p>
+            <a:pPr algn="ctr"/>
+          </a:p>
+        </p:txBody>
+      </p:sp>
+      <p:sp>
+        <p:nvSpPr>
+          <p:cNvPr id="33" name="TextBox 32"/>
+          <p:cNvSpPr txBox="1"/>
+          <p:nvPr/>
+        </p:nvSpPr>
+        <p:spPr>
+          <a:xfrm>
+            <a:off x="6675120" y="1426463"/>
+            <a:ext cx="4389120" cy="256032"/>
+          </a:xfrm>
+          <a:prstGeom prst="rect">
+            <a:avLst/>
+          </a:prstGeom>
+          <a:noFill/>
+        </p:spPr>
+        <p:txBody>
+          <a:bodyPr wrap="none" lIns="18288" rIns="18288" tIns="9144" bIns="9144" anchor="t">
             <a:spAutoFit/>
           </a:bodyPr>
           <a:lstStyle/>
           <a:p>
             <a:pPr algn="l"/>
             <a:r>
-              <a:rPr sz="1500" b="1">
+              <a:rPr sz="1300" b="1">
                 <a:solidFill>
                   <a:srgbClr val="0F172A"/>
                 </a:solidFill>
-                <a:latin typeface="Arial"/>
-              </a:rPr>
-              <a:t>Credenciales demo</a:t>
-            </a:r>
-          </a:p>
-        </p:txBody>
-      </p:sp>
-      <p:sp>
-        <p:nvSpPr>
-          <p:cNvPr id="27" name="TextBox 26"/>
-          <p:cNvSpPr txBox="1"/>
-          <p:nvPr/>
-        </p:nvSpPr>
-        <p:spPr>
-          <a:xfrm>
-            <a:off x="1115568" y="5852159"/>
-            <a:ext cx="10012680" cy="91439"/>
-          </a:xfrm>
-          <a:prstGeom prst="rect">
-            <a:avLst/>
-          </a:prstGeom>
-          <a:noFill/>
-        </p:spPr>
-        <p:txBody>
-          <a:bodyPr wrap="square">
+                <a:latin typeface="Aptos"/>
+              </a:rPr>
+              <a:t>Requisitos de la PC</a:t>
+            </a:r>
+          </a:p>
+        </p:txBody>
+      </p:sp>
+      <p:sp>
+        <p:nvSpPr>
+          <p:cNvPr id="34" name="Rounded Rectangle 33"/>
+          <p:cNvSpPr/>
+          <p:nvPr/>
+        </p:nvSpPr>
+        <p:spPr>
+          <a:xfrm>
+            <a:off x="6748272" y="1737360"/>
+            <a:ext cx="685800" cy="256032"/>
+          </a:xfrm>
+          <a:prstGeom prst="roundRect">
+            <a:avLst>
+              <a:gd name="adj" fmla="val 18000"/>
+            </a:avLst>
+          </a:prstGeom>
+          <a:solidFill>
+            <a:srgbClr val="E11D48"/>
+          </a:solidFill>
+          <a:ln>
+            <a:noFill/>
+          </a:ln>
+        </p:spPr>
+        <p:style>
+          <a:lnRef idx="1">
+            <a:schemeClr val="accent1"/>
+          </a:lnRef>
+          <a:fillRef idx="3">
+            <a:schemeClr val="accent1"/>
+          </a:fillRef>
+          <a:effectRef idx="2">
+            <a:schemeClr val="accent1"/>
+          </a:effectRef>
+          <a:fontRef idx="minor">
+            <a:schemeClr val="lt1"/>
+          </a:fontRef>
+        </p:style>
+        <p:txBody>
+          <a:bodyPr rtlCol="0" anchor="ctr"/>
+          <a:lstStyle/>
+          <a:p>
+            <a:pPr algn="ctr"/>
+          </a:p>
+        </p:txBody>
+      </p:sp>
+      <p:sp>
+        <p:nvSpPr>
+          <p:cNvPr id="35" name="TextBox 34"/>
+          <p:cNvSpPr txBox="1"/>
+          <p:nvPr/>
+        </p:nvSpPr>
+        <p:spPr>
+          <a:xfrm>
+            <a:off x="6784848" y="1787651"/>
+            <a:ext cx="603504" cy="109728"/>
+          </a:xfrm>
+          <a:prstGeom prst="rect">
+            <a:avLst/>
+          </a:prstGeom>
+          <a:noFill/>
+        </p:spPr>
+        <p:txBody>
+          <a:bodyPr wrap="none" lIns="18288" rIns="18288" tIns="9144" bIns="9144" anchor="t">
+            <a:spAutoFit/>
+          </a:bodyPr>
+          <a:lstStyle/>
+          <a:p>
+            <a:pPr algn="ctr"/>
+            <a:r>
+              <a:rPr sz="720" b="1">
+                <a:solidFill>
+                  <a:srgbClr val="FFFFFF"/>
+                </a:solidFill>
+                <a:latin typeface="Aptos"/>
+              </a:rPr>
+              <a:t>Java</a:t>
+            </a:r>
+          </a:p>
+        </p:txBody>
+      </p:sp>
+      <p:sp>
+        <p:nvSpPr>
+          <p:cNvPr id="36" name="TextBox 35"/>
+          <p:cNvSpPr txBox="1"/>
+          <p:nvPr/>
+        </p:nvSpPr>
+        <p:spPr>
+          <a:xfrm>
+            <a:off x="7571231" y="1728216"/>
+            <a:ext cx="3291840" cy="164592"/>
+          </a:xfrm>
+          <a:prstGeom prst="rect">
+            <a:avLst/>
+          </a:prstGeom>
+          <a:noFill/>
+        </p:spPr>
+        <p:txBody>
+          <a:bodyPr wrap="none" lIns="18288" rIns="18288" tIns="9144" bIns="9144" anchor="t">
             <a:spAutoFit/>
           </a:bodyPr>
           <a:lstStyle/>
           <a:p>
             <a:pPr algn="l"/>
             <a:r>
-              <a:rPr sz="1080" b="0">
-                <a:solidFill>
-                  <a:srgbClr val="334155"/>
-                </a:solidFill>
-                <a:latin typeface="Arial"/>
+              <a:rPr sz="969" b="1">
+                <a:solidFill>
+                  <a:srgbClr val="0F172A"/>
+                </a:solidFill>
+                <a:latin typeface="Aptos"/>
+              </a:rPr>
+              <a:t>Java 21 + Maven</a:t>
+            </a:r>
+          </a:p>
+        </p:txBody>
+      </p:sp>
+      <p:sp>
+        <p:nvSpPr>
+          <p:cNvPr id="37" name="TextBox 36"/>
+          <p:cNvSpPr txBox="1"/>
+          <p:nvPr/>
+        </p:nvSpPr>
+        <p:spPr>
+          <a:xfrm>
+            <a:off x="7571231" y="1929384"/>
+            <a:ext cx="3291840" cy="146304"/>
+          </a:xfrm>
+          <a:prstGeom prst="rect">
+            <a:avLst/>
+          </a:prstGeom>
+          <a:noFill/>
+        </p:spPr>
+        <p:txBody>
+          <a:bodyPr wrap="none" lIns="18288" rIns="18288" tIns="9144" bIns="9144" anchor="t">
+            <a:spAutoFit/>
+          </a:bodyPr>
+          <a:lstStyle/>
+          <a:p>
+            <a:pPr algn="l"/>
+            <a:r>
+              <a:rPr sz="780" b="0">
+                <a:solidFill>
+                  <a:srgbClr val="475569"/>
+                </a:solidFill>
+                <a:latin typeface="Aptos"/>
+              </a:rPr>
+              <a:t>Compila y ejecuta Spring Boot.</a:t>
+            </a:r>
+          </a:p>
+        </p:txBody>
+      </p:sp>
+      <p:sp>
+        <p:nvSpPr>
+          <p:cNvPr id="38" name="Rounded Rectangle 37"/>
+          <p:cNvSpPr/>
+          <p:nvPr/>
+        </p:nvSpPr>
+        <p:spPr>
+          <a:xfrm>
+            <a:off x="6748272" y="2167128"/>
+            <a:ext cx="685800" cy="256032"/>
+          </a:xfrm>
+          <a:prstGeom prst="roundRect">
+            <a:avLst>
+              <a:gd name="adj" fmla="val 18000"/>
+            </a:avLst>
+          </a:prstGeom>
+          <a:solidFill>
+            <a:srgbClr val="2563EB"/>
+          </a:solidFill>
+          <a:ln>
+            <a:noFill/>
+          </a:ln>
+        </p:spPr>
+        <p:style>
+          <a:lnRef idx="1">
+            <a:schemeClr val="accent1"/>
+          </a:lnRef>
+          <a:fillRef idx="3">
+            <a:schemeClr val="accent1"/>
+          </a:fillRef>
+          <a:effectRef idx="2">
+            <a:schemeClr val="accent1"/>
+          </a:effectRef>
+          <a:fontRef idx="minor">
+            <a:schemeClr val="lt1"/>
+          </a:fontRef>
+        </p:style>
+        <p:txBody>
+          <a:bodyPr rtlCol="0" anchor="ctr"/>
+          <a:lstStyle/>
+          <a:p>
+            <a:pPr algn="ctr"/>
+          </a:p>
+        </p:txBody>
+      </p:sp>
+      <p:sp>
+        <p:nvSpPr>
+          <p:cNvPr id="39" name="TextBox 38"/>
+          <p:cNvSpPr txBox="1"/>
+          <p:nvPr/>
+        </p:nvSpPr>
+        <p:spPr>
+          <a:xfrm>
+            <a:off x="6784848" y="2217420"/>
+            <a:ext cx="603504" cy="109728"/>
+          </a:xfrm>
+          <a:prstGeom prst="rect">
+            <a:avLst/>
+          </a:prstGeom>
+          <a:noFill/>
+        </p:spPr>
+        <p:txBody>
+          <a:bodyPr wrap="none" lIns="18288" rIns="18288" tIns="9144" bIns="9144" anchor="t">
+            <a:spAutoFit/>
+          </a:bodyPr>
+          <a:lstStyle/>
+          <a:p>
+            <a:pPr algn="ctr"/>
+            <a:r>
+              <a:rPr sz="720" b="1">
+                <a:solidFill>
+                  <a:srgbClr val="FFFFFF"/>
+                </a:solidFill>
+                <a:latin typeface="Aptos"/>
+              </a:rPr>
+              <a:t>Node.js</a:t>
+            </a:r>
+          </a:p>
+        </p:txBody>
+      </p:sp>
+      <p:sp>
+        <p:nvSpPr>
+          <p:cNvPr id="40" name="TextBox 39"/>
+          <p:cNvSpPr txBox="1"/>
+          <p:nvPr/>
+        </p:nvSpPr>
+        <p:spPr>
+          <a:xfrm>
+            <a:off x="7571231" y="2157984"/>
+            <a:ext cx="3291840" cy="164592"/>
+          </a:xfrm>
+          <a:prstGeom prst="rect">
+            <a:avLst/>
+          </a:prstGeom>
+          <a:noFill/>
+        </p:spPr>
+        <p:txBody>
+          <a:bodyPr wrap="none" lIns="18288" rIns="18288" tIns="9144" bIns="9144" anchor="t">
+            <a:spAutoFit/>
+          </a:bodyPr>
+          <a:lstStyle/>
+          <a:p>
+            <a:pPr algn="l"/>
+            <a:r>
+              <a:rPr sz="969" b="1">
+                <a:solidFill>
+                  <a:srgbClr val="0F172A"/>
+                </a:solidFill>
+                <a:latin typeface="Aptos"/>
+              </a:rPr>
+              <a:t>Node.js + npm</a:t>
+            </a:r>
+          </a:p>
+        </p:txBody>
+      </p:sp>
+      <p:sp>
+        <p:nvSpPr>
+          <p:cNvPr id="41" name="TextBox 40"/>
+          <p:cNvSpPr txBox="1"/>
+          <p:nvPr/>
+        </p:nvSpPr>
+        <p:spPr>
+          <a:xfrm>
+            <a:off x="7571231" y="2359152"/>
+            <a:ext cx="3291840" cy="146304"/>
+          </a:xfrm>
+          <a:prstGeom prst="rect">
+            <a:avLst/>
+          </a:prstGeom>
+          <a:noFill/>
+        </p:spPr>
+        <p:txBody>
+          <a:bodyPr wrap="none" lIns="18288" rIns="18288" tIns="9144" bIns="9144" anchor="t">
+            <a:spAutoFit/>
+          </a:bodyPr>
+          <a:lstStyle/>
+          <a:p>
+            <a:pPr algn="l"/>
+            <a:r>
+              <a:rPr sz="780" b="0">
+                <a:solidFill>
+                  <a:srgbClr val="475569"/>
+                </a:solidFill>
+                <a:latin typeface="Aptos"/>
+              </a:rPr>
+              <a:t>Instala y arranca Angular.</a:t>
+            </a:r>
+          </a:p>
+        </p:txBody>
+      </p:sp>
+      <p:sp>
+        <p:nvSpPr>
+          <p:cNvPr id="42" name="Rounded Rectangle 41"/>
+          <p:cNvSpPr/>
+          <p:nvPr/>
+        </p:nvSpPr>
+        <p:spPr>
+          <a:xfrm>
+            <a:off x="6748272" y="2596896"/>
+            <a:ext cx="685800" cy="256032"/>
+          </a:xfrm>
+          <a:prstGeom prst="roundRect">
+            <a:avLst>
+              <a:gd name="adj" fmla="val 18000"/>
+            </a:avLst>
+          </a:prstGeom>
+          <a:solidFill>
+            <a:srgbClr val="059669"/>
+          </a:solidFill>
+          <a:ln>
+            <a:noFill/>
+          </a:ln>
+        </p:spPr>
+        <p:style>
+          <a:lnRef idx="1">
+            <a:schemeClr val="accent1"/>
+          </a:lnRef>
+          <a:fillRef idx="3">
+            <a:schemeClr val="accent1"/>
+          </a:fillRef>
+          <a:effectRef idx="2">
+            <a:schemeClr val="accent1"/>
+          </a:effectRef>
+          <a:fontRef idx="minor">
+            <a:schemeClr val="lt1"/>
+          </a:fontRef>
+        </p:style>
+        <p:txBody>
+          <a:bodyPr rtlCol="0" anchor="ctr"/>
+          <a:lstStyle/>
+          <a:p>
+            <a:pPr algn="ctr"/>
+          </a:p>
+        </p:txBody>
+      </p:sp>
+      <p:sp>
+        <p:nvSpPr>
+          <p:cNvPr id="43" name="TextBox 42"/>
+          <p:cNvSpPr txBox="1"/>
+          <p:nvPr/>
+        </p:nvSpPr>
+        <p:spPr>
+          <a:xfrm>
+            <a:off x="6784848" y="2647188"/>
+            <a:ext cx="603504" cy="109728"/>
+          </a:xfrm>
+          <a:prstGeom prst="rect">
+            <a:avLst/>
+          </a:prstGeom>
+          <a:noFill/>
+        </p:spPr>
+        <p:txBody>
+          <a:bodyPr wrap="none" lIns="18288" rIns="18288" tIns="9144" bIns="9144" anchor="t">
+            <a:spAutoFit/>
+          </a:bodyPr>
+          <a:lstStyle/>
+          <a:p>
+            <a:pPr algn="ctr"/>
+            <a:r>
+              <a:rPr sz="720" b="1">
+                <a:solidFill>
+                  <a:srgbClr val="FFFFFF"/>
+                </a:solidFill>
+                <a:latin typeface="Aptos"/>
+              </a:rPr>
+              <a:t>Docker</a:t>
+            </a:r>
+          </a:p>
+        </p:txBody>
+      </p:sp>
+      <p:sp>
+        <p:nvSpPr>
+          <p:cNvPr id="44" name="TextBox 43"/>
+          <p:cNvSpPr txBox="1"/>
+          <p:nvPr/>
+        </p:nvSpPr>
+        <p:spPr>
+          <a:xfrm>
+            <a:off x="7571231" y="2587752"/>
+            <a:ext cx="3291840" cy="164592"/>
+          </a:xfrm>
+          <a:prstGeom prst="rect">
+            <a:avLst/>
+          </a:prstGeom>
+          <a:noFill/>
+        </p:spPr>
+        <p:txBody>
+          <a:bodyPr wrap="none" lIns="18288" rIns="18288" tIns="9144" bIns="9144" anchor="t">
+            <a:spAutoFit/>
+          </a:bodyPr>
+          <a:lstStyle/>
+          <a:p>
+            <a:pPr algn="l"/>
+            <a:r>
+              <a:rPr sz="969" b="1">
+                <a:solidFill>
+                  <a:srgbClr val="0F172A"/>
+                </a:solidFill>
+                <a:latin typeface="Aptos"/>
+              </a:rPr>
+              <a:t>Docker Desktop</a:t>
+            </a:r>
+          </a:p>
+        </p:txBody>
+      </p:sp>
+      <p:sp>
+        <p:nvSpPr>
+          <p:cNvPr id="45" name="TextBox 44"/>
+          <p:cNvSpPr txBox="1"/>
+          <p:nvPr/>
+        </p:nvSpPr>
+        <p:spPr>
+          <a:xfrm>
+            <a:off x="7571231" y="2788920"/>
+            <a:ext cx="3291840" cy="146304"/>
+          </a:xfrm>
+          <a:prstGeom prst="rect">
+            <a:avLst/>
+          </a:prstGeom>
+          <a:noFill/>
+        </p:spPr>
+        <p:txBody>
+          <a:bodyPr wrap="none" lIns="18288" rIns="18288" tIns="9144" bIns="9144" anchor="t">
+            <a:spAutoFit/>
+          </a:bodyPr>
+          <a:lstStyle/>
+          <a:p>
+            <a:pPr algn="l"/>
+            <a:r>
+              <a:rPr sz="780" b="0">
+                <a:solidFill>
+                  <a:srgbClr val="475569"/>
+                </a:solidFill>
+                <a:latin typeface="Aptos"/>
+              </a:rPr>
+              <a:t>Levanta MySQL con la base inicial.</a:t>
+            </a:r>
+          </a:p>
+        </p:txBody>
+      </p:sp>
+      <p:sp>
+        <p:nvSpPr>
+          <p:cNvPr id="46" name="Rounded Rectangle 45"/>
+          <p:cNvSpPr/>
+          <p:nvPr/>
+        </p:nvSpPr>
+        <p:spPr>
+          <a:xfrm>
+            <a:off x="6446520" y="3310128"/>
+            <a:ext cx="4800600" cy="2029968"/>
+          </a:xfrm>
+          <a:prstGeom prst="roundRect">
+            <a:avLst>
+              <a:gd name="adj" fmla="val 8000"/>
+            </a:avLst>
+          </a:prstGeom>
+          <a:solidFill>
+            <a:srgbClr val="FFFFFF"/>
+          </a:solidFill>
+          <a:ln w="12700">
+            <a:solidFill>
+              <a:srgbClr val="CBD5E1"/>
+            </a:solidFill>
+          </a:ln>
+        </p:spPr>
+        <p:style>
+          <a:lnRef idx="1">
+            <a:schemeClr val="accent1"/>
+          </a:lnRef>
+          <a:fillRef idx="3">
+            <a:schemeClr val="accent1"/>
+          </a:fillRef>
+          <a:effectRef idx="2">
+            <a:schemeClr val="accent1"/>
+          </a:effectRef>
+          <a:fontRef idx="minor">
+            <a:schemeClr val="lt1"/>
+          </a:fontRef>
+        </p:style>
+        <p:txBody>
+          <a:bodyPr rtlCol="0" anchor="ctr"/>
+          <a:lstStyle/>
+          <a:p>
+            <a:pPr algn="ctr"/>
+          </a:p>
+        </p:txBody>
+      </p:sp>
+      <p:sp>
+        <p:nvSpPr>
+          <p:cNvPr id="47" name="Rectangle 46"/>
+          <p:cNvSpPr/>
+          <p:nvPr/>
+        </p:nvSpPr>
+        <p:spPr>
+          <a:xfrm>
+            <a:off x="6446520" y="3310128"/>
+            <a:ext cx="73152" cy="2029968"/>
+          </a:xfrm>
+          <a:prstGeom prst="rect">
+            <a:avLst/>
+          </a:prstGeom>
+          <a:solidFill>
+            <a:srgbClr val="059669"/>
+          </a:solidFill>
+          <a:ln>
+            <a:noFill/>
+          </a:ln>
+        </p:spPr>
+        <p:style>
+          <a:lnRef idx="1">
+            <a:schemeClr val="accent1"/>
+          </a:lnRef>
+          <a:fillRef idx="3">
+            <a:schemeClr val="accent1"/>
+          </a:fillRef>
+          <a:effectRef idx="2">
+            <a:schemeClr val="accent1"/>
+          </a:effectRef>
+          <a:fontRef idx="minor">
+            <a:schemeClr val="lt1"/>
+          </a:fontRef>
+        </p:style>
+        <p:txBody>
+          <a:bodyPr rtlCol="0" anchor="ctr"/>
+          <a:lstStyle/>
+          <a:p>
+            <a:pPr algn="ctr"/>
+          </a:p>
+        </p:txBody>
+      </p:sp>
+      <p:sp>
+        <p:nvSpPr>
+          <p:cNvPr id="48" name="TextBox 47"/>
+          <p:cNvSpPr txBox="1"/>
+          <p:nvPr/>
+        </p:nvSpPr>
+        <p:spPr>
+          <a:xfrm>
+            <a:off x="6675120" y="3474720"/>
+            <a:ext cx="4389120" cy="256032"/>
+          </a:xfrm>
+          <a:prstGeom prst="rect">
+            <a:avLst/>
+          </a:prstGeom>
+          <a:noFill/>
+        </p:spPr>
+        <p:txBody>
+          <a:bodyPr wrap="none" lIns="18288" rIns="18288" tIns="9144" bIns="9144" anchor="t">
+            <a:spAutoFit/>
+          </a:bodyPr>
+          <a:lstStyle/>
+          <a:p>
+            <a:pPr algn="l"/>
+            <a:r>
+              <a:rPr sz="1300" b="1">
+                <a:solidFill>
+                  <a:srgbClr val="0F172A"/>
+                </a:solidFill>
+                <a:latin typeface="Aptos"/>
+              </a:rPr>
+              <a:t>Validación rápida</a:t>
+            </a:r>
+          </a:p>
+        </p:txBody>
+      </p:sp>
+      <p:sp>
+        <p:nvSpPr>
+          <p:cNvPr id="49" name="TextBox 48"/>
+          <p:cNvSpPr txBox="1"/>
+          <p:nvPr/>
+        </p:nvSpPr>
+        <p:spPr>
+          <a:xfrm>
+            <a:off x="6748272" y="3758184"/>
+            <a:ext cx="914400" cy="155448"/>
+          </a:xfrm>
+          <a:prstGeom prst="rect">
+            <a:avLst/>
+          </a:prstGeom>
+          <a:noFill/>
+        </p:spPr>
+        <p:txBody>
+          <a:bodyPr wrap="none" lIns="18288" rIns="18288" tIns="9144" bIns="9144" anchor="t">
+            <a:spAutoFit/>
+          </a:bodyPr>
+          <a:lstStyle/>
+          <a:p>
+            <a:pPr algn="l"/>
+            <a:r>
+              <a:rPr sz="880" b="1">
+                <a:solidFill>
+                  <a:srgbClr val="0F172A"/>
+                </a:solidFill>
+                <a:latin typeface="Aptos"/>
+              </a:rPr>
+              <a:t>Frontend</a:t>
+            </a:r>
+          </a:p>
+        </p:txBody>
+      </p:sp>
+      <p:sp>
+        <p:nvSpPr>
+          <p:cNvPr id="50" name="TextBox 49"/>
+          <p:cNvSpPr txBox="1"/>
+          <p:nvPr/>
+        </p:nvSpPr>
+        <p:spPr>
+          <a:xfrm>
+            <a:off x="7635240" y="3758184"/>
+            <a:ext cx="3429000" cy="155448"/>
+          </a:xfrm>
+          <a:prstGeom prst="rect">
+            <a:avLst/>
+          </a:prstGeom>
+          <a:noFill/>
+        </p:spPr>
+        <p:txBody>
+          <a:bodyPr wrap="none" lIns="18288" rIns="18288" tIns="9144" bIns="9144" anchor="t">
+            <a:spAutoFit/>
+          </a:bodyPr>
+          <a:lstStyle/>
+          <a:p>
+            <a:pPr algn="l"/>
+            <a:r>
+              <a:rPr sz="819" b="0">
+                <a:solidFill>
+                  <a:srgbClr val="475569"/>
+                </a:solidFill>
+                <a:latin typeface="Consolas"/>
+              </a:rPr>
+              <a:t>http://localhost:4200</a:t>
+            </a:r>
+          </a:p>
+        </p:txBody>
+      </p:sp>
+      <p:sp>
+        <p:nvSpPr>
+          <p:cNvPr id="51" name="TextBox 50"/>
+          <p:cNvSpPr txBox="1"/>
+          <p:nvPr/>
+        </p:nvSpPr>
+        <p:spPr>
+          <a:xfrm>
+            <a:off x="6748272" y="4087368"/>
+            <a:ext cx="914400" cy="155448"/>
+          </a:xfrm>
+          <a:prstGeom prst="rect">
+            <a:avLst/>
+          </a:prstGeom>
+          <a:noFill/>
+        </p:spPr>
+        <p:txBody>
+          <a:bodyPr wrap="none" lIns="18288" rIns="18288" tIns="9144" bIns="9144" anchor="t">
+            <a:spAutoFit/>
+          </a:bodyPr>
+          <a:lstStyle/>
+          <a:p>
+            <a:pPr algn="l"/>
+            <a:r>
+              <a:rPr sz="880" b="1">
+                <a:solidFill>
+                  <a:srgbClr val="0F172A"/>
+                </a:solidFill>
+                <a:latin typeface="Aptos"/>
+              </a:rPr>
+              <a:t>Backend</a:t>
+            </a:r>
+          </a:p>
+        </p:txBody>
+      </p:sp>
+      <p:sp>
+        <p:nvSpPr>
+          <p:cNvPr id="52" name="TextBox 51"/>
+          <p:cNvSpPr txBox="1"/>
+          <p:nvPr/>
+        </p:nvSpPr>
+        <p:spPr>
+          <a:xfrm>
+            <a:off x="7635240" y="4087368"/>
+            <a:ext cx="3429000" cy="155448"/>
+          </a:xfrm>
+          <a:prstGeom prst="rect">
+            <a:avLst/>
+          </a:prstGeom>
+          <a:noFill/>
+        </p:spPr>
+        <p:txBody>
+          <a:bodyPr wrap="none" lIns="18288" rIns="18288" tIns="9144" bIns="9144" anchor="t">
+            <a:spAutoFit/>
+          </a:bodyPr>
+          <a:lstStyle/>
+          <a:p>
+            <a:pPr algn="l"/>
+            <a:r>
+              <a:rPr sz="819" b="0">
+                <a:solidFill>
+                  <a:srgbClr val="475569"/>
+                </a:solidFill>
+                <a:latin typeface="Consolas"/>
+              </a:rPr>
+              <a:t>http://localhost:8080/api/productos</a:t>
+            </a:r>
+          </a:p>
+        </p:txBody>
+      </p:sp>
+      <p:sp>
+        <p:nvSpPr>
+          <p:cNvPr id="53" name="TextBox 52"/>
+          <p:cNvSpPr txBox="1"/>
+          <p:nvPr/>
+        </p:nvSpPr>
+        <p:spPr>
+          <a:xfrm>
+            <a:off x="6748272" y="4416552"/>
+            <a:ext cx="914400" cy="155448"/>
+          </a:xfrm>
+          <a:prstGeom prst="rect">
+            <a:avLst/>
+          </a:prstGeom>
+          <a:noFill/>
+        </p:spPr>
+        <p:txBody>
+          <a:bodyPr wrap="none" lIns="18288" rIns="18288" tIns="9144" bIns="9144" anchor="t">
+            <a:spAutoFit/>
+          </a:bodyPr>
+          <a:lstStyle/>
+          <a:p>
+            <a:pPr algn="l"/>
+            <a:r>
+              <a:rPr sz="880" b="1">
+                <a:solidFill>
+                  <a:srgbClr val="0F172A"/>
+                </a:solidFill>
+                <a:latin typeface="Aptos"/>
+              </a:rPr>
+              <a:t>MySQL</a:t>
+            </a:r>
+          </a:p>
+        </p:txBody>
+      </p:sp>
+      <p:sp>
+        <p:nvSpPr>
+          <p:cNvPr id="54" name="TextBox 53"/>
+          <p:cNvSpPr txBox="1"/>
+          <p:nvPr/>
+        </p:nvSpPr>
+        <p:spPr>
+          <a:xfrm>
+            <a:off x="7635240" y="4416552"/>
+            <a:ext cx="3429000" cy="155448"/>
+          </a:xfrm>
+          <a:prstGeom prst="rect">
+            <a:avLst/>
+          </a:prstGeom>
+          <a:noFill/>
+        </p:spPr>
+        <p:txBody>
+          <a:bodyPr wrap="none" lIns="18288" rIns="18288" tIns="9144" bIns="9144" anchor="t">
+            <a:spAutoFit/>
+          </a:bodyPr>
+          <a:lstStyle/>
+          <a:p>
+            <a:pPr algn="l"/>
+            <a:r>
+              <a:rPr sz="819" b="0">
+                <a:solidFill>
+                  <a:srgbClr val="475569"/>
+                </a:solidFill>
+                <a:latin typeface="Consolas"/>
+              </a:rPr>
+              <a:t>localhost:3306 / chompas_mabel_db</a:t>
+            </a:r>
+          </a:p>
+        </p:txBody>
+      </p:sp>
+      <p:sp>
+        <p:nvSpPr>
+          <p:cNvPr id="55" name="TextBox 54"/>
+          <p:cNvSpPr txBox="1"/>
+          <p:nvPr/>
+        </p:nvSpPr>
+        <p:spPr>
+          <a:xfrm>
+            <a:off x="6748272" y="4745736"/>
+            <a:ext cx="914400" cy="155448"/>
+          </a:xfrm>
+          <a:prstGeom prst="rect">
+            <a:avLst/>
+          </a:prstGeom>
+          <a:noFill/>
+        </p:spPr>
+        <p:txBody>
+          <a:bodyPr wrap="none" lIns="18288" rIns="18288" tIns="9144" bIns="9144" anchor="t">
+            <a:spAutoFit/>
+          </a:bodyPr>
+          <a:lstStyle/>
+          <a:p>
+            <a:pPr algn="l"/>
+            <a:r>
+              <a:rPr sz="880" b="1">
+                <a:solidFill>
+                  <a:srgbClr val="0F172A"/>
+                </a:solidFill>
+                <a:latin typeface="Aptos"/>
+              </a:rPr>
+              <a:t>Demo</a:t>
+            </a:r>
+          </a:p>
+        </p:txBody>
+      </p:sp>
+      <p:sp>
+        <p:nvSpPr>
+          <p:cNvPr id="56" name="TextBox 55"/>
+          <p:cNvSpPr txBox="1"/>
+          <p:nvPr/>
+        </p:nvSpPr>
+        <p:spPr>
+          <a:xfrm>
+            <a:off x="7635240" y="4745736"/>
+            <a:ext cx="3429000" cy="155448"/>
+          </a:xfrm>
+          <a:prstGeom prst="rect">
+            <a:avLst/>
+          </a:prstGeom>
+          <a:noFill/>
+        </p:spPr>
+        <p:txBody>
+          <a:bodyPr wrap="none" lIns="18288" rIns="18288" tIns="9144" bIns="9144" anchor="t">
+            <a:spAutoFit/>
+          </a:bodyPr>
+          <a:lstStyle/>
+          <a:p>
+            <a:pPr algn="l"/>
+            <a:r>
+              <a:rPr sz="819" b="0">
+                <a:solidFill>
+                  <a:srgbClr val="475569"/>
+                </a:solidFill>
+                <a:latin typeface="Aptos"/>
               </a:rPr>
               <a:t>admin@chompasmabel.com / admin123</a:t>
+            </a:r>
+          </a:p>
+        </p:txBody>
+      </p:sp>
+      <p:sp>
+        <p:nvSpPr>
+          <p:cNvPr id="57" name="Rounded Rectangle 56"/>
+          <p:cNvSpPr/>
+          <p:nvPr/>
+        </p:nvSpPr>
+        <p:spPr>
+          <a:xfrm>
+            <a:off x="777240" y="5742432"/>
+            <a:ext cx="10469880" cy="438912"/>
+          </a:xfrm>
+          <a:prstGeom prst="roundRect">
+            <a:avLst>
+              <a:gd name="adj" fmla="val 6000"/>
+            </a:avLst>
+          </a:prstGeom>
+          <a:solidFill>
+            <a:srgbClr val="EFF6FF"/>
+          </a:solidFill>
+          <a:ln w="10160">
+            <a:solidFill>
+              <a:srgbClr val="93C5FD"/>
+            </a:solidFill>
+          </a:ln>
+        </p:spPr>
+        <p:style>
+          <a:lnRef idx="1">
+            <a:schemeClr val="accent1"/>
+          </a:lnRef>
+          <a:fillRef idx="3">
+            <a:schemeClr val="accent1"/>
+          </a:fillRef>
+          <a:effectRef idx="2">
+            <a:schemeClr val="accent1"/>
+          </a:effectRef>
+          <a:fontRef idx="minor">
+            <a:schemeClr val="lt1"/>
+          </a:fontRef>
+        </p:style>
+        <p:txBody>
+          <a:bodyPr rtlCol="0" anchor="ctr"/>
+          <a:lstStyle/>
+          <a:p>
+            <a:pPr algn="ctr"/>
+          </a:p>
+        </p:txBody>
+      </p:sp>
+      <p:sp>
+        <p:nvSpPr>
+          <p:cNvPr id="58" name="TextBox 57"/>
+          <p:cNvSpPr txBox="1"/>
+          <p:nvPr/>
+        </p:nvSpPr>
+        <p:spPr>
+          <a:xfrm>
+            <a:off x="960120" y="5879592"/>
+            <a:ext cx="10104120" cy="128016"/>
+          </a:xfrm>
+          <a:prstGeom prst="rect">
+            <a:avLst/>
+          </a:prstGeom>
+          <a:noFill/>
+        </p:spPr>
+        <p:txBody>
+          <a:bodyPr wrap="none" lIns="18288" rIns="18288" tIns="9144" bIns="9144" anchor="t">
+            <a:spAutoFit/>
+          </a:bodyPr>
+          <a:lstStyle/>
+          <a:p>
+            <a:pPr algn="ctr"/>
+            <a:r>
+              <a:rPr sz="880" b="1">
+                <a:solidFill>
+                  <a:srgbClr val="2563EB"/>
+                </a:solidFill>
+                <a:latin typeface="Aptos"/>
+              </a:rPr>
+              <a:t>Entrega replicable: el repositorio contiene código, scripts SQL, Docker Compose, README y evidencias para sustentar la ejecución.</a:t>
             </a:r>
           </a:p>
         </p:txBody>
@@ -6720,7 +8045,7 @@
                 </a:solidFill>
                 <a:latin typeface="Arial"/>
               </a:rPr>
-              <a:t>Por qué se sostiene cómo producto real</a:t>
+              <a:t>Por qué se sostiene como producto real</a:t>
             </a:r>
           </a:p>
         </p:txBody>
@@ -6769,7 +8094,7 @@
         <p:spPr>
           <a:xfrm>
             <a:off x="502920" y="1024128"/>
-            <a:ext cx="11155680" cy="2"/>
+            <a:ext cx="11155680" cy="12700"/>
           </a:xfrm>
           <a:prstGeom prst="rect">
             <a:avLst/>
@@ -6811,8 +8136,8 @@
         </p:nvSpPr>
         <p:spPr>
           <a:xfrm>
-            <a:off x="731520" y="1234440"/>
-            <a:ext cx="4892040" cy="1417320"/>
+            <a:off x="777240" y="1417320"/>
+            <a:ext cx="4983480" cy="1417320"/>
           </a:xfrm>
           <a:prstGeom prst="roundRect">
             <a:avLst/>
@@ -6856,7 +8181,7 @@
         </p:nvSpPr>
         <p:spPr>
           <a:xfrm>
-            <a:off x="731520" y="1234440"/>
+            <a:off x="777240" y="1417320"/>
             <a:ext cx="73152" cy="1417320"/>
           </a:xfrm>
           <a:prstGeom prst="rect">
@@ -6899,8 +8224,8 @@
         </p:nvSpPr>
         <p:spPr>
           <a:xfrm>
-            <a:off x="932688" y="1399032"/>
-            <a:ext cx="4572000" cy="274320"/>
+            <a:off x="978408" y="1563624"/>
+            <a:ext cx="4654296" cy="292608"/>
           </a:xfrm>
           <a:prstGeom prst="rect">
             <a:avLst/>
@@ -6915,7 +8240,7 @@
           <a:p>
             <a:pPr algn="l"/>
             <a:r>
-              <a:rPr sz="1500" b="1">
+              <a:rPr sz="1700" b="1">
                 <a:solidFill>
                   <a:srgbClr val="0F172A"/>
                 </a:solidFill>
@@ -6934,8 +8259,8 @@
         </p:nvSpPr>
         <p:spPr>
           <a:xfrm>
-            <a:off x="932688" y="1737360"/>
-            <a:ext cx="4572000" cy="822960"/>
+            <a:off x="978408" y="1920240"/>
+            <a:ext cx="4654296" cy="850392"/>
           </a:xfrm>
           <a:prstGeom prst="rect">
             <a:avLst/>
@@ -6950,7 +8275,7 @@
           <a:p>
             <a:pPr algn="l"/>
             <a:r>
-              <a:rPr sz="1080" b="0">
+              <a:rPr sz="1250" b="0">
                 <a:solidFill>
                   <a:srgbClr val="334155"/>
                 </a:solidFill>
@@ -6969,8 +8294,8 @@
         </p:nvSpPr>
         <p:spPr>
           <a:xfrm>
-            <a:off x="6217920" y="1234440"/>
-            <a:ext cx="4892040" cy="1417320"/>
+            <a:off x="6309359" y="1417320"/>
+            <a:ext cx="4983480" cy="1417320"/>
           </a:xfrm>
           <a:prstGeom prst="roundRect">
             <a:avLst/>
@@ -7014,7 +8339,7 @@
         </p:nvSpPr>
         <p:spPr>
           <a:xfrm>
-            <a:off x="6217920" y="1234440"/>
+            <a:off x="6309359" y="1417320"/>
             <a:ext cx="73152" cy="1417320"/>
           </a:xfrm>
           <a:prstGeom prst="rect">
@@ -7057,8 +8382,8 @@
         </p:nvSpPr>
         <p:spPr>
           <a:xfrm>
-            <a:off x="6419088" y="1399032"/>
-            <a:ext cx="4572000" cy="274320"/>
+            <a:off x="6510527" y="1563624"/>
+            <a:ext cx="4654296" cy="292608"/>
           </a:xfrm>
           <a:prstGeom prst="rect">
             <a:avLst/>
@@ -7073,7 +8398,7 @@
           <a:p>
             <a:pPr algn="l"/>
             <a:r>
-              <a:rPr sz="1500" b="1">
+              <a:rPr sz="1700" b="1">
                 <a:solidFill>
                   <a:srgbClr val="0F172A"/>
                 </a:solidFill>
@@ -7092,8 +8417,8 @@
         </p:nvSpPr>
         <p:spPr>
           <a:xfrm>
-            <a:off x="6419088" y="1737360"/>
-            <a:ext cx="4572000" cy="822960"/>
+            <a:off x="6510527" y="1920240"/>
+            <a:ext cx="4654296" cy="850392"/>
           </a:xfrm>
           <a:prstGeom prst="rect">
             <a:avLst/>
@@ -7108,7 +8433,7 @@
           <a:p>
             <a:pPr algn="l"/>
             <a:r>
-              <a:rPr sz="1080" b="0">
+              <a:rPr sz="1250" b="0">
                 <a:solidFill>
                   <a:srgbClr val="334155"/>
                 </a:solidFill>
@@ -7127,8 +8452,8 @@
         </p:nvSpPr>
         <p:spPr>
           <a:xfrm>
-            <a:off x="731520" y="3291840"/>
-            <a:ext cx="4892040" cy="1417320"/>
+            <a:off x="777240" y="3383280"/>
+            <a:ext cx="4983480" cy="1417320"/>
           </a:xfrm>
           <a:prstGeom prst="roundRect">
             <a:avLst/>
@@ -7172,7 +8497,7 @@
         </p:nvSpPr>
         <p:spPr>
           <a:xfrm>
-            <a:off x="731520" y="3291840"/>
+            <a:off x="777240" y="3383280"/>
             <a:ext cx="73152" cy="1417320"/>
           </a:xfrm>
           <a:prstGeom prst="rect">
@@ -7215,8 +8540,8 @@
         </p:nvSpPr>
         <p:spPr>
           <a:xfrm>
-            <a:off x="932688" y="3456432"/>
-            <a:ext cx="4572000" cy="274320"/>
+            <a:off x="978408" y="3529584"/>
+            <a:ext cx="4654296" cy="292608"/>
           </a:xfrm>
           <a:prstGeom prst="rect">
             <a:avLst/>
@@ -7231,7 +8556,7 @@
           <a:p>
             <a:pPr algn="l"/>
             <a:r>
-              <a:rPr sz="1500" b="1">
+              <a:rPr sz="1700" b="1">
                 <a:solidFill>
                   <a:srgbClr val="0F172A"/>
                 </a:solidFill>
@@ -7250,8 +8575,8 @@
         </p:nvSpPr>
         <p:spPr>
           <a:xfrm>
-            <a:off x="932688" y="3794760"/>
-            <a:ext cx="4572000" cy="822960"/>
+            <a:off x="978408" y="3886200"/>
+            <a:ext cx="4654296" cy="850392"/>
           </a:xfrm>
           <a:prstGeom prst="rect">
             <a:avLst/>
@@ -7266,7 +8591,7 @@
           <a:p>
             <a:pPr algn="l"/>
             <a:r>
-              <a:rPr sz="1080" b="0">
+              <a:rPr sz="1250" b="0">
                 <a:solidFill>
                   <a:srgbClr val="334155"/>
                 </a:solidFill>
@@ -7285,8 +8610,8 @@
         </p:nvSpPr>
         <p:spPr>
           <a:xfrm>
-            <a:off x="6217920" y="3291840"/>
-            <a:ext cx="4892040" cy="1417320"/>
+            <a:off x="6309359" y="3383280"/>
+            <a:ext cx="4983480" cy="1417320"/>
           </a:xfrm>
           <a:prstGeom prst="roundRect">
             <a:avLst/>
@@ -7330,7 +8655,7 @@
         </p:nvSpPr>
         <p:spPr>
           <a:xfrm>
-            <a:off x="6217920" y="3291840"/>
+            <a:off x="6309359" y="3383280"/>
             <a:ext cx="73152" cy="1417320"/>
           </a:xfrm>
           <a:prstGeom prst="rect">
@@ -7373,8 +8698,8 @@
         </p:nvSpPr>
         <p:spPr>
           <a:xfrm>
-            <a:off x="6419088" y="3456432"/>
-            <a:ext cx="4572000" cy="274320"/>
+            <a:off x="6510527" y="3529584"/>
+            <a:ext cx="4654296" cy="292608"/>
           </a:xfrm>
           <a:prstGeom prst="rect">
             <a:avLst/>
@@ -7389,7 +8714,7 @@
           <a:p>
             <a:pPr algn="l"/>
             <a:r>
-              <a:rPr sz="1500" b="1">
+              <a:rPr sz="1700" b="1">
                 <a:solidFill>
                   <a:srgbClr val="0F172A"/>
                 </a:solidFill>
@@ -7408,8 +8733,8 @@
         </p:nvSpPr>
         <p:spPr>
           <a:xfrm>
-            <a:off x="6419088" y="3794760"/>
-            <a:ext cx="4572000" cy="822960"/>
+            <a:off x="6510527" y="3886200"/>
+            <a:ext cx="4654296" cy="850392"/>
           </a:xfrm>
           <a:prstGeom prst="rect">
             <a:avLst/>
@@ -7424,13 +8749,48 @@
           <a:p>
             <a:pPr algn="l"/>
             <a:r>
-              <a:rPr sz="1080" b="0">
+              <a:rPr sz="1250" b="0">
                 <a:solidFill>
                   <a:srgbClr val="334155"/>
                 </a:solidFill>
                 <a:latin typeface="Arial"/>
               </a:rPr>
               <a:t>Pedido genera detalle, movimiento de inventario y venta relaciónada.</a:t>
+            </a:r>
+          </a:p>
+        </p:txBody>
+      </p:sp>
+      <p:sp>
+        <p:nvSpPr>
+          <p:cNvPr id="24" name="TextBox 23"/>
+          <p:cNvSpPr txBox="1"/>
+          <p:nvPr/>
+        </p:nvSpPr>
+        <p:spPr>
+          <a:xfrm>
+            <a:off x="960120" y="5806440"/>
+            <a:ext cx="10332720" cy="320040"/>
+          </a:xfrm>
+          <a:prstGeom prst="rect">
+            <a:avLst/>
+          </a:prstGeom>
+          <a:noFill/>
+        </p:spPr>
+        <p:txBody>
+          <a:bodyPr wrap="square">
+            <a:spAutoFit/>
+          </a:bodyPr>
+          <a:lstStyle/>
+          <a:p>
+            <a:pPr algn="ctr"/>
+            <a:r>
+              <a:rPr sz="1400" b="1">
+                <a:solidFill>
+                  <a:srgbClr val="0369A1"/>
+                </a:solidFill>
+                <a:latin typeface="Arial"/>
+              </a:rPr>
+              <a:t>La implementación cubre una cadena completa: interfaz, API, reglas de negocio, persistencia y evidencia de ejecución.</a:t>
             </a:r>
           </a:p>
         </p:txBody>
@@ -7653,7 +9013,7 @@
         <p:spPr>
           <a:xfrm>
             <a:off x="502920" y="1024128"/>
-            <a:ext cx="11155680" cy="2"/>
+            <a:ext cx="11155680" cy="12700"/>
           </a:xfrm>
           <a:prstGeom prst="rect">
             <a:avLst/>
@@ -7689,14 +9049,102 @@
       </p:sp>
       <p:sp>
         <p:nvSpPr>
-          <p:cNvPr id="8" name="TextBox 7"/>
-          <p:cNvSpPr txBox="1"/>
-          <p:nvPr/>
-        </p:nvSpPr>
-        <p:spPr>
-          <a:xfrm>
-            <a:off x="914400" y="1234440"/>
-            <a:ext cx="10424160" cy="2926080"/>
+          <p:cNvPr id="8" name="Rounded Rectangle 7"/>
+          <p:cNvSpPr/>
+          <p:nvPr/>
+        </p:nvSpPr>
+        <p:spPr>
+          <a:xfrm>
+            <a:off x="777240" y="1170432"/>
+            <a:ext cx="4983480" cy="960120"/>
+          </a:xfrm>
+          <a:prstGeom prst="roundRect">
+            <a:avLst/>
+          </a:prstGeom>
+          <a:solidFill>
+            <a:srgbClr val="FFFFFF"/>
+          </a:solidFill>
+          <a:ln w="15240">
+            <a:solidFill>
+              <a:srgbClr val="CBD5E1"/>
+            </a:solidFill>
+          </a:ln>
+        </p:spPr>
+        <p:style>
+          <a:lnRef idx="1">
+            <a:schemeClr val="accent1"/>
+          </a:lnRef>
+          <a:fillRef idx="3">
+            <a:schemeClr val="accent1"/>
+          </a:fillRef>
+          <a:effectRef idx="2">
+            <a:schemeClr val="accent1"/>
+          </a:effectRef>
+          <a:fontRef idx="minor">
+            <a:schemeClr val="lt1"/>
+          </a:fontRef>
+        </p:style>
+        <p:txBody>
+          <a:bodyPr rtlCol="0" anchor="ctr"/>
+          <a:lstStyle/>
+          <a:p>
+            <a:pPr algn="ctr"/>
+          </a:p>
+        </p:txBody>
+      </p:sp>
+      <p:sp>
+        <p:nvSpPr>
+          <p:cNvPr id="9" name="Rectangle 8"/>
+          <p:cNvSpPr/>
+          <p:nvPr/>
+        </p:nvSpPr>
+        <p:spPr>
+          <a:xfrm>
+            <a:off x="777240" y="1170432"/>
+            <a:ext cx="73152" cy="960120"/>
+          </a:xfrm>
+          <a:prstGeom prst="rect">
+            <a:avLst/>
+          </a:prstGeom>
+          <a:solidFill>
+            <a:srgbClr val="E11D48"/>
+          </a:solidFill>
+          <a:ln>
+            <a:noFill/>
+          </a:ln>
+        </p:spPr>
+        <p:style>
+          <a:lnRef idx="1">
+            <a:schemeClr val="accent1"/>
+          </a:lnRef>
+          <a:fillRef idx="3">
+            <a:schemeClr val="accent1"/>
+          </a:fillRef>
+          <a:effectRef idx="2">
+            <a:schemeClr val="accent1"/>
+          </a:effectRef>
+          <a:fontRef idx="minor">
+            <a:schemeClr val="lt1"/>
+          </a:fontRef>
+        </p:style>
+        <p:txBody>
+          <a:bodyPr rtlCol="0" anchor="ctr"/>
+          <a:lstStyle/>
+          <a:p>
+            <a:pPr algn="ctr"/>
+          </a:p>
+        </p:txBody>
+      </p:sp>
+      <p:sp>
+        <p:nvSpPr>
+          <p:cNvPr id="10" name="TextBox 9"/>
+          <p:cNvSpPr txBox="1"/>
+          <p:nvPr/>
+        </p:nvSpPr>
+        <p:spPr>
+          <a:xfrm>
+            <a:off x="978408" y="1316736"/>
+            <a:ext cx="4654296" cy="292608"/>
           </a:xfrm>
           <a:prstGeom prst="rect">
             <a:avLst/>
@@ -7709,78 +9157,682 @@
           </a:bodyPr>
           <a:lstStyle/>
           <a:p>
-            <a:pPr>
-              <a:spcAft>
-                <a:spcPts val="500"/>
-              </a:spcAft>
-              <a:defRPr sz="1800">
+            <a:pPr algn="l"/>
+            <a:r>
+              <a:rPr sz="1500" b="1">
+                <a:solidFill>
+                  <a:srgbClr val="0F172A"/>
+                </a:solidFill>
+                <a:latin typeface="Arial"/>
+              </a:rPr>
+              <a:t>Producto funcional</a:t>
+            </a:r>
+          </a:p>
+        </p:txBody>
+      </p:sp>
+      <p:sp>
+        <p:nvSpPr>
+          <p:cNvPr id="11" name="TextBox 10"/>
+          <p:cNvSpPr txBox="1"/>
+          <p:nvPr/>
+        </p:nvSpPr>
+        <p:spPr>
+          <a:xfrm>
+            <a:off x="978408" y="1673352"/>
+            <a:ext cx="4654296" cy="393192"/>
+          </a:xfrm>
+          <a:prstGeom prst="rect">
+            <a:avLst/>
+          </a:prstGeom>
+          <a:noFill/>
+        </p:spPr>
+        <p:txBody>
+          <a:bodyPr wrap="square">
+            <a:spAutoFit/>
+          </a:bodyPr>
+          <a:lstStyle/>
+          <a:p>
+            <a:pPr algn="l"/>
+            <a:r>
+              <a:rPr sz="1150" b="0">
                 <a:solidFill>
                   <a:srgbClr val="334155"/>
                 </a:solidFill>
-              </a:defRPr>
-            </a:pPr>
-            <a:r>
-              <a:t>Se implemento un sistema web funcional, no solo un prototipo visual.</a:t>
-            </a:r>
-          </a:p>
-          <a:p>
-            <a:pPr>
-              <a:spcAft>
-                <a:spcPts val="500"/>
-              </a:spcAft>
-              <a:defRPr sz="1800">
+                <a:latin typeface="Arial"/>
+              </a:rPr>
+              <a:t>No es solo prototipo: la app conecta frontend, backend y datos.</a:t>
+            </a:r>
+          </a:p>
+        </p:txBody>
+      </p:sp>
+      <p:sp>
+        <p:nvSpPr>
+          <p:cNvPr id="12" name="Rounded Rectangle 11"/>
+          <p:cNvSpPr/>
+          <p:nvPr/>
+        </p:nvSpPr>
+        <p:spPr>
+          <a:xfrm>
+            <a:off x="6309359" y="1170432"/>
+            <a:ext cx="4983480" cy="960120"/>
+          </a:xfrm>
+          <a:prstGeom prst="roundRect">
+            <a:avLst/>
+          </a:prstGeom>
+          <a:solidFill>
+            <a:srgbClr val="FFFFFF"/>
+          </a:solidFill>
+          <a:ln w="15240">
+            <a:solidFill>
+              <a:srgbClr val="CBD5E1"/>
+            </a:solidFill>
+          </a:ln>
+        </p:spPr>
+        <p:style>
+          <a:lnRef idx="1">
+            <a:schemeClr val="accent1"/>
+          </a:lnRef>
+          <a:fillRef idx="3">
+            <a:schemeClr val="accent1"/>
+          </a:fillRef>
+          <a:effectRef idx="2">
+            <a:schemeClr val="accent1"/>
+          </a:effectRef>
+          <a:fontRef idx="minor">
+            <a:schemeClr val="lt1"/>
+          </a:fontRef>
+        </p:style>
+        <p:txBody>
+          <a:bodyPr rtlCol="0" anchor="ctr"/>
+          <a:lstStyle/>
+          <a:p>
+            <a:pPr algn="ctr"/>
+          </a:p>
+        </p:txBody>
+      </p:sp>
+      <p:sp>
+        <p:nvSpPr>
+          <p:cNvPr id="13" name="Rectangle 12"/>
+          <p:cNvSpPr/>
+          <p:nvPr/>
+        </p:nvSpPr>
+        <p:spPr>
+          <a:xfrm>
+            <a:off x="6309359" y="1170432"/>
+            <a:ext cx="73152" cy="960120"/>
+          </a:xfrm>
+          <a:prstGeom prst="rect">
+            <a:avLst/>
+          </a:prstGeom>
+          <a:solidFill>
+            <a:srgbClr val="2563EB"/>
+          </a:solidFill>
+          <a:ln>
+            <a:noFill/>
+          </a:ln>
+        </p:spPr>
+        <p:style>
+          <a:lnRef idx="1">
+            <a:schemeClr val="accent1"/>
+          </a:lnRef>
+          <a:fillRef idx="3">
+            <a:schemeClr val="accent1"/>
+          </a:fillRef>
+          <a:effectRef idx="2">
+            <a:schemeClr val="accent1"/>
+          </a:effectRef>
+          <a:fontRef idx="minor">
+            <a:schemeClr val="lt1"/>
+          </a:fontRef>
+        </p:style>
+        <p:txBody>
+          <a:bodyPr rtlCol="0" anchor="ctr"/>
+          <a:lstStyle/>
+          <a:p>
+            <a:pPr algn="ctr"/>
+          </a:p>
+        </p:txBody>
+      </p:sp>
+      <p:sp>
+        <p:nvSpPr>
+          <p:cNvPr id="14" name="TextBox 13"/>
+          <p:cNvSpPr txBox="1"/>
+          <p:nvPr/>
+        </p:nvSpPr>
+        <p:spPr>
+          <a:xfrm>
+            <a:off x="6510527" y="1316736"/>
+            <a:ext cx="4654296" cy="292608"/>
+          </a:xfrm>
+          <a:prstGeom prst="rect">
+            <a:avLst/>
+          </a:prstGeom>
+          <a:noFill/>
+        </p:spPr>
+        <p:txBody>
+          <a:bodyPr wrap="square">
+            <a:spAutoFit/>
+          </a:bodyPr>
+          <a:lstStyle/>
+          <a:p>
+            <a:pPr algn="l"/>
+            <a:r>
+              <a:rPr sz="1500" b="1">
+                <a:solidFill>
+                  <a:srgbClr val="0F172A"/>
+                </a:solidFill>
+                <a:latin typeface="Arial"/>
+              </a:rPr>
+              <a:t>Arquitectura clara</a:t>
+            </a:r>
+          </a:p>
+        </p:txBody>
+      </p:sp>
+      <p:sp>
+        <p:nvSpPr>
+          <p:cNvPr id="15" name="TextBox 14"/>
+          <p:cNvSpPr txBox="1"/>
+          <p:nvPr/>
+        </p:nvSpPr>
+        <p:spPr>
+          <a:xfrm>
+            <a:off x="6510527" y="1673352"/>
+            <a:ext cx="4654296" cy="393192"/>
+          </a:xfrm>
+          <a:prstGeom prst="rect">
+            <a:avLst/>
+          </a:prstGeom>
+          <a:noFill/>
+        </p:spPr>
+        <p:txBody>
+          <a:bodyPr wrap="square">
+            <a:spAutoFit/>
+          </a:bodyPr>
+          <a:lstStyle/>
+          <a:p>
+            <a:pPr algn="l"/>
+            <a:r>
+              <a:rPr sz="1150" b="0">
                 <a:solidFill>
                   <a:srgbClr val="334155"/>
                 </a:solidFill>
-              </a:defRPr>
-            </a:pPr>
-            <a:r>
-              <a:t>La arquitectura en capas permite explicar y mantener el proyecto con claridad.</a:t>
-            </a:r>
-          </a:p>
-          <a:p>
-            <a:pPr>
-              <a:spcAft>
-                <a:spcPts val="500"/>
-              </a:spcAft>
-              <a:defRPr sz="1800">
+                <a:latin typeface="Arial"/>
+              </a:rPr>
+              <a:t>Capas separadas fácilitan explicar y mantener el sistema.</a:t>
+            </a:r>
+          </a:p>
+        </p:txBody>
+      </p:sp>
+      <p:sp>
+        <p:nvSpPr>
+          <p:cNvPr id="16" name="Rounded Rectangle 15"/>
+          <p:cNvSpPr/>
+          <p:nvPr/>
+        </p:nvSpPr>
+        <p:spPr>
+          <a:xfrm>
+            <a:off x="777240" y="2587752"/>
+            <a:ext cx="4983480" cy="960120"/>
+          </a:xfrm>
+          <a:prstGeom prst="roundRect">
+            <a:avLst/>
+          </a:prstGeom>
+          <a:solidFill>
+            <a:srgbClr val="FFFFFF"/>
+          </a:solidFill>
+          <a:ln w="15240">
+            <a:solidFill>
+              <a:srgbClr val="CBD5E1"/>
+            </a:solidFill>
+          </a:ln>
+        </p:spPr>
+        <p:style>
+          <a:lnRef idx="1">
+            <a:schemeClr val="accent1"/>
+          </a:lnRef>
+          <a:fillRef idx="3">
+            <a:schemeClr val="accent1"/>
+          </a:fillRef>
+          <a:effectRef idx="2">
+            <a:schemeClr val="accent1"/>
+          </a:effectRef>
+          <a:fontRef idx="minor">
+            <a:schemeClr val="lt1"/>
+          </a:fontRef>
+        </p:style>
+        <p:txBody>
+          <a:bodyPr rtlCol="0" anchor="ctr"/>
+          <a:lstStyle/>
+          <a:p>
+            <a:pPr algn="ctr"/>
+          </a:p>
+        </p:txBody>
+      </p:sp>
+      <p:sp>
+        <p:nvSpPr>
+          <p:cNvPr id="17" name="Rectangle 16"/>
+          <p:cNvSpPr/>
+          <p:nvPr/>
+        </p:nvSpPr>
+        <p:spPr>
+          <a:xfrm>
+            <a:off x="777240" y="2587752"/>
+            <a:ext cx="73152" cy="960120"/>
+          </a:xfrm>
+          <a:prstGeom prst="rect">
+            <a:avLst/>
+          </a:prstGeom>
+          <a:solidFill>
+            <a:srgbClr val="059669"/>
+          </a:solidFill>
+          <a:ln>
+            <a:noFill/>
+          </a:ln>
+        </p:spPr>
+        <p:style>
+          <a:lnRef idx="1">
+            <a:schemeClr val="accent1"/>
+          </a:lnRef>
+          <a:fillRef idx="3">
+            <a:schemeClr val="accent1"/>
+          </a:fillRef>
+          <a:effectRef idx="2">
+            <a:schemeClr val="accent1"/>
+          </a:effectRef>
+          <a:fontRef idx="minor">
+            <a:schemeClr val="lt1"/>
+          </a:fontRef>
+        </p:style>
+        <p:txBody>
+          <a:bodyPr rtlCol="0" anchor="ctr"/>
+          <a:lstStyle/>
+          <a:p>
+            <a:pPr algn="ctr"/>
+          </a:p>
+        </p:txBody>
+      </p:sp>
+      <p:sp>
+        <p:nvSpPr>
+          <p:cNvPr id="18" name="TextBox 17"/>
+          <p:cNvSpPr txBox="1"/>
+          <p:nvPr/>
+        </p:nvSpPr>
+        <p:spPr>
+          <a:xfrm>
+            <a:off x="978408" y="2734056"/>
+            <a:ext cx="4654296" cy="292608"/>
+          </a:xfrm>
+          <a:prstGeom prst="rect">
+            <a:avLst/>
+          </a:prstGeom>
+          <a:noFill/>
+        </p:spPr>
+        <p:txBody>
+          <a:bodyPr wrap="square">
+            <a:spAutoFit/>
+          </a:bodyPr>
+          <a:lstStyle/>
+          <a:p>
+            <a:pPr algn="l"/>
+            <a:r>
+              <a:rPr sz="1500" b="1">
+                <a:solidFill>
+                  <a:srgbClr val="0F172A"/>
+                </a:solidFill>
+                <a:latin typeface="Arial"/>
+              </a:rPr>
+              <a:t>Base consistente</a:t>
+            </a:r>
+          </a:p>
+        </p:txBody>
+      </p:sp>
+      <p:sp>
+        <p:nvSpPr>
+          <p:cNvPr id="19" name="TextBox 18"/>
+          <p:cNvSpPr txBox="1"/>
+          <p:nvPr/>
+        </p:nvSpPr>
+        <p:spPr>
+          <a:xfrm>
+            <a:off x="978408" y="3090672"/>
+            <a:ext cx="4654296" cy="393192"/>
+          </a:xfrm>
+          <a:prstGeom prst="rect">
+            <a:avLst/>
+          </a:prstGeom>
+          <a:noFill/>
+        </p:spPr>
+        <p:txBody>
+          <a:bodyPr wrap="square">
+            <a:spAutoFit/>
+          </a:bodyPr>
+          <a:lstStyle/>
+          <a:p>
+            <a:pPr algn="l"/>
+            <a:r>
+              <a:rPr sz="1150" b="0">
                 <a:solidFill>
                   <a:srgbClr val="334155"/>
                 </a:solidFill>
-              </a:defRPr>
-            </a:pPr>
-            <a:r>
-              <a:t>La base de datos relaciónal respalda correctamente productos, clientes, pedidos, ventas e inventario.</a:t>
-            </a:r>
-          </a:p>
-          <a:p>
-            <a:pPr>
-              <a:spcAft>
-                <a:spcPts val="500"/>
-              </a:spcAft>
-              <a:defRPr sz="1800">
+                <a:latin typeface="Arial"/>
+              </a:rPr>
+              <a:t>Modelo relaciónal respalda productos, clientes, pedidos y ventas.</a:t>
+            </a:r>
+          </a:p>
+        </p:txBody>
+      </p:sp>
+      <p:sp>
+        <p:nvSpPr>
+          <p:cNvPr id="20" name="Rounded Rectangle 19"/>
+          <p:cNvSpPr/>
+          <p:nvPr/>
+        </p:nvSpPr>
+        <p:spPr>
+          <a:xfrm>
+            <a:off x="6309359" y="2587752"/>
+            <a:ext cx="4983480" cy="960120"/>
+          </a:xfrm>
+          <a:prstGeom prst="roundRect">
+            <a:avLst/>
+          </a:prstGeom>
+          <a:solidFill>
+            <a:srgbClr val="FFFFFF"/>
+          </a:solidFill>
+          <a:ln w="15240">
+            <a:solidFill>
+              <a:srgbClr val="CBD5E1"/>
+            </a:solidFill>
+          </a:ln>
+        </p:spPr>
+        <p:style>
+          <a:lnRef idx="1">
+            <a:schemeClr val="accent1"/>
+          </a:lnRef>
+          <a:fillRef idx="3">
+            <a:schemeClr val="accent1"/>
+          </a:fillRef>
+          <a:effectRef idx="2">
+            <a:schemeClr val="accent1"/>
+          </a:effectRef>
+          <a:fontRef idx="minor">
+            <a:schemeClr val="lt1"/>
+          </a:fontRef>
+        </p:style>
+        <p:txBody>
+          <a:bodyPr rtlCol="0" anchor="ctr"/>
+          <a:lstStyle/>
+          <a:p>
+            <a:pPr algn="ctr"/>
+          </a:p>
+        </p:txBody>
+      </p:sp>
+      <p:sp>
+        <p:nvSpPr>
+          <p:cNvPr id="21" name="Rectangle 20"/>
+          <p:cNvSpPr/>
+          <p:nvPr/>
+        </p:nvSpPr>
+        <p:spPr>
+          <a:xfrm>
+            <a:off x="6309359" y="2587752"/>
+            <a:ext cx="73152" cy="960120"/>
+          </a:xfrm>
+          <a:prstGeom prst="rect">
+            <a:avLst/>
+          </a:prstGeom>
+          <a:solidFill>
+            <a:srgbClr val="4F46E5"/>
+          </a:solidFill>
+          <a:ln>
+            <a:noFill/>
+          </a:ln>
+        </p:spPr>
+        <p:style>
+          <a:lnRef idx="1">
+            <a:schemeClr val="accent1"/>
+          </a:lnRef>
+          <a:fillRef idx="3">
+            <a:schemeClr val="accent1"/>
+          </a:fillRef>
+          <a:effectRef idx="2">
+            <a:schemeClr val="accent1"/>
+          </a:effectRef>
+          <a:fontRef idx="minor">
+            <a:schemeClr val="lt1"/>
+          </a:fontRef>
+        </p:style>
+        <p:txBody>
+          <a:bodyPr rtlCol="0" anchor="ctr"/>
+          <a:lstStyle/>
+          <a:p>
+            <a:pPr algn="ctr"/>
+          </a:p>
+        </p:txBody>
+      </p:sp>
+      <p:sp>
+        <p:nvSpPr>
+          <p:cNvPr id="22" name="TextBox 21"/>
+          <p:cNvSpPr txBox="1"/>
+          <p:nvPr/>
+        </p:nvSpPr>
+        <p:spPr>
+          <a:xfrm>
+            <a:off x="6510527" y="2734056"/>
+            <a:ext cx="4654296" cy="292608"/>
+          </a:xfrm>
+          <a:prstGeom prst="rect">
+            <a:avLst/>
+          </a:prstGeom>
+          <a:noFill/>
+        </p:spPr>
+        <p:txBody>
+          <a:bodyPr wrap="square">
+            <a:spAutoFit/>
+          </a:bodyPr>
+          <a:lstStyle/>
+          <a:p>
+            <a:pPr algn="l"/>
+            <a:r>
+              <a:rPr sz="1500" b="1">
+                <a:solidFill>
+                  <a:srgbClr val="0F172A"/>
+                </a:solidFill>
+                <a:latin typeface="Arial"/>
+              </a:rPr>
+              <a:t>Replicable</a:t>
+            </a:r>
+          </a:p>
+        </p:txBody>
+      </p:sp>
+      <p:sp>
+        <p:nvSpPr>
+          <p:cNvPr id="23" name="TextBox 22"/>
+          <p:cNvSpPr txBox="1"/>
+          <p:nvPr/>
+        </p:nvSpPr>
+        <p:spPr>
+          <a:xfrm>
+            <a:off x="6510527" y="3090672"/>
+            <a:ext cx="4654296" cy="393192"/>
+          </a:xfrm>
+          <a:prstGeom prst="rect">
+            <a:avLst/>
+          </a:prstGeom>
+          <a:noFill/>
+        </p:spPr>
+        <p:txBody>
+          <a:bodyPr wrap="square">
+            <a:spAutoFit/>
+          </a:bodyPr>
+          <a:lstStyle/>
+          <a:p>
+            <a:pPr algn="l"/>
+            <a:r>
+              <a:rPr sz="1150" b="0">
                 <a:solidFill>
                   <a:srgbClr val="334155"/>
                 </a:solidFill>
-              </a:defRPr>
-            </a:pPr>
-            <a:r>
-              <a:t>Docker fácilita replicar MySQL y cargar la base chompas_mabel_db.</a:t>
-            </a:r>
-          </a:p>
-          <a:p>
-            <a:pPr>
-              <a:spcAft>
-                <a:spcPts val="500"/>
-              </a:spcAft>
-              <a:defRPr sz="1800">
+                <a:latin typeface="Arial"/>
+              </a:rPr>
+              <a:t>GitHub, Docker y README permiten levantarlo en otra PC.</a:t>
+            </a:r>
+          </a:p>
+        </p:txBody>
+      </p:sp>
+      <p:sp>
+        <p:nvSpPr>
+          <p:cNvPr id="24" name="Rounded Rectangle 23"/>
+          <p:cNvSpPr/>
+          <p:nvPr/>
+        </p:nvSpPr>
+        <p:spPr>
+          <a:xfrm>
+            <a:off x="777240" y="4005072"/>
+            <a:ext cx="10515600" cy="960120"/>
+          </a:xfrm>
+          <a:prstGeom prst="roundRect">
+            <a:avLst/>
+          </a:prstGeom>
+          <a:solidFill>
+            <a:srgbClr val="FFFFFF"/>
+          </a:solidFill>
+          <a:ln w="15240">
+            <a:solidFill>
+              <a:srgbClr val="CBD5E1"/>
+            </a:solidFill>
+          </a:ln>
+        </p:spPr>
+        <p:style>
+          <a:lnRef idx="1">
+            <a:schemeClr val="accent1"/>
+          </a:lnRef>
+          <a:fillRef idx="3">
+            <a:schemeClr val="accent1"/>
+          </a:fillRef>
+          <a:effectRef idx="2">
+            <a:schemeClr val="accent1"/>
+          </a:effectRef>
+          <a:fontRef idx="minor">
+            <a:schemeClr val="lt1"/>
+          </a:fontRef>
+        </p:style>
+        <p:txBody>
+          <a:bodyPr rtlCol="0" anchor="ctr"/>
+          <a:lstStyle/>
+          <a:p>
+            <a:pPr algn="ctr"/>
+          </a:p>
+        </p:txBody>
+      </p:sp>
+      <p:sp>
+        <p:nvSpPr>
+          <p:cNvPr id="25" name="Rectangle 24"/>
+          <p:cNvSpPr/>
+          <p:nvPr/>
+        </p:nvSpPr>
+        <p:spPr>
+          <a:xfrm>
+            <a:off x="777240" y="4005072"/>
+            <a:ext cx="73152" cy="960120"/>
+          </a:xfrm>
+          <a:prstGeom prst="rect">
+            <a:avLst/>
+          </a:prstGeom>
+          <a:solidFill>
+            <a:srgbClr val="D97706"/>
+          </a:solidFill>
+          <a:ln>
+            <a:noFill/>
+          </a:ln>
+        </p:spPr>
+        <p:style>
+          <a:lnRef idx="1">
+            <a:schemeClr val="accent1"/>
+          </a:lnRef>
+          <a:fillRef idx="3">
+            <a:schemeClr val="accent1"/>
+          </a:fillRef>
+          <a:effectRef idx="2">
+            <a:schemeClr val="accent1"/>
+          </a:effectRef>
+          <a:fontRef idx="minor">
+            <a:schemeClr val="lt1"/>
+          </a:fontRef>
+        </p:style>
+        <p:txBody>
+          <a:bodyPr rtlCol="0" anchor="ctr"/>
+          <a:lstStyle/>
+          <a:p>
+            <a:pPr algn="ctr"/>
+          </a:p>
+        </p:txBody>
+      </p:sp>
+      <p:sp>
+        <p:nvSpPr>
+          <p:cNvPr id="26" name="TextBox 25"/>
+          <p:cNvSpPr txBox="1"/>
+          <p:nvPr/>
+        </p:nvSpPr>
+        <p:spPr>
+          <a:xfrm>
+            <a:off x="978408" y="4151376"/>
+            <a:ext cx="10186416" cy="292608"/>
+          </a:xfrm>
+          <a:prstGeom prst="rect">
+            <a:avLst/>
+          </a:prstGeom>
+          <a:noFill/>
+        </p:spPr>
+        <p:txBody>
+          <a:bodyPr wrap="square">
+            <a:spAutoFit/>
+          </a:bodyPr>
+          <a:lstStyle/>
+          <a:p>
+            <a:pPr algn="l"/>
+            <a:r>
+              <a:rPr sz="1500" b="1">
+                <a:solidFill>
+                  <a:srgbClr val="0F172A"/>
+                </a:solidFill>
+                <a:latin typeface="Arial"/>
+              </a:rPr>
+              <a:t>Listo para sustentar</a:t>
+            </a:r>
+          </a:p>
+        </p:txBody>
+      </p:sp>
+      <p:sp>
+        <p:nvSpPr>
+          <p:cNvPr id="27" name="TextBox 26"/>
+          <p:cNvSpPr txBox="1"/>
+          <p:nvPr/>
+        </p:nvSpPr>
+        <p:spPr>
+          <a:xfrm>
+            <a:off x="978408" y="4507992"/>
+            <a:ext cx="10186416" cy="393192"/>
+          </a:xfrm>
+          <a:prstGeom prst="rect">
+            <a:avLst/>
+          </a:prstGeom>
+          <a:noFill/>
+        </p:spPr>
+        <p:txBody>
+          <a:bodyPr wrap="square">
+            <a:spAutoFit/>
+          </a:bodyPr>
+          <a:lstStyle/>
+          <a:p>
+            <a:pPr algn="l"/>
+            <a:r>
+              <a:rPr sz="1150" b="0">
                 <a:solidFill>
                   <a:srgbClr val="334155"/>
                 </a:solidFill>
-              </a:defRPr>
-            </a:pPr>
-            <a:r>
-              <a:t>El informe y la presentación incluyen evidencia técnica y visual para sustentación.</a:t>
+                <a:latin typeface="Arial"/>
+              </a:rPr>
+              <a:t>Informe y PPT reúnen evidencia técnica y visual.</a:t>
             </a:r>
           </a:p>
         </p:txBody>
@@ -8268,7 +10320,7 @@
                 </a:solidFill>
                 <a:latin typeface="Arial"/>
               </a:rPr>
-              <a:t>Contexto del proyecto y oportunidad de mejora</a:t>
+              <a:t>De registros manuales a gestión digital centralizada</a:t>
             </a:r>
           </a:p>
         </p:txBody>
@@ -8317,7 +10369,7 @@
         <p:spPr>
           <a:xfrm>
             <a:off x="502920" y="1024128"/>
-            <a:ext cx="11155680" cy="2"/>
+            <a:ext cx="11155680" cy="12700"/>
           </a:xfrm>
           <a:prstGeom prst="rect">
             <a:avLst/>
@@ -8359,8 +10411,8 @@
         </p:nvSpPr>
         <p:spPr>
           <a:xfrm>
-            <a:off x="594360" y="1234440"/>
-            <a:ext cx="3429000" cy="1828800"/>
+            <a:off x="685800" y="1325880"/>
+            <a:ext cx="3063240" cy="2423160"/>
           </a:xfrm>
           <a:prstGeom prst="roundRect">
             <a:avLst/>
@@ -8404,8 +10456,8 @@
         </p:nvSpPr>
         <p:spPr>
           <a:xfrm>
-            <a:off x="594360" y="1234440"/>
-            <a:ext cx="73152" cy="1828800"/>
+            <a:off x="685800" y="1325880"/>
+            <a:ext cx="73152" cy="2423160"/>
           </a:xfrm>
           <a:prstGeom prst="rect">
             <a:avLst/>
@@ -8447,8 +10499,8 @@
         </p:nvSpPr>
         <p:spPr>
           <a:xfrm>
-            <a:off x="795528" y="1399032"/>
-            <a:ext cx="3108960" cy="274320"/>
+            <a:off x="886968" y="1472184"/>
+            <a:ext cx="2734056" cy="292608"/>
           </a:xfrm>
           <a:prstGeom prst="rect">
             <a:avLst/>
@@ -8463,13 +10515,13 @@
           <a:p>
             <a:pPr algn="l"/>
             <a:r>
-              <a:rPr sz="1500" b="1">
+              <a:rPr sz="1700" b="1">
                 <a:solidFill>
                   <a:srgbClr val="0F172A"/>
                 </a:solidFill>
                 <a:latin typeface="Arial"/>
               </a:rPr>
-              <a:t>Problema</a:t>
+              <a:t>Situación actual</a:t>
             </a:r>
           </a:p>
         </p:txBody>
@@ -8482,8 +10534,8 @@
         </p:nvSpPr>
         <p:spPr>
           <a:xfrm>
-            <a:off x="795528" y="1737360"/>
-            <a:ext cx="3108960" cy="1234440"/>
+            <a:off x="886968" y="1828800"/>
+            <a:ext cx="2734056" cy="1856231"/>
           </a:xfrm>
           <a:prstGeom prst="rect">
             <a:avLst/>
@@ -8498,27 +10550,70 @@
           <a:p>
             <a:pPr algn="l"/>
             <a:r>
-              <a:rPr sz="1080" b="0">
+              <a:rPr sz="1300" b="0">
                 <a:solidFill>
                   <a:srgbClr val="334155"/>
                 </a:solidFill>
                 <a:latin typeface="Arial"/>
               </a:rPr>
-              <a:t>Registros manuales, control limitado de stock, poca trazabilidad de pedidos y dificultad para generar reportes operativos.</a:t>
-            </a:r>
-          </a:p>
-        </p:txBody>
-      </p:sp>
-      <p:sp>
-        <p:nvSpPr>
-          <p:cNvPr id="12" name="Rounded Rectangle 11"/>
+              <a:t>Registros dispersos, control de stock manual, seguimiento limitado de pedidos y poca visibilidad de ventas.</a:t>
+            </a:r>
+          </a:p>
+        </p:txBody>
+      </p:sp>
+      <p:sp>
+        <p:nvSpPr>
+          <p:cNvPr id="12" name="Right Arrow 11"/>
           <p:cNvSpPr/>
           <p:nvPr/>
         </p:nvSpPr>
         <p:spPr>
           <a:xfrm>
-            <a:off x="4343400" y="1234440"/>
-            <a:ext cx="3429000" cy="1828800"/>
+            <a:off x="4069080" y="2057400"/>
+            <a:ext cx="914400" cy="502920"/>
+          </a:xfrm>
+          <a:prstGeom prst="rightArrow">
+            <a:avLst/>
+          </a:prstGeom>
+          <a:solidFill>
+            <a:srgbClr val="64748B"/>
+          </a:solidFill>
+          <a:ln>
+            <a:noFill/>
+          </a:ln>
+        </p:spPr>
+        <p:style>
+          <a:lnRef idx="1">
+            <a:schemeClr val="accent1"/>
+          </a:lnRef>
+          <a:fillRef idx="3">
+            <a:schemeClr val="accent1"/>
+          </a:fillRef>
+          <a:effectRef idx="2">
+            <a:schemeClr val="accent1"/>
+          </a:effectRef>
+          <a:fontRef idx="minor">
+            <a:schemeClr val="lt1"/>
+          </a:fontRef>
+        </p:style>
+        <p:txBody>
+          <a:bodyPr rtlCol="0" anchor="ctr"/>
+          <a:lstStyle/>
+          <a:p>
+            <a:pPr algn="ctr"/>
+          </a:p>
+        </p:txBody>
+      </p:sp>
+      <p:sp>
+        <p:nvSpPr>
+          <p:cNvPr id="13" name="Rounded Rectangle 12"/>
+          <p:cNvSpPr/>
+          <p:nvPr/>
+        </p:nvSpPr>
+        <p:spPr>
+          <a:xfrm>
+            <a:off x="5349240" y="1325880"/>
+            <a:ext cx="3063240" cy="2423160"/>
           </a:xfrm>
           <a:prstGeom prst="roundRect">
             <a:avLst/>
@@ -8556,14 +10651,14 @@
       </p:sp>
       <p:sp>
         <p:nvSpPr>
-          <p:cNvPr id="13" name="Rectangle 12"/>
+          <p:cNvPr id="14" name="Rectangle 13"/>
           <p:cNvSpPr/>
           <p:nvPr/>
         </p:nvSpPr>
         <p:spPr>
           <a:xfrm>
-            <a:off x="4343400" y="1234440"/>
-            <a:ext cx="73152" cy="1828800"/>
+            <a:off x="5349240" y="1325880"/>
+            <a:ext cx="73152" cy="2423160"/>
           </a:xfrm>
           <a:prstGeom prst="rect">
             <a:avLst/>
@@ -8599,14 +10694,14 @@
       </p:sp>
       <p:sp>
         <p:nvSpPr>
-          <p:cNvPr id="14" name="TextBox 13"/>
-          <p:cNvSpPr txBox="1"/>
-          <p:nvPr/>
-        </p:nvSpPr>
-        <p:spPr>
-          <a:xfrm>
-            <a:off x="4544568" y="1399032"/>
-            <a:ext cx="3108960" cy="274320"/>
+          <p:cNvPr id="15" name="TextBox 14"/>
+          <p:cNvSpPr txBox="1"/>
+          <p:nvPr/>
+        </p:nvSpPr>
+        <p:spPr>
+          <a:xfrm>
+            <a:off x="5550407" y="1472184"/>
+            <a:ext cx="2734056" cy="292608"/>
           </a:xfrm>
           <a:prstGeom prst="rect">
             <a:avLst/>
@@ -8621,27 +10716,27 @@
           <a:p>
             <a:pPr algn="l"/>
             <a:r>
-              <a:rPr sz="1500" b="1">
+              <a:rPr sz="1700" b="1">
                 <a:solidFill>
                   <a:srgbClr val="0F172A"/>
                 </a:solidFill>
                 <a:latin typeface="Arial"/>
               </a:rPr>
-              <a:t>Solución</a:t>
-            </a:r>
-          </a:p>
-        </p:txBody>
-      </p:sp>
-      <p:sp>
-        <p:nvSpPr>
-          <p:cNvPr id="15" name="TextBox 14"/>
-          <p:cNvSpPr txBox="1"/>
-          <p:nvPr/>
-        </p:nvSpPr>
-        <p:spPr>
-          <a:xfrm>
-            <a:off x="4544568" y="1737360"/>
-            <a:ext cx="3108960" cy="1234440"/>
+              <a:t>Solución web</a:t>
+            </a:r>
+          </a:p>
+        </p:txBody>
+      </p:sp>
+      <p:sp>
+        <p:nvSpPr>
+          <p:cNvPr id="16" name="TextBox 15"/>
+          <p:cNvSpPr txBox="1"/>
+          <p:nvPr/>
+        </p:nvSpPr>
+        <p:spPr>
+          <a:xfrm>
+            <a:off x="5550407" y="1828800"/>
+            <a:ext cx="2734056" cy="1856231"/>
           </a:xfrm>
           <a:prstGeom prst="rect">
             <a:avLst/>
@@ -8656,27 +10751,70 @@
           <a:p>
             <a:pPr algn="l"/>
             <a:r>
-              <a:rPr sz="1080" b="0">
+              <a:rPr sz="1300" b="0">
                 <a:solidFill>
                   <a:srgbClr val="334155"/>
                 </a:solidFill>
                 <a:latin typeface="Arial"/>
               </a:rPr>
-              <a:t>Aplicación web conectada de extremo a extremo: Angular consume una API REST Spring Boot con persistencia MySQL.</a:t>
-            </a:r>
-          </a:p>
-        </p:txBody>
-      </p:sp>
-      <p:sp>
-        <p:nvSpPr>
-          <p:cNvPr id="16" name="Rounded Rectangle 15"/>
+              <a:t>Aplicación Angular conectada a una API REST Spring Boot y una base MySQL con datos reales.</a:t>
+            </a:r>
+          </a:p>
+        </p:txBody>
+      </p:sp>
+      <p:sp>
+        <p:nvSpPr>
+          <p:cNvPr id="17" name="Right Arrow 16"/>
           <p:cNvSpPr/>
           <p:nvPr/>
         </p:nvSpPr>
         <p:spPr>
           <a:xfrm>
-            <a:off x="8092440" y="1234440"/>
-            <a:ext cx="3429000" cy="1828800"/>
+            <a:off x="8732520" y="2057400"/>
+            <a:ext cx="914400" cy="502920"/>
+          </a:xfrm>
+          <a:prstGeom prst="rightArrow">
+            <a:avLst/>
+          </a:prstGeom>
+          <a:solidFill>
+            <a:srgbClr val="64748B"/>
+          </a:solidFill>
+          <a:ln>
+            <a:noFill/>
+          </a:ln>
+        </p:spPr>
+        <p:style>
+          <a:lnRef idx="1">
+            <a:schemeClr val="accent1"/>
+          </a:lnRef>
+          <a:fillRef idx="3">
+            <a:schemeClr val="accent1"/>
+          </a:fillRef>
+          <a:effectRef idx="2">
+            <a:schemeClr val="accent1"/>
+          </a:effectRef>
+          <a:fontRef idx="minor">
+            <a:schemeClr val="lt1"/>
+          </a:fontRef>
+        </p:style>
+        <p:txBody>
+          <a:bodyPr rtlCol="0" anchor="ctr"/>
+          <a:lstStyle/>
+          <a:p>
+            <a:pPr algn="ctr"/>
+          </a:p>
+        </p:txBody>
+      </p:sp>
+      <p:sp>
+        <p:nvSpPr>
+          <p:cNvPr id="18" name="Rounded Rectangle 17"/>
+          <p:cNvSpPr/>
+          <p:nvPr/>
+        </p:nvSpPr>
+        <p:spPr>
+          <a:xfrm>
+            <a:off x="9921240" y="1325880"/>
+            <a:ext cx="1691640" cy="2423160"/>
           </a:xfrm>
           <a:prstGeom prst="roundRect">
             <a:avLst/>
@@ -8714,14 +10852,14 @@
       </p:sp>
       <p:sp>
         <p:nvSpPr>
-          <p:cNvPr id="17" name="Rectangle 16"/>
+          <p:cNvPr id="19" name="Rectangle 18"/>
           <p:cNvSpPr/>
           <p:nvPr/>
         </p:nvSpPr>
         <p:spPr>
           <a:xfrm>
-            <a:off x="8092440" y="1234440"/>
-            <a:ext cx="73152" cy="1828800"/>
+            <a:off x="9921240" y="1325880"/>
+            <a:ext cx="73152" cy="2423160"/>
           </a:xfrm>
           <a:prstGeom prst="rect">
             <a:avLst/>
@@ -8757,14 +10895,14 @@
       </p:sp>
       <p:sp>
         <p:nvSpPr>
-          <p:cNvPr id="18" name="TextBox 17"/>
-          <p:cNvSpPr txBox="1"/>
-          <p:nvPr/>
-        </p:nvSpPr>
-        <p:spPr>
-          <a:xfrm>
-            <a:off x="8293608" y="1399032"/>
-            <a:ext cx="3108960" cy="274320"/>
+          <p:cNvPr id="20" name="TextBox 19"/>
+          <p:cNvSpPr txBox="1"/>
+          <p:nvPr/>
+        </p:nvSpPr>
+        <p:spPr>
+          <a:xfrm>
+            <a:off x="10122408" y="1472184"/>
+            <a:ext cx="1362456" cy="292608"/>
           </a:xfrm>
           <a:prstGeom prst="rect">
             <a:avLst/>
@@ -8779,27 +10917,27 @@
           <a:p>
             <a:pPr algn="l"/>
             <a:r>
-              <a:rPr sz="1500" b="1">
+              <a:rPr sz="1600" b="1">
                 <a:solidFill>
                   <a:srgbClr val="0F172A"/>
                 </a:solidFill>
                 <a:latin typeface="Arial"/>
               </a:rPr>
-              <a:t>Resultado</a:t>
-            </a:r>
-          </a:p>
-        </p:txBody>
-      </p:sp>
-      <p:sp>
-        <p:nvSpPr>
-          <p:cNvPr id="19" name="TextBox 18"/>
-          <p:cNvSpPr txBox="1"/>
-          <p:nvPr/>
-        </p:nvSpPr>
-        <p:spPr>
-          <a:xfrm>
-            <a:off x="8293608" y="1737360"/>
-            <a:ext cx="3108960" cy="1234440"/>
+              <a:t>Impacto</a:t>
+            </a:r>
+          </a:p>
+        </p:txBody>
+      </p:sp>
+      <p:sp>
+        <p:nvSpPr>
+          <p:cNvPr id="21" name="TextBox 20"/>
+          <p:cNvSpPr txBox="1"/>
+          <p:nvPr/>
+        </p:nvSpPr>
+        <p:spPr>
+          <a:xfrm>
+            <a:off x="10122408" y="1828800"/>
+            <a:ext cx="1362456" cy="1856231"/>
           </a:xfrm>
           <a:prstGeom prst="rect">
             <a:avLst/>
@@ -8814,27 +10952,29 @@
           <a:p>
             <a:pPr algn="l"/>
             <a:r>
-              <a:rPr sz="1080" b="0">
+              <a:rPr sz="1300" b="0">
                 <a:solidFill>
                   <a:srgbClr val="334155"/>
                 </a:solidFill>
                 <a:latin typeface="Arial"/>
               </a:rPr>
-              <a:t>Sistema funcional para sustentar: datos iniciales, validaciones, relaciónes, reportes y ejecución replicable con Docker.</a:t>
-            </a:r>
-          </a:p>
-        </p:txBody>
-      </p:sp>
-      <p:sp>
-        <p:nvSpPr>
-          <p:cNvPr id="20" name="TextBox 19"/>
-          <p:cNvSpPr txBox="1"/>
-          <p:nvPr/>
-        </p:nvSpPr>
-        <p:spPr>
-          <a:xfrm>
-            <a:off x="822960" y="3794760"/>
-            <a:ext cx="10698480" cy="1280160"/>
+              <a:t>Menos errores
+Más control
+Mejor sustento</a:t>
+            </a:r>
+          </a:p>
+        </p:txBody>
+      </p:sp>
+      <p:sp>
+        <p:nvSpPr>
+          <p:cNvPr id="22" name="TextBox 21"/>
+          <p:cNvSpPr txBox="1"/>
+          <p:nvPr/>
+        </p:nvSpPr>
+        <p:spPr>
+          <a:xfrm>
+            <a:off x="822960" y="4343400"/>
+            <a:ext cx="10241280" cy="320040"/>
           </a:xfrm>
           <a:prstGeom prst="rect">
             <a:avLst/>
@@ -8847,48 +10987,327 @@
           </a:bodyPr>
           <a:lstStyle/>
           <a:p>
-            <a:pPr>
-              <a:spcAft>
-                <a:spcPts val="500"/>
-              </a:spcAft>
-              <a:defRPr sz="1600">
-                <a:solidFill>
-                  <a:srgbClr val="334155"/>
-                </a:solidFill>
-              </a:defRPr>
-            </a:pPr>
-            <a:r>
-              <a:t>El sistema centraliza informacion de productos, clientes, pedidos y ventas.</a:t>
-            </a:r>
-          </a:p>
-          <a:p>
-            <a:pPr>
-              <a:spcAft>
-                <a:spcPts val="500"/>
-              </a:spcAft>
-              <a:defRPr sz="1600">
-                <a:solidFill>
-                  <a:srgbClr val="334155"/>
-                </a:solidFill>
-              </a:defRPr>
-            </a:pPr>
-            <a:r>
-              <a:t>Cada módulo responde a una tarea real de la empresa.</a:t>
-            </a:r>
-          </a:p>
-          <a:p>
-            <a:pPr>
-              <a:spcAft>
-                <a:spcPts val="500"/>
-              </a:spcAft>
-              <a:defRPr sz="1600">
-                <a:solidFill>
-                  <a:srgbClr val="334155"/>
-                </a:solidFill>
-              </a:defRPr>
-            </a:pPr>
-            <a:r>
-              <a:t>La estructura del proyecto permite replicarlo en otra PC desde GitHub.</a:t>
+            <a:pPr algn="l"/>
+            <a:r>
+              <a:rPr sz="1800" b="1">
+                <a:solidFill>
+                  <a:srgbClr val="0F172A"/>
+                </a:solidFill>
+                <a:latin typeface="Arial"/>
+              </a:rPr>
+              <a:t>Beneficios esperados para Chompas Mabel</a:t>
+            </a:r>
+          </a:p>
+        </p:txBody>
+      </p:sp>
+      <p:sp>
+        <p:nvSpPr>
+          <p:cNvPr id="23" name="Rounded Rectangle 22"/>
+          <p:cNvSpPr/>
+          <p:nvPr/>
+        </p:nvSpPr>
+        <p:spPr>
+          <a:xfrm>
+            <a:off x="822960" y="4983480"/>
+            <a:ext cx="2240280" cy="502920"/>
+          </a:xfrm>
+          <a:prstGeom prst="roundRect">
+            <a:avLst/>
+          </a:prstGeom>
+          <a:solidFill>
+            <a:srgbClr val="2563EB"/>
+          </a:solidFill>
+          <a:ln>
+            <a:noFill/>
+          </a:ln>
+        </p:spPr>
+        <p:style>
+          <a:lnRef idx="1">
+            <a:schemeClr val="accent1"/>
+          </a:lnRef>
+          <a:fillRef idx="3">
+            <a:schemeClr val="accent1"/>
+          </a:fillRef>
+          <a:effectRef idx="2">
+            <a:schemeClr val="accent1"/>
+          </a:effectRef>
+          <a:fontRef idx="minor">
+            <a:schemeClr val="lt1"/>
+          </a:fontRef>
+        </p:style>
+        <p:txBody>
+          <a:bodyPr rtlCol="0" anchor="ctr"/>
+          <a:lstStyle/>
+          <a:p>
+            <a:pPr algn="ctr"/>
+          </a:p>
+        </p:txBody>
+      </p:sp>
+      <p:sp>
+        <p:nvSpPr>
+          <p:cNvPr id="24" name="TextBox 23"/>
+          <p:cNvSpPr txBox="1"/>
+          <p:nvPr/>
+        </p:nvSpPr>
+        <p:spPr>
+          <a:xfrm>
+            <a:off x="822960" y="5084064"/>
+            <a:ext cx="2240280" cy="411480"/>
+          </a:xfrm>
+          <a:prstGeom prst="rect">
+            <a:avLst/>
+          </a:prstGeom>
+          <a:noFill/>
+        </p:spPr>
+        <p:txBody>
+          <a:bodyPr wrap="square">
+            <a:spAutoFit/>
+          </a:bodyPr>
+          <a:lstStyle/>
+          <a:p>
+            <a:pPr algn="ctr"/>
+            <a:r>
+              <a:rPr sz="1200" b="1">
+                <a:solidFill>
+                  <a:srgbClr val="FFFFFF"/>
+                </a:solidFill>
+                <a:latin typeface="Arial"/>
+              </a:rPr>
+              <a:t>Información centralizada</a:t>
+            </a:r>
+          </a:p>
+        </p:txBody>
+      </p:sp>
+      <p:sp>
+        <p:nvSpPr>
+          <p:cNvPr id="25" name="Rounded Rectangle 24"/>
+          <p:cNvSpPr/>
+          <p:nvPr/>
+        </p:nvSpPr>
+        <p:spPr>
+          <a:xfrm>
+            <a:off x="3566160" y="4983480"/>
+            <a:ext cx="2240280" cy="502920"/>
+          </a:xfrm>
+          <a:prstGeom prst="roundRect">
+            <a:avLst/>
+          </a:prstGeom>
+          <a:solidFill>
+            <a:srgbClr val="059669"/>
+          </a:solidFill>
+          <a:ln>
+            <a:noFill/>
+          </a:ln>
+        </p:spPr>
+        <p:style>
+          <a:lnRef idx="1">
+            <a:schemeClr val="accent1"/>
+          </a:lnRef>
+          <a:fillRef idx="3">
+            <a:schemeClr val="accent1"/>
+          </a:fillRef>
+          <a:effectRef idx="2">
+            <a:schemeClr val="accent1"/>
+          </a:effectRef>
+          <a:fontRef idx="minor">
+            <a:schemeClr val="lt1"/>
+          </a:fontRef>
+        </p:style>
+        <p:txBody>
+          <a:bodyPr rtlCol="0" anchor="ctr"/>
+          <a:lstStyle/>
+          <a:p>
+            <a:pPr algn="ctr"/>
+          </a:p>
+        </p:txBody>
+      </p:sp>
+      <p:sp>
+        <p:nvSpPr>
+          <p:cNvPr id="26" name="TextBox 25"/>
+          <p:cNvSpPr txBox="1"/>
+          <p:nvPr/>
+        </p:nvSpPr>
+        <p:spPr>
+          <a:xfrm>
+            <a:off x="3566160" y="5084064"/>
+            <a:ext cx="2240280" cy="411480"/>
+          </a:xfrm>
+          <a:prstGeom prst="rect">
+            <a:avLst/>
+          </a:prstGeom>
+          <a:noFill/>
+        </p:spPr>
+        <p:txBody>
+          <a:bodyPr wrap="square">
+            <a:spAutoFit/>
+          </a:bodyPr>
+          <a:lstStyle/>
+          <a:p>
+            <a:pPr algn="ctr"/>
+            <a:r>
+              <a:rPr sz="1200" b="1">
+                <a:solidFill>
+                  <a:srgbClr val="FFFFFF"/>
+                </a:solidFill>
+                <a:latin typeface="Arial"/>
+              </a:rPr>
+              <a:t>Inventario trazable</a:t>
+            </a:r>
+          </a:p>
+        </p:txBody>
+      </p:sp>
+      <p:sp>
+        <p:nvSpPr>
+          <p:cNvPr id="27" name="Rounded Rectangle 26"/>
+          <p:cNvSpPr/>
+          <p:nvPr/>
+        </p:nvSpPr>
+        <p:spPr>
+          <a:xfrm>
+            <a:off x="6309360" y="4983480"/>
+            <a:ext cx="2240280" cy="502920"/>
+          </a:xfrm>
+          <a:prstGeom prst="roundRect">
+            <a:avLst/>
+          </a:prstGeom>
+          <a:solidFill>
+            <a:srgbClr val="4F46E5"/>
+          </a:solidFill>
+          <a:ln>
+            <a:noFill/>
+          </a:ln>
+        </p:spPr>
+        <p:style>
+          <a:lnRef idx="1">
+            <a:schemeClr val="accent1"/>
+          </a:lnRef>
+          <a:fillRef idx="3">
+            <a:schemeClr val="accent1"/>
+          </a:fillRef>
+          <a:effectRef idx="2">
+            <a:schemeClr val="accent1"/>
+          </a:effectRef>
+          <a:fontRef idx="minor">
+            <a:schemeClr val="lt1"/>
+          </a:fontRef>
+        </p:style>
+        <p:txBody>
+          <a:bodyPr rtlCol="0" anchor="ctr"/>
+          <a:lstStyle/>
+          <a:p>
+            <a:pPr algn="ctr"/>
+          </a:p>
+        </p:txBody>
+      </p:sp>
+      <p:sp>
+        <p:nvSpPr>
+          <p:cNvPr id="28" name="TextBox 27"/>
+          <p:cNvSpPr txBox="1"/>
+          <p:nvPr/>
+        </p:nvSpPr>
+        <p:spPr>
+          <a:xfrm>
+            <a:off x="6309360" y="5084064"/>
+            <a:ext cx="2240280" cy="411480"/>
+          </a:xfrm>
+          <a:prstGeom prst="rect">
+            <a:avLst/>
+          </a:prstGeom>
+          <a:noFill/>
+        </p:spPr>
+        <p:txBody>
+          <a:bodyPr wrap="square">
+            <a:spAutoFit/>
+          </a:bodyPr>
+          <a:lstStyle/>
+          <a:p>
+            <a:pPr algn="ctr"/>
+            <a:r>
+              <a:rPr sz="1200" b="1">
+                <a:solidFill>
+                  <a:srgbClr val="FFFFFF"/>
+                </a:solidFill>
+                <a:latin typeface="Arial"/>
+              </a:rPr>
+              <a:t>Pedidos con detalle</a:t>
+            </a:r>
+          </a:p>
+        </p:txBody>
+      </p:sp>
+      <p:sp>
+        <p:nvSpPr>
+          <p:cNvPr id="29" name="Rounded Rectangle 28"/>
+          <p:cNvSpPr/>
+          <p:nvPr/>
+        </p:nvSpPr>
+        <p:spPr>
+          <a:xfrm>
+            <a:off x="9052560" y="4983480"/>
+            <a:ext cx="2240280" cy="502920"/>
+          </a:xfrm>
+          <a:prstGeom prst="roundRect">
+            <a:avLst/>
+          </a:prstGeom>
+          <a:solidFill>
+            <a:srgbClr val="D97706"/>
+          </a:solidFill>
+          <a:ln>
+            <a:noFill/>
+          </a:ln>
+        </p:spPr>
+        <p:style>
+          <a:lnRef idx="1">
+            <a:schemeClr val="accent1"/>
+          </a:lnRef>
+          <a:fillRef idx="3">
+            <a:schemeClr val="accent1"/>
+          </a:fillRef>
+          <a:effectRef idx="2">
+            <a:schemeClr val="accent1"/>
+          </a:effectRef>
+          <a:fontRef idx="minor">
+            <a:schemeClr val="lt1"/>
+          </a:fontRef>
+        </p:style>
+        <p:txBody>
+          <a:bodyPr rtlCol="0" anchor="ctr"/>
+          <a:lstStyle/>
+          <a:p>
+            <a:pPr algn="ctr"/>
+          </a:p>
+        </p:txBody>
+      </p:sp>
+      <p:sp>
+        <p:nvSpPr>
+          <p:cNvPr id="30" name="TextBox 29"/>
+          <p:cNvSpPr txBox="1"/>
+          <p:nvPr/>
+        </p:nvSpPr>
+        <p:spPr>
+          <a:xfrm>
+            <a:off x="9052560" y="5084064"/>
+            <a:ext cx="2240280" cy="411480"/>
+          </a:xfrm>
+          <a:prstGeom prst="rect">
+            <a:avLst/>
+          </a:prstGeom>
+          <a:noFill/>
+        </p:spPr>
+        <p:txBody>
+          <a:bodyPr wrap="square">
+            <a:spAutoFit/>
+          </a:bodyPr>
+          <a:lstStyle/>
+          <a:p>
+            <a:pPr algn="ctr"/>
+            <a:r>
+              <a:rPr sz="1200" b="1">
+                <a:solidFill>
+                  <a:srgbClr val="FFFFFF"/>
+                </a:solidFill>
+                <a:latin typeface="Arial"/>
+              </a:rPr>
+              <a:t>Reportes operativos</a:t>
             </a:r>
           </a:p>
         </p:txBody>
@@ -9062,7 +11481,7 @@
                 </a:solidFill>
                 <a:latin typeface="Arial"/>
               </a:rPr>
-              <a:t>Qué busca resolver el sistema</a:t>
+              <a:t>Qué busca resolver el proyecto</a:t>
             </a:r>
           </a:p>
         </p:txBody>
@@ -9111,7 +11530,7 @@
         <p:spPr>
           <a:xfrm>
             <a:off x="502920" y="1024128"/>
-            <a:ext cx="11155680" cy="2"/>
+            <a:ext cx="11155680" cy="12700"/>
           </a:xfrm>
           <a:prstGeom prst="rect">
             <a:avLst/>
@@ -9153,8 +11572,8 @@
         </p:nvSpPr>
         <p:spPr>
           <a:xfrm>
-            <a:off x="640080" y="1143000"/>
-            <a:ext cx="10972800" cy="1051560"/>
+            <a:off x="731520" y="1234440"/>
+            <a:ext cx="10744200" cy="1188720"/>
           </a:xfrm>
           <a:prstGeom prst="roundRect">
             <a:avLst/>
@@ -9198,8 +11617,8 @@
         </p:nvSpPr>
         <p:spPr>
           <a:xfrm>
-            <a:off x="640080" y="1143000"/>
-            <a:ext cx="73152" cy="1051560"/>
+            <a:off x="731520" y="1234440"/>
+            <a:ext cx="73152" cy="1188720"/>
           </a:xfrm>
           <a:prstGeom prst="rect">
             <a:avLst/>
@@ -9241,8 +11660,8 @@
         </p:nvSpPr>
         <p:spPr>
           <a:xfrm>
-            <a:off x="841247" y="1307592"/>
-            <a:ext cx="10652760" cy="274320"/>
+            <a:off x="932688" y="1380744"/>
+            <a:ext cx="10415016" cy="292608"/>
           </a:xfrm>
           <a:prstGeom prst="rect">
             <a:avLst/>
@@ -9257,7 +11676,7 @@
           <a:p>
             <a:pPr algn="l"/>
             <a:r>
-              <a:rPr sz="1500" b="1">
+              <a:rPr sz="1700" b="1">
                 <a:solidFill>
                   <a:srgbClr val="0F172A"/>
                 </a:solidFill>
@@ -9276,8 +11695,8 @@
         </p:nvSpPr>
         <p:spPr>
           <a:xfrm>
-            <a:off x="841247" y="1645920"/>
-            <a:ext cx="10652760" cy="457199"/>
+            <a:off x="932688" y="1737360"/>
+            <a:ext cx="10415016" cy="621792"/>
           </a:xfrm>
           <a:prstGeom prst="rect">
             <a:avLst/>
@@ -9292,13 +11711,13 @@
           <a:p>
             <a:pPr algn="l"/>
             <a:r>
-              <a:rPr sz="1080" b="0">
+              <a:rPr sz="1300" b="0">
                 <a:solidFill>
                   <a:srgbClr val="334155"/>
                 </a:solidFill>
                 <a:latin typeface="Arial"/>
               </a:rPr>
-              <a:t>Implementar un sistema web de gestión para Chompas Mabel que conecte frontend, backend y base de datos para administrar procesos comerciales.</a:t>
+              <a:t>Implementar un sistema web de gestión para Chompas Mabel que conecte frontend, backend y base de datos para administrar productos, inventario, clientes, pedidos, ventas y reportes.</a:t>
             </a:r>
           </a:p>
         </p:txBody>
@@ -9311,8 +11730,8 @@
         </p:nvSpPr>
         <p:spPr>
           <a:xfrm>
-            <a:off x="640080" y="2606040"/>
-            <a:ext cx="2514600" cy="2240280"/>
+            <a:off x="731520" y="2971800"/>
+            <a:ext cx="2468880" cy="2240280"/>
           </a:xfrm>
           <a:prstGeom prst="roundRect">
             <a:avLst/>
@@ -9356,7 +11775,7 @@
         </p:nvSpPr>
         <p:spPr>
           <a:xfrm>
-            <a:off x="640080" y="2606040"/>
+            <a:off x="731520" y="2971800"/>
             <a:ext cx="73152" cy="2240280"/>
           </a:xfrm>
           <a:prstGeom prst="rect">
@@ -9399,8 +11818,8 @@
         </p:nvSpPr>
         <p:spPr>
           <a:xfrm>
-            <a:off x="841247" y="2770632"/>
-            <a:ext cx="2194560" cy="274320"/>
+            <a:off x="932688" y="3118104"/>
+            <a:ext cx="2139696" cy="292608"/>
           </a:xfrm>
           <a:prstGeom prst="rect">
             <a:avLst/>
@@ -9421,7 +11840,7 @@
                 </a:solidFill>
                 <a:latin typeface="Arial"/>
               </a:rPr>
-              <a:t>Frontend</a:t>
+              <a:t>Frontend Angular</a:t>
             </a:r>
           </a:p>
         </p:txBody>
@@ -9434,8 +11853,8 @@
         </p:nvSpPr>
         <p:spPr>
           <a:xfrm>
-            <a:off x="841247" y="3108960"/>
-            <a:ext cx="2194560" cy="1645920"/>
+            <a:off x="932688" y="3474720"/>
+            <a:ext cx="2139696" cy="1673352"/>
           </a:xfrm>
           <a:prstGeom prst="rect">
             <a:avLst/>
@@ -9450,27 +11869,105 @@
           <a:p>
             <a:pPr algn="l"/>
             <a:r>
-              <a:rPr sz="1080" b="0">
+              <a:rPr sz="1150" b="0">
                 <a:solidFill>
                   <a:srgbClr val="334155"/>
                 </a:solidFill>
                 <a:latin typeface="Arial"/>
               </a:rPr>
-              <a:t>Angular 21, Bootstrap, rutas, servicios HTTP, signals y formularios reactivos.</a:t>
-            </a:r>
-          </a:p>
-        </p:txBody>
-      </p:sp>
-      <p:sp>
-        <p:nvSpPr>
-          <p:cNvPr id="16" name="Rounded Rectangle 15"/>
+              <a:t>Componentes, rutas, servicios HTTP, signals y formularios reactivos.</a:t>
+            </a:r>
+          </a:p>
+        </p:txBody>
+      </p:sp>
+      <p:sp>
+        <p:nvSpPr>
+          <p:cNvPr id="16" name="Oval 15"/>
           <p:cNvSpPr/>
           <p:nvPr/>
         </p:nvSpPr>
         <p:spPr>
           <a:xfrm>
-            <a:off x="3429000" y="2606040"/>
-            <a:ext cx="2514600" cy="2240280"/>
+            <a:off x="2423160" y="2743200"/>
+            <a:ext cx="502920" cy="502920"/>
+          </a:xfrm>
+          <a:prstGeom prst="ellipse">
+            <a:avLst/>
+          </a:prstGeom>
+          <a:solidFill>
+            <a:srgbClr val="E11D48"/>
+          </a:solidFill>
+          <a:ln>
+            <a:noFill/>
+          </a:ln>
+        </p:spPr>
+        <p:style>
+          <a:lnRef idx="1">
+            <a:schemeClr val="accent1"/>
+          </a:lnRef>
+          <a:fillRef idx="3">
+            <a:schemeClr val="accent1"/>
+          </a:fillRef>
+          <a:effectRef idx="2">
+            <a:schemeClr val="accent1"/>
+          </a:effectRef>
+          <a:fontRef idx="minor">
+            <a:schemeClr val="lt1"/>
+          </a:fontRef>
+        </p:style>
+        <p:txBody>
+          <a:bodyPr rtlCol="0" anchor="ctr"/>
+          <a:lstStyle/>
+          <a:p>
+            <a:pPr algn="ctr"/>
+          </a:p>
+        </p:txBody>
+      </p:sp>
+      <p:sp>
+        <p:nvSpPr>
+          <p:cNvPr id="17" name="TextBox 16"/>
+          <p:cNvSpPr txBox="1"/>
+          <p:nvPr/>
+        </p:nvSpPr>
+        <p:spPr>
+          <a:xfrm>
+            <a:off x="2423160" y="2862072"/>
+            <a:ext cx="502920" cy="182880"/>
+          </a:xfrm>
+          <a:prstGeom prst="rect">
+            <a:avLst/>
+          </a:prstGeom>
+          <a:noFill/>
+        </p:spPr>
+        <p:txBody>
+          <a:bodyPr wrap="square">
+            <a:spAutoFit/>
+          </a:bodyPr>
+          <a:lstStyle/>
+          <a:p>
+            <a:pPr algn="ctr"/>
+            <a:r>
+              <a:rPr sz="1100" b="1">
+                <a:solidFill>
+                  <a:srgbClr val="FFFFFF"/>
+                </a:solidFill>
+                <a:latin typeface="Arial"/>
+              </a:rPr>
+              <a:t>01</a:t>
+            </a:r>
+          </a:p>
+        </p:txBody>
+      </p:sp>
+      <p:sp>
+        <p:nvSpPr>
+          <p:cNvPr id="18" name="Rounded Rectangle 17"/>
+          <p:cNvSpPr/>
+          <p:nvPr/>
+        </p:nvSpPr>
+        <p:spPr>
+          <a:xfrm>
+            <a:off x="3474720" y="2971800"/>
+            <a:ext cx="2468880" cy="2240280"/>
           </a:xfrm>
           <a:prstGeom prst="roundRect">
             <a:avLst/>
@@ -9508,13 +12005,13 @@
       </p:sp>
       <p:sp>
         <p:nvSpPr>
-          <p:cNvPr id="17" name="Rectangle 16"/>
+          <p:cNvPr id="19" name="Rectangle 18"/>
           <p:cNvSpPr/>
           <p:nvPr/>
         </p:nvSpPr>
         <p:spPr>
           <a:xfrm>
-            <a:off x="3429000" y="2606040"/>
+            <a:off x="3474720" y="2971800"/>
             <a:ext cx="73152" cy="2240280"/>
           </a:xfrm>
           <a:prstGeom prst="rect">
@@ -9551,14 +12048,14 @@
       </p:sp>
       <p:sp>
         <p:nvSpPr>
-          <p:cNvPr id="18" name="TextBox 17"/>
-          <p:cNvSpPr txBox="1"/>
-          <p:nvPr/>
-        </p:nvSpPr>
-        <p:spPr>
-          <a:xfrm>
-            <a:off x="3630168" y="2770632"/>
-            <a:ext cx="2194560" cy="274320"/>
+          <p:cNvPr id="20" name="TextBox 19"/>
+          <p:cNvSpPr txBox="1"/>
+          <p:nvPr/>
+        </p:nvSpPr>
+        <p:spPr>
+          <a:xfrm>
+            <a:off x="3675887" y="3118104"/>
+            <a:ext cx="2139696" cy="292608"/>
           </a:xfrm>
           <a:prstGeom prst="rect">
             <a:avLst/>
@@ -9579,21 +12076,21 @@
                 </a:solidFill>
                 <a:latin typeface="Arial"/>
               </a:rPr>
-              <a:t>Backend</a:t>
-            </a:r>
-          </a:p>
-        </p:txBody>
-      </p:sp>
-      <p:sp>
-        <p:nvSpPr>
-          <p:cNvPr id="19" name="TextBox 18"/>
-          <p:cNvSpPr txBox="1"/>
-          <p:nvPr/>
-        </p:nvSpPr>
-        <p:spPr>
-          <a:xfrm>
-            <a:off x="3630168" y="3108960"/>
-            <a:ext cx="2194560" cy="1645920"/>
+              <a:t>Backend Spring Boot</a:t>
+            </a:r>
+          </a:p>
+        </p:txBody>
+      </p:sp>
+      <p:sp>
+        <p:nvSpPr>
+          <p:cNvPr id="21" name="TextBox 20"/>
+          <p:cNvSpPr txBox="1"/>
+          <p:nvPr/>
+        </p:nvSpPr>
+        <p:spPr>
+          <a:xfrm>
+            <a:off x="3675887" y="3474720"/>
+            <a:ext cx="2139696" cy="1673352"/>
           </a:xfrm>
           <a:prstGeom prst="rect">
             <a:avLst/>
@@ -9608,27 +12105,105 @@
           <a:p>
             <a:pPr algn="l"/>
             <a:r>
-              <a:rPr sz="1080" b="0">
+              <a:rPr sz="1150" b="0">
                 <a:solidFill>
                   <a:srgbClr val="334155"/>
                 </a:solidFill>
                 <a:latin typeface="Arial"/>
               </a:rPr>
-              <a:t>Java 21, Spring Boot, API REST, servicios, repositorios, DTOs y validaciones.</a:t>
-            </a:r>
-          </a:p>
-        </p:txBody>
-      </p:sp>
-      <p:sp>
-        <p:nvSpPr>
-          <p:cNvPr id="20" name="Rounded Rectangle 19"/>
+              <a:t>Controladores REST, servicios, repositorios JPA, DTOs y validaciónes.</a:t>
+            </a:r>
+          </a:p>
+        </p:txBody>
+      </p:sp>
+      <p:sp>
+        <p:nvSpPr>
+          <p:cNvPr id="22" name="Oval 21"/>
           <p:cNvSpPr/>
           <p:nvPr/>
         </p:nvSpPr>
         <p:spPr>
           <a:xfrm>
-            <a:off x="6217920" y="2606040"/>
-            <a:ext cx="2514600" cy="2240280"/>
+            <a:off x="5166360" y="2743200"/>
+            <a:ext cx="502920" cy="502920"/>
+          </a:xfrm>
+          <a:prstGeom prst="ellipse">
+            <a:avLst/>
+          </a:prstGeom>
+          <a:solidFill>
+            <a:srgbClr val="059669"/>
+          </a:solidFill>
+          <a:ln>
+            <a:noFill/>
+          </a:ln>
+        </p:spPr>
+        <p:style>
+          <a:lnRef idx="1">
+            <a:schemeClr val="accent1"/>
+          </a:lnRef>
+          <a:fillRef idx="3">
+            <a:schemeClr val="accent1"/>
+          </a:fillRef>
+          <a:effectRef idx="2">
+            <a:schemeClr val="accent1"/>
+          </a:effectRef>
+          <a:fontRef idx="minor">
+            <a:schemeClr val="lt1"/>
+          </a:fontRef>
+        </p:style>
+        <p:txBody>
+          <a:bodyPr rtlCol="0" anchor="ctr"/>
+          <a:lstStyle/>
+          <a:p>
+            <a:pPr algn="ctr"/>
+          </a:p>
+        </p:txBody>
+      </p:sp>
+      <p:sp>
+        <p:nvSpPr>
+          <p:cNvPr id="23" name="TextBox 22"/>
+          <p:cNvSpPr txBox="1"/>
+          <p:nvPr/>
+        </p:nvSpPr>
+        <p:spPr>
+          <a:xfrm>
+            <a:off x="5166360" y="2862072"/>
+            <a:ext cx="502920" cy="182880"/>
+          </a:xfrm>
+          <a:prstGeom prst="rect">
+            <a:avLst/>
+          </a:prstGeom>
+          <a:noFill/>
+        </p:spPr>
+        <p:txBody>
+          <a:bodyPr wrap="square">
+            <a:spAutoFit/>
+          </a:bodyPr>
+          <a:lstStyle/>
+          <a:p>
+            <a:pPr algn="ctr"/>
+            <a:r>
+              <a:rPr sz="1100" b="1">
+                <a:solidFill>
+                  <a:srgbClr val="FFFFFF"/>
+                </a:solidFill>
+                <a:latin typeface="Arial"/>
+              </a:rPr>
+              <a:t>02</a:t>
+            </a:r>
+          </a:p>
+        </p:txBody>
+      </p:sp>
+      <p:sp>
+        <p:nvSpPr>
+          <p:cNvPr id="24" name="Rounded Rectangle 23"/>
+          <p:cNvSpPr/>
+          <p:nvPr/>
+        </p:nvSpPr>
+        <p:spPr>
+          <a:xfrm>
+            <a:off x="6217920" y="2971800"/>
+            <a:ext cx="2468880" cy="2240280"/>
           </a:xfrm>
           <a:prstGeom prst="roundRect">
             <a:avLst/>
@@ -9666,13 +12241,13 @@
       </p:sp>
       <p:sp>
         <p:nvSpPr>
-          <p:cNvPr id="21" name="Rectangle 20"/>
+          <p:cNvPr id="25" name="Rectangle 24"/>
           <p:cNvSpPr/>
           <p:nvPr/>
         </p:nvSpPr>
         <p:spPr>
           <a:xfrm>
-            <a:off x="6217920" y="2606040"/>
+            <a:off x="6217920" y="2971800"/>
             <a:ext cx="73152" cy="2240280"/>
           </a:xfrm>
           <a:prstGeom prst="rect">
@@ -9709,14 +12284,14 @@
       </p:sp>
       <p:sp>
         <p:nvSpPr>
-          <p:cNvPr id="22" name="TextBox 21"/>
-          <p:cNvSpPr txBox="1"/>
-          <p:nvPr/>
-        </p:nvSpPr>
-        <p:spPr>
-          <a:xfrm>
-            <a:off x="6419088" y="2770632"/>
-            <a:ext cx="2194560" cy="274320"/>
+          <p:cNvPr id="26" name="TextBox 25"/>
+          <p:cNvSpPr txBox="1"/>
+          <p:nvPr/>
+        </p:nvSpPr>
+        <p:spPr>
+          <a:xfrm>
+            <a:off x="6419088" y="3118104"/>
+            <a:ext cx="2139696" cy="292608"/>
           </a:xfrm>
           <a:prstGeom prst="rect">
             <a:avLst/>
@@ -9737,21 +12312,21 @@
                 </a:solidFill>
                 <a:latin typeface="Arial"/>
               </a:rPr>
-              <a:t>Base de datos</a:t>
-            </a:r>
-          </a:p>
-        </p:txBody>
-      </p:sp>
-      <p:sp>
-        <p:nvSpPr>
-          <p:cNvPr id="23" name="TextBox 22"/>
-          <p:cNvSpPr txBox="1"/>
-          <p:nvPr/>
-        </p:nvSpPr>
-        <p:spPr>
-          <a:xfrm>
-            <a:off x="6419088" y="3108960"/>
-            <a:ext cx="2194560" cy="1645920"/>
+              <a:t>Base MySQL</a:t>
+            </a:r>
+          </a:p>
+        </p:txBody>
+      </p:sp>
+      <p:sp>
+        <p:nvSpPr>
+          <p:cNvPr id="27" name="TextBox 26"/>
+          <p:cNvSpPr txBox="1"/>
+          <p:nvPr/>
+        </p:nvSpPr>
+        <p:spPr>
+          <a:xfrm>
+            <a:off x="6419088" y="3474720"/>
+            <a:ext cx="2139696" cy="1673352"/>
           </a:xfrm>
           <a:prstGeom prst="rect">
             <a:avLst/>
@@ -9766,27 +12341,105 @@
           <a:p>
             <a:pPr algn="l"/>
             <a:r>
-              <a:rPr sz="1080" b="0">
+              <a:rPr sz="1150" b="0">
                 <a:solidFill>
                   <a:srgbClr val="334155"/>
                 </a:solidFill>
                 <a:latin typeface="Arial"/>
               </a:rPr>
-              <a:t>MySQL con tablas, relaciónes, claves primarias, claves foráneas y datos iniciales.</a:t>
-            </a:r>
-          </a:p>
-        </p:txBody>
-      </p:sp>
-      <p:sp>
-        <p:nvSpPr>
-          <p:cNvPr id="24" name="Rounded Rectangle 23"/>
+              <a:t>Modelo relaciónal con PK, FK, restricciones y datos iniciales.</a:t>
+            </a:r>
+          </a:p>
+        </p:txBody>
+      </p:sp>
+      <p:sp>
+        <p:nvSpPr>
+          <p:cNvPr id="28" name="Oval 27"/>
           <p:cNvSpPr/>
           <p:nvPr/>
         </p:nvSpPr>
         <p:spPr>
           <a:xfrm>
-            <a:off x="9006839" y="2606040"/>
-            <a:ext cx="2514600" cy="2240280"/>
+            <a:off x="7909560" y="2743200"/>
+            <a:ext cx="502920" cy="502920"/>
+          </a:xfrm>
+          <a:prstGeom prst="ellipse">
+            <a:avLst/>
+          </a:prstGeom>
+          <a:solidFill>
+            <a:srgbClr val="4F46E5"/>
+          </a:solidFill>
+          <a:ln>
+            <a:noFill/>
+          </a:ln>
+        </p:spPr>
+        <p:style>
+          <a:lnRef idx="1">
+            <a:schemeClr val="accent1"/>
+          </a:lnRef>
+          <a:fillRef idx="3">
+            <a:schemeClr val="accent1"/>
+          </a:fillRef>
+          <a:effectRef idx="2">
+            <a:schemeClr val="accent1"/>
+          </a:effectRef>
+          <a:fontRef idx="minor">
+            <a:schemeClr val="lt1"/>
+          </a:fontRef>
+        </p:style>
+        <p:txBody>
+          <a:bodyPr rtlCol="0" anchor="ctr"/>
+          <a:lstStyle/>
+          <a:p>
+            <a:pPr algn="ctr"/>
+          </a:p>
+        </p:txBody>
+      </p:sp>
+      <p:sp>
+        <p:nvSpPr>
+          <p:cNvPr id="29" name="TextBox 28"/>
+          <p:cNvSpPr txBox="1"/>
+          <p:nvPr/>
+        </p:nvSpPr>
+        <p:spPr>
+          <a:xfrm>
+            <a:off x="7909560" y="2862072"/>
+            <a:ext cx="502920" cy="182880"/>
+          </a:xfrm>
+          <a:prstGeom prst="rect">
+            <a:avLst/>
+          </a:prstGeom>
+          <a:noFill/>
+        </p:spPr>
+        <p:txBody>
+          <a:bodyPr wrap="square">
+            <a:spAutoFit/>
+          </a:bodyPr>
+          <a:lstStyle/>
+          <a:p>
+            <a:pPr algn="ctr"/>
+            <a:r>
+              <a:rPr sz="1100" b="1">
+                <a:solidFill>
+                  <a:srgbClr val="FFFFFF"/>
+                </a:solidFill>
+                <a:latin typeface="Arial"/>
+              </a:rPr>
+              <a:t>03</a:t>
+            </a:r>
+          </a:p>
+        </p:txBody>
+      </p:sp>
+      <p:sp>
+        <p:nvSpPr>
+          <p:cNvPr id="30" name="Rounded Rectangle 29"/>
+          <p:cNvSpPr/>
+          <p:nvPr/>
+        </p:nvSpPr>
+        <p:spPr>
+          <a:xfrm>
+            <a:off x="8961120" y="2971800"/>
+            <a:ext cx="2468880" cy="2240280"/>
           </a:xfrm>
           <a:prstGeom prst="roundRect">
             <a:avLst/>
@@ -9824,13 +12477,13 @@
       </p:sp>
       <p:sp>
         <p:nvSpPr>
-          <p:cNvPr id="25" name="Rectangle 24"/>
+          <p:cNvPr id="31" name="Rectangle 30"/>
           <p:cNvSpPr/>
           <p:nvPr/>
         </p:nvSpPr>
         <p:spPr>
           <a:xfrm>
-            <a:off x="9006839" y="2606040"/>
+            <a:off x="8961120" y="2971800"/>
             <a:ext cx="73152" cy="2240280"/>
           </a:xfrm>
           <a:prstGeom prst="rect">
@@ -9867,14 +12520,14 @@
       </p:sp>
       <p:sp>
         <p:nvSpPr>
-          <p:cNvPr id="26" name="TextBox 25"/>
-          <p:cNvSpPr txBox="1"/>
-          <p:nvPr/>
-        </p:nvSpPr>
-        <p:spPr>
-          <a:xfrm>
-            <a:off x="9208007" y="2770632"/>
-            <a:ext cx="2194560" cy="274320"/>
+          <p:cNvPr id="32" name="TextBox 31"/>
+          <p:cNvSpPr txBox="1"/>
+          <p:nvPr/>
+        </p:nvSpPr>
+        <p:spPr>
+          <a:xfrm>
+            <a:off x="9162288" y="3118104"/>
+            <a:ext cx="2139696" cy="292608"/>
           </a:xfrm>
           <a:prstGeom prst="rect">
             <a:avLst/>
@@ -9895,21 +12548,21 @@
                 </a:solidFill>
                 <a:latin typeface="Arial"/>
               </a:rPr>
-              <a:t>Entrega</a:t>
-            </a:r>
-          </a:p>
-        </p:txBody>
-      </p:sp>
-      <p:sp>
-        <p:nvSpPr>
-          <p:cNvPr id="27" name="TextBox 26"/>
-          <p:cNvSpPr txBox="1"/>
-          <p:nvPr/>
-        </p:nvSpPr>
-        <p:spPr>
-          <a:xfrm>
-            <a:off x="9208007" y="3108960"/>
-            <a:ext cx="2194560" cy="1645920"/>
+              <a:t>Entrega replicable</a:t>
+            </a:r>
+          </a:p>
+        </p:txBody>
+      </p:sp>
+      <p:sp>
+        <p:nvSpPr>
+          <p:cNvPr id="33" name="TextBox 32"/>
+          <p:cNvSpPr txBox="1"/>
+          <p:nvPr/>
+        </p:nvSpPr>
+        <p:spPr>
+          <a:xfrm>
+            <a:off x="9162288" y="3474720"/>
+            <a:ext cx="2139696" cy="1673352"/>
           </a:xfrm>
           <a:prstGeom prst="rect">
             <a:avLst/>
@@ -9924,13 +12577,91 @@
           <a:p>
             <a:pPr algn="l"/>
             <a:r>
-              <a:rPr sz="1080" b="0">
+              <a:rPr sz="1150" b="0">
                 <a:solidFill>
                   <a:srgbClr val="334155"/>
                 </a:solidFill>
                 <a:latin typeface="Arial"/>
               </a:rPr>
-              <a:t>README, Docker Compose, informe, PPT y evidencia de ejecución.</a:t>
+              <a:t>Docker Compose, README, GitHub, informe y presentación.</a:t>
+            </a:r>
+          </a:p>
+        </p:txBody>
+      </p:sp>
+      <p:sp>
+        <p:nvSpPr>
+          <p:cNvPr id="34" name="Oval 33"/>
+          <p:cNvSpPr/>
+          <p:nvPr/>
+        </p:nvSpPr>
+        <p:spPr>
+          <a:xfrm>
+            <a:off x="10652760" y="2743200"/>
+            <a:ext cx="502920" cy="502920"/>
+          </a:xfrm>
+          <a:prstGeom prst="ellipse">
+            <a:avLst/>
+          </a:prstGeom>
+          <a:solidFill>
+            <a:srgbClr val="D97706"/>
+          </a:solidFill>
+          <a:ln>
+            <a:noFill/>
+          </a:ln>
+        </p:spPr>
+        <p:style>
+          <a:lnRef idx="1">
+            <a:schemeClr val="accent1"/>
+          </a:lnRef>
+          <a:fillRef idx="3">
+            <a:schemeClr val="accent1"/>
+          </a:fillRef>
+          <a:effectRef idx="2">
+            <a:schemeClr val="accent1"/>
+          </a:effectRef>
+          <a:fontRef idx="minor">
+            <a:schemeClr val="lt1"/>
+          </a:fontRef>
+        </p:style>
+        <p:txBody>
+          <a:bodyPr rtlCol="0" anchor="ctr"/>
+          <a:lstStyle/>
+          <a:p>
+            <a:pPr algn="ctr"/>
+          </a:p>
+        </p:txBody>
+      </p:sp>
+      <p:sp>
+        <p:nvSpPr>
+          <p:cNvPr id="35" name="TextBox 34"/>
+          <p:cNvSpPr txBox="1"/>
+          <p:nvPr/>
+        </p:nvSpPr>
+        <p:spPr>
+          <a:xfrm>
+            <a:off x="10652760" y="2862072"/>
+            <a:ext cx="502920" cy="182880"/>
+          </a:xfrm>
+          <a:prstGeom prst="rect">
+            <a:avLst/>
+          </a:prstGeom>
+          <a:noFill/>
+        </p:spPr>
+        <p:txBody>
+          <a:bodyPr wrap="square">
+            <a:spAutoFit/>
+          </a:bodyPr>
+          <a:lstStyle/>
+          <a:p>
+            <a:pPr algn="ctr"/>
+            <a:r>
+              <a:rPr sz="1100" b="1">
+                <a:solidFill>
+                  <a:srgbClr val="FFFFFF"/>
+                </a:solidFill>
+                <a:latin typeface="Arial"/>
+              </a:rPr>
+              <a:t>04</a:t>
             </a:r>
           </a:p>
         </p:txBody>
@@ -10104,7 +12835,7 @@
                 </a:solidFill>
                 <a:latin typeface="Arial"/>
               </a:rPr>
-              <a:t>Cobertura funcional de la aplicación</a:t>
+              <a:t>Mapa funcional de la aplicación</a:t>
             </a:r>
           </a:p>
         </p:txBody>
@@ -10153,7 +12884,7 @@
         <p:spPr>
           <a:xfrm>
             <a:off x="502920" y="1024128"/>
-            <a:ext cx="11155680" cy="2"/>
+            <a:ext cx="11155680" cy="12700"/>
           </a:xfrm>
           <a:prstGeom prst="rect">
             <a:avLst/>
@@ -10196,7 +12927,7 @@
         <p:spPr>
           <a:xfrm>
             <a:off x="685800" y="1234440"/>
-            <a:ext cx="2468880" cy="1417320"/>
+            <a:ext cx="2651760" cy="4297680"/>
           </a:xfrm>
           <a:prstGeom prst="roundRect">
             <a:avLst/>
@@ -10241,7 +12972,7 @@
         <p:spPr>
           <a:xfrm>
             <a:off x="685800" y="1234440"/>
-            <a:ext cx="73152" cy="1417320"/>
+            <a:ext cx="73152" cy="4297680"/>
           </a:xfrm>
           <a:prstGeom prst="rect">
             <a:avLst/>
@@ -10283,8 +13014,8 @@
         </p:nvSpPr>
         <p:spPr>
           <a:xfrm>
-            <a:off x="886968" y="1399032"/>
-            <a:ext cx="2148840" cy="274320"/>
+            <a:off x="886968" y="1380744"/>
+            <a:ext cx="2322576" cy="292608"/>
           </a:xfrm>
           <a:prstGeom prst="rect">
             <a:avLst/>
@@ -10299,13 +13030,13 @@
           <a:p>
             <a:pPr algn="l"/>
             <a:r>
-              <a:rPr sz="1500" b="1">
+              <a:rPr sz="1600" b="1">
                 <a:solidFill>
                   <a:srgbClr val="0F172A"/>
                 </a:solidFill>
                 <a:latin typeface="Arial"/>
               </a:rPr>
-              <a:t>Login</a:t>
+              <a:t>Acceso y resumen</a:t>
             </a:r>
           </a:p>
         </p:txBody>
@@ -10319,7 +13050,7 @@
         <p:spPr>
           <a:xfrm>
             <a:off x="886968" y="1737360"/>
-            <a:ext cx="2148840" cy="822960"/>
+            <a:ext cx="2322576" cy="3730752"/>
           </a:xfrm>
           <a:prstGeom prst="rect">
             <a:avLst/>
@@ -10334,13 +13065,13 @@
           <a:p>
             <a:pPr algn="l"/>
             <a:r>
-              <a:rPr sz="1080" b="0">
+              <a:rPr sz="1100" b="0">
                 <a:solidFill>
                   <a:srgbClr val="334155"/>
                 </a:solidFill>
                 <a:latin typeface="Arial"/>
               </a:rPr>
-              <a:t>Acceso y sesión</a:t>
+              <a:t/>
             </a:r>
           </a:p>
         </p:txBody>
@@ -10353,8 +13084,238 @@
         </p:nvSpPr>
         <p:spPr>
           <a:xfrm>
-            <a:off x="3474720" y="1234440"/>
-            <a:ext cx="2468880" cy="1417320"/>
+            <a:off x="941832" y="1874519"/>
+            <a:ext cx="2121408" cy="658368"/>
+          </a:xfrm>
+          <a:prstGeom prst="roundRect">
+            <a:avLst/>
+          </a:prstGeom>
+          <a:solidFill>
+            <a:srgbClr val="F8FAFC"/>
+          </a:solidFill>
+          <a:ln>
+            <a:solidFill>
+              <a:srgbClr val="CBD5E1"/>
+            </a:solidFill>
+          </a:ln>
+        </p:spPr>
+        <p:style>
+          <a:lnRef idx="1">
+            <a:schemeClr val="accent1"/>
+          </a:lnRef>
+          <a:fillRef idx="3">
+            <a:schemeClr val="accent1"/>
+          </a:fillRef>
+          <a:effectRef idx="2">
+            <a:schemeClr val="accent1"/>
+          </a:effectRef>
+          <a:fontRef idx="minor">
+            <a:schemeClr val="lt1"/>
+          </a:fontRef>
+        </p:style>
+        <p:txBody>
+          <a:bodyPr rtlCol="0" anchor="ctr"/>
+          <a:lstStyle/>
+          <a:p>
+            <a:pPr algn="ctr"/>
+          </a:p>
+        </p:txBody>
+      </p:sp>
+      <p:sp>
+        <p:nvSpPr>
+          <p:cNvPr id="13" name="TextBox 12"/>
+          <p:cNvSpPr txBox="1"/>
+          <p:nvPr/>
+        </p:nvSpPr>
+        <p:spPr>
+          <a:xfrm>
+            <a:off x="1097280" y="1984248"/>
+            <a:ext cx="1828800" cy="201168"/>
+          </a:xfrm>
+          <a:prstGeom prst="rect">
+            <a:avLst/>
+          </a:prstGeom>
+          <a:noFill/>
+        </p:spPr>
+        <p:txBody>
+          <a:bodyPr wrap="square">
+            <a:spAutoFit/>
+          </a:bodyPr>
+          <a:lstStyle/>
+          <a:p>
+            <a:pPr algn="l"/>
+            <a:r>
+              <a:rPr sz="1200" b="1">
+                <a:solidFill>
+                  <a:srgbClr val="0F172A"/>
+                </a:solidFill>
+                <a:latin typeface="Arial"/>
+              </a:rPr>
+              <a:t>Login</a:t>
+            </a:r>
+          </a:p>
+        </p:txBody>
+      </p:sp>
+      <p:sp>
+        <p:nvSpPr>
+          <p:cNvPr id="14" name="TextBox 13"/>
+          <p:cNvSpPr txBox="1"/>
+          <p:nvPr/>
+        </p:nvSpPr>
+        <p:spPr>
+          <a:xfrm>
+            <a:off x="1097280" y="2231136"/>
+            <a:ext cx="1828800" cy="164592"/>
+          </a:xfrm>
+          <a:prstGeom prst="rect">
+            <a:avLst/>
+          </a:prstGeom>
+          <a:noFill/>
+        </p:spPr>
+        <p:txBody>
+          <a:bodyPr wrap="square">
+            <a:spAutoFit/>
+          </a:bodyPr>
+          <a:lstStyle/>
+          <a:p>
+            <a:pPr algn="l"/>
+            <a:r>
+              <a:rPr sz="880" b="0">
+                <a:solidFill>
+                  <a:srgbClr val="64748B"/>
+                </a:solidFill>
+                <a:latin typeface="Arial"/>
+              </a:rPr>
+              <a:t>Acceso y sesión</a:t>
+            </a:r>
+          </a:p>
+        </p:txBody>
+      </p:sp>
+      <p:sp>
+        <p:nvSpPr>
+          <p:cNvPr id="15" name="Rounded Rectangle 14"/>
+          <p:cNvSpPr/>
+          <p:nvPr/>
+        </p:nvSpPr>
+        <p:spPr>
+          <a:xfrm>
+            <a:off x="941832" y="2715768"/>
+            <a:ext cx="2121408" cy="658368"/>
+          </a:xfrm>
+          <a:prstGeom prst="roundRect">
+            <a:avLst/>
+          </a:prstGeom>
+          <a:solidFill>
+            <a:srgbClr val="F8FAFC"/>
+          </a:solidFill>
+          <a:ln>
+            <a:solidFill>
+              <a:srgbClr val="CBD5E1"/>
+            </a:solidFill>
+          </a:ln>
+        </p:spPr>
+        <p:style>
+          <a:lnRef idx="1">
+            <a:schemeClr val="accent1"/>
+          </a:lnRef>
+          <a:fillRef idx="3">
+            <a:schemeClr val="accent1"/>
+          </a:fillRef>
+          <a:effectRef idx="2">
+            <a:schemeClr val="accent1"/>
+          </a:effectRef>
+          <a:fontRef idx="minor">
+            <a:schemeClr val="lt1"/>
+          </a:fontRef>
+        </p:style>
+        <p:txBody>
+          <a:bodyPr rtlCol="0" anchor="ctr"/>
+          <a:lstStyle/>
+          <a:p>
+            <a:pPr algn="ctr"/>
+          </a:p>
+        </p:txBody>
+      </p:sp>
+      <p:sp>
+        <p:nvSpPr>
+          <p:cNvPr id="16" name="TextBox 15"/>
+          <p:cNvSpPr txBox="1"/>
+          <p:nvPr/>
+        </p:nvSpPr>
+        <p:spPr>
+          <a:xfrm>
+            <a:off x="1097280" y="2825496"/>
+            <a:ext cx="1828800" cy="201168"/>
+          </a:xfrm>
+          <a:prstGeom prst="rect">
+            <a:avLst/>
+          </a:prstGeom>
+          <a:noFill/>
+        </p:spPr>
+        <p:txBody>
+          <a:bodyPr wrap="square">
+            <a:spAutoFit/>
+          </a:bodyPr>
+          <a:lstStyle/>
+          <a:p>
+            <a:pPr algn="l"/>
+            <a:r>
+              <a:rPr sz="1200" b="1">
+                <a:solidFill>
+                  <a:srgbClr val="0F172A"/>
+                </a:solidFill>
+                <a:latin typeface="Arial"/>
+              </a:rPr>
+              <a:t>Dashboard</a:t>
+            </a:r>
+          </a:p>
+        </p:txBody>
+      </p:sp>
+      <p:sp>
+        <p:nvSpPr>
+          <p:cNvPr id="17" name="TextBox 16"/>
+          <p:cNvSpPr txBox="1"/>
+          <p:nvPr/>
+        </p:nvSpPr>
+        <p:spPr>
+          <a:xfrm>
+            <a:off x="1097280" y="3072384"/>
+            <a:ext cx="1828800" cy="164592"/>
+          </a:xfrm>
+          <a:prstGeom prst="rect">
+            <a:avLst/>
+          </a:prstGeom>
+          <a:noFill/>
+        </p:spPr>
+        <p:txBody>
+          <a:bodyPr wrap="square">
+            <a:spAutoFit/>
+          </a:bodyPr>
+          <a:lstStyle/>
+          <a:p>
+            <a:pPr algn="l"/>
+            <a:r>
+              <a:rPr sz="880" b="0">
+                <a:solidFill>
+                  <a:srgbClr val="64748B"/>
+                </a:solidFill>
+                <a:latin typeface="Arial"/>
+              </a:rPr>
+              <a:t>Indicadores</a:t>
+            </a:r>
+          </a:p>
+        </p:txBody>
+      </p:sp>
+      <p:sp>
+        <p:nvSpPr>
+          <p:cNvPr id="18" name="Rounded Rectangle 17"/>
+          <p:cNvSpPr/>
+          <p:nvPr/>
+        </p:nvSpPr>
+        <p:spPr>
+          <a:xfrm>
+            <a:off x="3520440" y="1234440"/>
+            <a:ext cx="2651760" cy="4297680"/>
           </a:xfrm>
           <a:prstGeom prst="roundRect">
             <a:avLst/>
@@ -10392,14 +13353,14 @@
       </p:sp>
       <p:sp>
         <p:nvSpPr>
-          <p:cNvPr id="13" name="Rectangle 12"/>
+          <p:cNvPr id="19" name="Rectangle 18"/>
           <p:cNvSpPr/>
           <p:nvPr/>
         </p:nvSpPr>
         <p:spPr>
           <a:xfrm>
-            <a:off x="3474720" y="1234440"/>
-            <a:ext cx="73152" cy="1417320"/>
+            <a:off x="3520440" y="1234440"/>
+            <a:ext cx="73152" cy="4297680"/>
           </a:xfrm>
           <a:prstGeom prst="rect">
             <a:avLst/>
@@ -10435,14 +13396,14 @@
       </p:sp>
       <p:sp>
         <p:nvSpPr>
-          <p:cNvPr id="14" name="TextBox 13"/>
-          <p:cNvSpPr txBox="1"/>
-          <p:nvPr/>
-        </p:nvSpPr>
-        <p:spPr>
-          <a:xfrm>
-            <a:off x="3675887" y="1399032"/>
-            <a:ext cx="2148840" cy="274320"/>
+          <p:cNvPr id="20" name="TextBox 19"/>
+          <p:cNvSpPr txBox="1"/>
+          <p:nvPr/>
+        </p:nvSpPr>
+        <p:spPr>
+          <a:xfrm>
+            <a:off x="3721608" y="1380744"/>
+            <a:ext cx="2322576" cy="292608"/>
           </a:xfrm>
           <a:prstGeom prst="rect">
             <a:avLst/>
@@ -10457,27 +13418,27 @@
           <a:p>
             <a:pPr algn="l"/>
             <a:r>
-              <a:rPr sz="1500" b="1">
+              <a:rPr sz="1600" b="1">
                 <a:solidFill>
                   <a:srgbClr val="0F172A"/>
                 </a:solidFill>
                 <a:latin typeface="Arial"/>
               </a:rPr>
-              <a:t>Dashboard</a:t>
-            </a:r>
-          </a:p>
-        </p:txBody>
-      </p:sp>
-      <p:sp>
-        <p:nvSpPr>
-          <p:cNvPr id="15" name="TextBox 14"/>
-          <p:cNvSpPr txBox="1"/>
-          <p:nvPr/>
-        </p:nvSpPr>
-        <p:spPr>
-          <a:xfrm>
-            <a:off x="3675887" y="1737360"/>
-            <a:ext cx="2148840" cy="822960"/>
+              <a:t>Gestión maestra</a:t>
+            </a:r>
+          </a:p>
+        </p:txBody>
+      </p:sp>
+      <p:sp>
+        <p:nvSpPr>
+          <p:cNvPr id="21" name="TextBox 20"/>
+          <p:cNvSpPr txBox="1"/>
+          <p:nvPr/>
+        </p:nvSpPr>
+        <p:spPr>
+          <a:xfrm>
+            <a:off x="3721608" y="1737360"/>
+            <a:ext cx="2322576" cy="3730752"/>
           </a:xfrm>
           <a:prstGeom prst="rect">
             <a:avLst/>
@@ -10492,27 +13453,372 @@
           <a:p>
             <a:pPr algn="l"/>
             <a:r>
-              <a:rPr sz="1080" b="0">
+              <a:rPr sz="1100" b="0">
                 <a:solidFill>
                   <a:srgbClr val="334155"/>
                 </a:solidFill>
                 <a:latin typeface="Arial"/>
               </a:rPr>
-              <a:t>Indicadores generales</a:t>
-            </a:r>
-          </a:p>
-        </p:txBody>
-      </p:sp>
-      <p:sp>
-        <p:nvSpPr>
-          <p:cNvPr id="16" name="Rounded Rectangle 15"/>
+              <a:t/>
+            </a:r>
+          </a:p>
+        </p:txBody>
+      </p:sp>
+      <p:sp>
+        <p:nvSpPr>
+          <p:cNvPr id="22" name="Rounded Rectangle 21"/>
           <p:cNvSpPr/>
           <p:nvPr/>
         </p:nvSpPr>
         <p:spPr>
           <a:xfrm>
-            <a:off x="6263640" y="1234440"/>
-            <a:ext cx="2468880" cy="1417320"/>
+            <a:off x="3776472" y="1874519"/>
+            <a:ext cx="2121408" cy="658368"/>
+          </a:xfrm>
+          <a:prstGeom prst="roundRect">
+            <a:avLst/>
+          </a:prstGeom>
+          <a:solidFill>
+            <a:srgbClr val="F8FAFC"/>
+          </a:solidFill>
+          <a:ln>
+            <a:solidFill>
+              <a:srgbClr val="CBD5E1"/>
+            </a:solidFill>
+          </a:ln>
+        </p:spPr>
+        <p:style>
+          <a:lnRef idx="1">
+            <a:schemeClr val="accent1"/>
+          </a:lnRef>
+          <a:fillRef idx="3">
+            <a:schemeClr val="accent1"/>
+          </a:fillRef>
+          <a:effectRef idx="2">
+            <a:schemeClr val="accent1"/>
+          </a:effectRef>
+          <a:fontRef idx="minor">
+            <a:schemeClr val="lt1"/>
+          </a:fontRef>
+        </p:style>
+        <p:txBody>
+          <a:bodyPr rtlCol="0" anchor="ctr"/>
+          <a:lstStyle/>
+          <a:p>
+            <a:pPr algn="ctr"/>
+          </a:p>
+        </p:txBody>
+      </p:sp>
+      <p:sp>
+        <p:nvSpPr>
+          <p:cNvPr id="23" name="TextBox 22"/>
+          <p:cNvSpPr txBox="1"/>
+          <p:nvPr/>
+        </p:nvSpPr>
+        <p:spPr>
+          <a:xfrm>
+            <a:off x="3931920" y="1984248"/>
+            <a:ext cx="1828800" cy="201168"/>
+          </a:xfrm>
+          <a:prstGeom prst="rect">
+            <a:avLst/>
+          </a:prstGeom>
+          <a:noFill/>
+        </p:spPr>
+        <p:txBody>
+          <a:bodyPr wrap="square">
+            <a:spAutoFit/>
+          </a:bodyPr>
+          <a:lstStyle/>
+          <a:p>
+            <a:pPr algn="l"/>
+            <a:r>
+              <a:rPr sz="1200" b="1">
+                <a:solidFill>
+                  <a:srgbClr val="0F172A"/>
+                </a:solidFill>
+                <a:latin typeface="Arial"/>
+              </a:rPr>
+              <a:t>Productos</a:t>
+            </a:r>
+          </a:p>
+        </p:txBody>
+      </p:sp>
+      <p:sp>
+        <p:nvSpPr>
+          <p:cNvPr id="24" name="TextBox 23"/>
+          <p:cNvSpPr txBox="1"/>
+          <p:nvPr/>
+        </p:nvSpPr>
+        <p:spPr>
+          <a:xfrm>
+            <a:off x="3931920" y="2231136"/>
+            <a:ext cx="1828800" cy="164592"/>
+          </a:xfrm>
+          <a:prstGeom prst="rect">
+            <a:avLst/>
+          </a:prstGeom>
+          <a:noFill/>
+        </p:spPr>
+        <p:txBody>
+          <a:bodyPr wrap="square">
+            <a:spAutoFit/>
+          </a:bodyPr>
+          <a:lstStyle/>
+          <a:p>
+            <a:pPr algn="l"/>
+            <a:r>
+              <a:rPr sz="880" b="0">
+                <a:solidFill>
+                  <a:srgbClr val="64748B"/>
+                </a:solidFill>
+                <a:latin typeface="Arial"/>
+              </a:rPr>
+              <a:t>CRUD y catálogo</a:t>
+            </a:r>
+          </a:p>
+        </p:txBody>
+      </p:sp>
+      <p:sp>
+        <p:nvSpPr>
+          <p:cNvPr id="25" name="Rounded Rectangle 24"/>
+          <p:cNvSpPr/>
+          <p:nvPr/>
+        </p:nvSpPr>
+        <p:spPr>
+          <a:xfrm>
+            <a:off x="3776472" y="2715768"/>
+            <a:ext cx="2121408" cy="658368"/>
+          </a:xfrm>
+          <a:prstGeom prst="roundRect">
+            <a:avLst/>
+          </a:prstGeom>
+          <a:solidFill>
+            <a:srgbClr val="F8FAFC"/>
+          </a:solidFill>
+          <a:ln>
+            <a:solidFill>
+              <a:srgbClr val="CBD5E1"/>
+            </a:solidFill>
+          </a:ln>
+        </p:spPr>
+        <p:style>
+          <a:lnRef idx="1">
+            <a:schemeClr val="accent1"/>
+          </a:lnRef>
+          <a:fillRef idx="3">
+            <a:schemeClr val="accent1"/>
+          </a:fillRef>
+          <a:effectRef idx="2">
+            <a:schemeClr val="accent1"/>
+          </a:effectRef>
+          <a:fontRef idx="minor">
+            <a:schemeClr val="lt1"/>
+          </a:fontRef>
+        </p:style>
+        <p:txBody>
+          <a:bodyPr rtlCol="0" anchor="ctr"/>
+          <a:lstStyle/>
+          <a:p>
+            <a:pPr algn="ctr"/>
+          </a:p>
+        </p:txBody>
+      </p:sp>
+      <p:sp>
+        <p:nvSpPr>
+          <p:cNvPr id="26" name="TextBox 25"/>
+          <p:cNvSpPr txBox="1"/>
+          <p:nvPr/>
+        </p:nvSpPr>
+        <p:spPr>
+          <a:xfrm>
+            <a:off x="3931920" y="2825496"/>
+            <a:ext cx="1828800" cy="201168"/>
+          </a:xfrm>
+          <a:prstGeom prst="rect">
+            <a:avLst/>
+          </a:prstGeom>
+          <a:noFill/>
+        </p:spPr>
+        <p:txBody>
+          <a:bodyPr wrap="square">
+            <a:spAutoFit/>
+          </a:bodyPr>
+          <a:lstStyle/>
+          <a:p>
+            <a:pPr algn="l"/>
+            <a:r>
+              <a:rPr sz="1200" b="1">
+                <a:solidFill>
+                  <a:srgbClr val="0F172A"/>
+                </a:solidFill>
+                <a:latin typeface="Arial"/>
+              </a:rPr>
+              <a:t>Inventario</a:t>
+            </a:r>
+          </a:p>
+        </p:txBody>
+      </p:sp>
+      <p:sp>
+        <p:nvSpPr>
+          <p:cNvPr id="27" name="TextBox 26"/>
+          <p:cNvSpPr txBox="1"/>
+          <p:nvPr/>
+        </p:nvSpPr>
+        <p:spPr>
+          <a:xfrm>
+            <a:off x="3931920" y="3072384"/>
+            <a:ext cx="1828800" cy="164592"/>
+          </a:xfrm>
+          <a:prstGeom prst="rect">
+            <a:avLst/>
+          </a:prstGeom>
+          <a:noFill/>
+        </p:spPr>
+        <p:txBody>
+          <a:bodyPr wrap="square">
+            <a:spAutoFit/>
+          </a:bodyPr>
+          <a:lstStyle/>
+          <a:p>
+            <a:pPr algn="l"/>
+            <a:r>
+              <a:rPr sz="880" b="0">
+                <a:solidFill>
+                  <a:srgbClr val="64748B"/>
+                </a:solidFill>
+                <a:latin typeface="Arial"/>
+              </a:rPr>
+              <a:t>Stock y movimientos</a:t>
+            </a:r>
+          </a:p>
+        </p:txBody>
+      </p:sp>
+      <p:sp>
+        <p:nvSpPr>
+          <p:cNvPr id="28" name="Rounded Rectangle 27"/>
+          <p:cNvSpPr/>
+          <p:nvPr/>
+        </p:nvSpPr>
+        <p:spPr>
+          <a:xfrm>
+            <a:off x="3776472" y="3557015"/>
+            <a:ext cx="2121408" cy="658368"/>
+          </a:xfrm>
+          <a:prstGeom prst="roundRect">
+            <a:avLst/>
+          </a:prstGeom>
+          <a:solidFill>
+            <a:srgbClr val="F8FAFC"/>
+          </a:solidFill>
+          <a:ln>
+            <a:solidFill>
+              <a:srgbClr val="CBD5E1"/>
+            </a:solidFill>
+          </a:ln>
+        </p:spPr>
+        <p:style>
+          <a:lnRef idx="1">
+            <a:schemeClr val="accent1"/>
+          </a:lnRef>
+          <a:fillRef idx="3">
+            <a:schemeClr val="accent1"/>
+          </a:fillRef>
+          <a:effectRef idx="2">
+            <a:schemeClr val="accent1"/>
+          </a:effectRef>
+          <a:fontRef idx="minor">
+            <a:schemeClr val="lt1"/>
+          </a:fontRef>
+        </p:style>
+        <p:txBody>
+          <a:bodyPr rtlCol="0" anchor="ctr"/>
+          <a:lstStyle/>
+          <a:p>
+            <a:pPr algn="ctr"/>
+          </a:p>
+        </p:txBody>
+      </p:sp>
+      <p:sp>
+        <p:nvSpPr>
+          <p:cNvPr id="29" name="TextBox 28"/>
+          <p:cNvSpPr txBox="1"/>
+          <p:nvPr/>
+        </p:nvSpPr>
+        <p:spPr>
+          <a:xfrm>
+            <a:off x="3931920" y="3666744"/>
+            <a:ext cx="1828800" cy="201168"/>
+          </a:xfrm>
+          <a:prstGeom prst="rect">
+            <a:avLst/>
+          </a:prstGeom>
+          <a:noFill/>
+        </p:spPr>
+        <p:txBody>
+          <a:bodyPr wrap="square">
+            <a:spAutoFit/>
+          </a:bodyPr>
+          <a:lstStyle/>
+          <a:p>
+            <a:pPr algn="l"/>
+            <a:r>
+              <a:rPr sz="1200" b="1">
+                <a:solidFill>
+                  <a:srgbClr val="0F172A"/>
+                </a:solidFill>
+                <a:latin typeface="Arial"/>
+              </a:rPr>
+              <a:t>Clientes</a:t>
+            </a:r>
+          </a:p>
+        </p:txBody>
+      </p:sp>
+      <p:sp>
+        <p:nvSpPr>
+          <p:cNvPr id="30" name="TextBox 29"/>
+          <p:cNvSpPr txBox="1"/>
+          <p:nvPr/>
+        </p:nvSpPr>
+        <p:spPr>
+          <a:xfrm>
+            <a:off x="3931920" y="3913631"/>
+            <a:ext cx="1828800" cy="164592"/>
+          </a:xfrm>
+          <a:prstGeom prst="rect">
+            <a:avLst/>
+          </a:prstGeom>
+          <a:noFill/>
+        </p:spPr>
+        <p:txBody>
+          <a:bodyPr wrap="square">
+            <a:spAutoFit/>
+          </a:bodyPr>
+          <a:lstStyle/>
+          <a:p>
+            <a:pPr algn="l"/>
+            <a:r>
+              <a:rPr sz="880" b="0">
+                <a:solidFill>
+                  <a:srgbClr val="64748B"/>
+                </a:solidFill>
+                <a:latin typeface="Arial"/>
+              </a:rPr>
+              <a:t>Registro y consulta</a:t>
+            </a:r>
+          </a:p>
+        </p:txBody>
+      </p:sp>
+      <p:sp>
+        <p:nvSpPr>
+          <p:cNvPr id="31" name="Rounded Rectangle 30"/>
+          <p:cNvSpPr/>
+          <p:nvPr/>
+        </p:nvSpPr>
+        <p:spPr>
+          <a:xfrm>
+            <a:off x="6355080" y="1234440"/>
+            <a:ext cx="2651760" cy="4297680"/>
           </a:xfrm>
           <a:prstGeom prst="roundRect">
             <a:avLst/>
@@ -10550,20 +13856,20 @@
       </p:sp>
       <p:sp>
         <p:nvSpPr>
-          <p:cNvPr id="17" name="Rectangle 16"/>
+          <p:cNvPr id="32" name="Rectangle 31"/>
           <p:cNvSpPr/>
           <p:nvPr/>
         </p:nvSpPr>
         <p:spPr>
           <a:xfrm>
-            <a:off x="6263640" y="1234440"/>
-            <a:ext cx="73152" cy="1417320"/>
-          </a:xfrm>
-          <a:prstGeom prst="rect">
-            <a:avLst/>
-          </a:prstGeom>
-          <a:solidFill>
-            <a:srgbClr val="4F46E5"/>
+            <a:off x="6355080" y="1234440"/>
+            <a:ext cx="73152" cy="4297680"/>
+          </a:xfrm>
+          <a:prstGeom prst="rect">
+            <a:avLst/>
+          </a:prstGeom>
+          <a:solidFill>
+            <a:srgbClr val="059669"/>
           </a:solidFill>
           <a:ln>
             <a:noFill/>
@@ -10593,14 +13899,14 @@
       </p:sp>
       <p:sp>
         <p:nvSpPr>
-          <p:cNvPr id="18" name="TextBox 17"/>
-          <p:cNvSpPr txBox="1"/>
-          <p:nvPr/>
-        </p:nvSpPr>
-        <p:spPr>
-          <a:xfrm>
-            <a:off x="6464807" y="1399032"/>
-            <a:ext cx="2148840" cy="274320"/>
+          <p:cNvPr id="33" name="TextBox 32"/>
+          <p:cNvSpPr txBox="1"/>
+          <p:nvPr/>
+        </p:nvSpPr>
+        <p:spPr>
+          <a:xfrm>
+            <a:off x="6556248" y="1380744"/>
+            <a:ext cx="2322576" cy="292608"/>
           </a:xfrm>
           <a:prstGeom prst="rect">
             <a:avLst/>
@@ -10615,27 +13921,27 @@
           <a:p>
             <a:pPr algn="l"/>
             <a:r>
-              <a:rPr sz="1500" b="1">
+              <a:rPr sz="1600" b="1">
                 <a:solidFill>
                   <a:srgbClr val="0F172A"/>
                 </a:solidFill>
                 <a:latin typeface="Arial"/>
               </a:rPr>
-              <a:t>Productos</a:t>
-            </a:r>
-          </a:p>
-        </p:txBody>
-      </p:sp>
-      <p:sp>
-        <p:nvSpPr>
-          <p:cNvPr id="19" name="TextBox 18"/>
-          <p:cNvSpPr txBox="1"/>
-          <p:nvPr/>
-        </p:nvSpPr>
-        <p:spPr>
-          <a:xfrm>
-            <a:off x="6464807" y="1737360"/>
-            <a:ext cx="2148840" cy="822960"/>
+              <a:t>Operación</a:t>
+            </a:r>
+          </a:p>
+        </p:txBody>
+      </p:sp>
+      <p:sp>
+        <p:nvSpPr>
+          <p:cNvPr id="34" name="TextBox 33"/>
+          <p:cNvSpPr txBox="1"/>
+          <p:nvPr/>
+        </p:nvSpPr>
+        <p:spPr>
+          <a:xfrm>
+            <a:off x="6556248" y="1737360"/>
+            <a:ext cx="2322576" cy="3730752"/>
           </a:xfrm>
           <a:prstGeom prst="rect">
             <a:avLst/>
@@ -10650,27 +13956,257 @@
           <a:p>
             <a:pPr algn="l"/>
             <a:r>
-              <a:rPr sz="1080" b="0">
+              <a:rPr sz="1100" b="0">
                 <a:solidFill>
                   <a:srgbClr val="334155"/>
                 </a:solidFill>
                 <a:latin typeface="Arial"/>
               </a:rPr>
-              <a:t>CRUD y catálogo</a:t>
-            </a:r>
-          </a:p>
-        </p:txBody>
-      </p:sp>
-      <p:sp>
-        <p:nvSpPr>
-          <p:cNvPr id="20" name="Rounded Rectangle 19"/>
+              <a:t/>
+            </a:r>
+          </a:p>
+        </p:txBody>
+      </p:sp>
+      <p:sp>
+        <p:nvSpPr>
+          <p:cNvPr id="35" name="Rounded Rectangle 34"/>
           <p:cNvSpPr/>
           <p:nvPr/>
         </p:nvSpPr>
         <p:spPr>
           <a:xfrm>
-            <a:off x="9052559" y="1234440"/>
-            <a:ext cx="2468880" cy="1417320"/>
+            <a:off x="6611112" y="1874519"/>
+            <a:ext cx="2121408" cy="658368"/>
+          </a:xfrm>
+          <a:prstGeom prst="roundRect">
+            <a:avLst/>
+          </a:prstGeom>
+          <a:solidFill>
+            <a:srgbClr val="F8FAFC"/>
+          </a:solidFill>
+          <a:ln>
+            <a:solidFill>
+              <a:srgbClr val="CBD5E1"/>
+            </a:solidFill>
+          </a:ln>
+        </p:spPr>
+        <p:style>
+          <a:lnRef idx="1">
+            <a:schemeClr val="accent1"/>
+          </a:lnRef>
+          <a:fillRef idx="3">
+            <a:schemeClr val="accent1"/>
+          </a:fillRef>
+          <a:effectRef idx="2">
+            <a:schemeClr val="accent1"/>
+          </a:effectRef>
+          <a:fontRef idx="minor">
+            <a:schemeClr val="lt1"/>
+          </a:fontRef>
+        </p:style>
+        <p:txBody>
+          <a:bodyPr rtlCol="0" anchor="ctr"/>
+          <a:lstStyle/>
+          <a:p>
+            <a:pPr algn="ctr"/>
+          </a:p>
+        </p:txBody>
+      </p:sp>
+      <p:sp>
+        <p:nvSpPr>
+          <p:cNvPr id="36" name="TextBox 35"/>
+          <p:cNvSpPr txBox="1"/>
+          <p:nvPr/>
+        </p:nvSpPr>
+        <p:spPr>
+          <a:xfrm>
+            <a:off x="6766560" y="1984248"/>
+            <a:ext cx="1828800" cy="201168"/>
+          </a:xfrm>
+          <a:prstGeom prst="rect">
+            <a:avLst/>
+          </a:prstGeom>
+          <a:noFill/>
+        </p:spPr>
+        <p:txBody>
+          <a:bodyPr wrap="square">
+            <a:spAutoFit/>
+          </a:bodyPr>
+          <a:lstStyle/>
+          <a:p>
+            <a:pPr algn="l"/>
+            <a:r>
+              <a:rPr sz="1200" b="1">
+                <a:solidFill>
+                  <a:srgbClr val="0F172A"/>
+                </a:solidFill>
+                <a:latin typeface="Arial"/>
+              </a:rPr>
+              <a:t>Pedidos</a:t>
+            </a:r>
+          </a:p>
+        </p:txBody>
+      </p:sp>
+      <p:sp>
+        <p:nvSpPr>
+          <p:cNvPr id="37" name="TextBox 36"/>
+          <p:cNvSpPr txBox="1"/>
+          <p:nvPr/>
+        </p:nvSpPr>
+        <p:spPr>
+          <a:xfrm>
+            <a:off x="6766560" y="2231136"/>
+            <a:ext cx="1828800" cy="164592"/>
+          </a:xfrm>
+          <a:prstGeom prst="rect">
+            <a:avLst/>
+          </a:prstGeom>
+          <a:noFill/>
+        </p:spPr>
+        <p:txBody>
+          <a:bodyPr wrap="square">
+            <a:spAutoFit/>
+          </a:bodyPr>
+          <a:lstStyle/>
+          <a:p>
+            <a:pPr algn="l"/>
+            <a:r>
+              <a:rPr sz="880" b="0">
+                <a:solidFill>
+                  <a:srgbClr val="64748B"/>
+                </a:solidFill>
+                <a:latin typeface="Arial"/>
+              </a:rPr>
+              <a:t>Detalle y totales</a:t>
+            </a:r>
+          </a:p>
+        </p:txBody>
+      </p:sp>
+      <p:sp>
+        <p:nvSpPr>
+          <p:cNvPr id="38" name="Rounded Rectangle 37"/>
+          <p:cNvSpPr/>
+          <p:nvPr/>
+        </p:nvSpPr>
+        <p:spPr>
+          <a:xfrm>
+            <a:off x="6611112" y="2715768"/>
+            <a:ext cx="2121408" cy="658368"/>
+          </a:xfrm>
+          <a:prstGeom prst="roundRect">
+            <a:avLst/>
+          </a:prstGeom>
+          <a:solidFill>
+            <a:srgbClr val="F8FAFC"/>
+          </a:solidFill>
+          <a:ln>
+            <a:solidFill>
+              <a:srgbClr val="CBD5E1"/>
+            </a:solidFill>
+          </a:ln>
+        </p:spPr>
+        <p:style>
+          <a:lnRef idx="1">
+            <a:schemeClr val="accent1"/>
+          </a:lnRef>
+          <a:fillRef idx="3">
+            <a:schemeClr val="accent1"/>
+          </a:fillRef>
+          <a:effectRef idx="2">
+            <a:schemeClr val="accent1"/>
+          </a:effectRef>
+          <a:fontRef idx="minor">
+            <a:schemeClr val="lt1"/>
+          </a:fontRef>
+        </p:style>
+        <p:txBody>
+          <a:bodyPr rtlCol="0" anchor="ctr"/>
+          <a:lstStyle/>
+          <a:p>
+            <a:pPr algn="ctr"/>
+          </a:p>
+        </p:txBody>
+      </p:sp>
+      <p:sp>
+        <p:nvSpPr>
+          <p:cNvPr id="39" name="TextBox 38"/>
+          <p:cNvSpPr txBox="1"/>
+          <p:nvPr/>
+        </p:nvSpPr>
+        <p:spPr>
+          <a:xfrm>
+            <a:off x="6766560" y="2825496"/>
+            <a:ext cx="1828800" cy="201168"/>
+          </a:xfrm>
+          <a:prstGeom prst="rect">
+            <a:avLst/>
+          </a:prstGeom>
+          <a:noFill/>
+        </p:spPr>
+        <p:txBody>
+          <a:bodyPr wrap="square">
+            <a:spAutoFit/>
+          </a:bodyPr>
+          <a:lstStyle/>
+          <a:p>
+            <a:pPr algn="l"/>
+            <a:r>
+              <a:rPr sz="1200" b="1">
+                <a:solidFill>
+                  <a:srgbClr val="0F172A"/>
+                </a:solidFill>
+                <a:latin typeface="Arial"/>
+              </a:rPr>
+              <a:t>Ventas</a:t>
+            </a:r>
+          </a:p>
+        </p:txBody>
+      </p:sp>
+      <p:sp>
+        <p:nvSpPr>
+          <p:cNvPr id="40" name="TextBox 39"/>
+          <p:cNvSpPr txBox="1"/>
+          <p:nvPr/>
+        </p:nvSpPr>
+        <p:spPr>
+          <a:xfrm>
+            <a:off x="6766560" y="3072384"/>
+            <a:ext cx="1828800" cy="164592"/>
+          </a:xfrm>
+          <a:prstGeom prst="rect">
+            <a:avLst/>
+          </a:prstGeom>
+          <a:noFill/>
+        </p:spPr>
+        <p:txBody>
+          <a:bodyPr wrap="square">
+            <a:spAutoFit/>
+          </a:bodyPr>
+          <a:lstStyle/>
+          <a:p>
+            <a:pPr algn="l"/>
+            <a:r>
+              <a:rPr sz="880" b="0">
+                <a:solidFill>
+                  <a:srgbClr val="64748B"/>
+                </a:solidFill>
+                <a:latin typeface="Arial"/>
+              </a:rPr>
+              <a:t>Comprobante</a:t>
+            </a:r>
+          </a:p>
+        </p:txBody>
+      </p:sp>
+      <p:sp>
+        <p:nvSpPr>
+          <p:cNvPr id="41" name="Rounded Rectangle 40"/>
+          <p:cNvSpPr/>
+          <p:nvPr/>
+        </p:nvSpPr>
+        <p:spPr>
+          <a:xfrm>
+            <a:off x="9189720" y="1234440"/>
+            <a:ext cx="2651760" cy="4297680"/>
           </a:xfrm>
           <a:prstGeom prst="roundRect">
             <a:avLst/>
@@ -10708,20 +14244,20 @@
       </p:sp>
       <p:sp>
         <p:nvSpPr>
-          <p:cNvPr id="21" name="Rectangle 20"/>
+          <p:cNvPr id="42" name="Rectangle 41"/>
           <p:cNvSpPr/>
           <p:nvPr/>
         </p:nvSpPr>
         <p:spPr>
           <a:xfrm>
-            <a:off x="9052559" y="1234440"/>
-            <a:ext cx="73152" cy="1417320"/>
-          </a:xfrm>
-          <a:prstGeom prst="rect">
-            <a:avLst/>
-          </a:prstGeom>
-          <a:solidFill>
-            <a:srgbClr val="059669"/>
+            <a:off x="9189720" y="1234440"/>
+            <a:ext cx="73152" cy="4297680"/>
+          </a:xfrm>
+          <a:prstGeom prst="rect">
+            <a:avLst/>
+          </a:prstGeom>
+          <a:solidFill>
+            <a:srgbClr val="4F46E5"/>
           </a:solidFill>
           <a:ln>
             <a:noFill/>
@@ -10751,14 +14287,14 @@
       </p:sp>
       <p:sp>
         <p:nvSpPr>
-          <p:cNvPr id="22" name="TextBox 21"/>
-          <p:cNvSpPr txBox="1"/>
-          <p:nvPr/>
-        </p:nvSpPr>
-        <p:spPr>
-          <a:xfrm>
-            <a:off x="9253728" y="1399032"/>
-            <a:ext cx="2148840" cy="274320"/>
+          <p:cNvPr id="43" name="TextBox 42"/>
+          <p:cNvSpPr txBox="1"/>
+          <p:nvPr/>
+        </p:nvSpPr>
+        <p:spPr>
+          <a:xfrm>
+            <a:off x="9390888" y="1380744"/>
+            <a:ext cx="2322576" cy="292608"/>
           </a:xfrm>
           <a:prstGeom prst="rect">
             <a:avLst/>
@@ -10773,27 +14309,27 @@
           <a:p>
             <a:pPr algn="l"/>
             <a:r>
-              <a:rPr sz="1500" b="1">
+              <a:rPr sz="1600" b="1">
                 <a:solidFill>
                   <a:srgbClr val="0F172A"/>
                 </a:solidFill>
                 <a:latin typeface="Arial"/>
               </a:rPr>
-              <a:t>Inventario</a:t>
-            </a:r>
-          </a:p>
-        </p:txBody>
-      </p:sp>
-      <p:sp>
-        <p:nvSpPr>
-          <p:cNvPr id="23" name="TextBox 22"/>
-          <p:cNvSpPr txBox="1"/>
-          <p:nvPr/>
-        </p:nvSpPr>
-        <p:spPr>
-          <a:xfrm>
-            <a:off x="9253728" y="1737360"/>
-            <a:ext cx="2148840" cy="822960"/>
+              <a:t>Análisis</a:t>
+            </a:r>
+          </a:p>
+        </p:txBody>
+      </p:sp>
+      <p:sp>
+        <p:nvSpPr>
+          <p:cNvPr id="44" name="TextBox 43"/>
+          <p:cNvSpPr txBox="1"/>
+          <p:nvPr/>
+        </p:nvSpPr>
+        <p:spPr>
+          <a:xfrm>
+            <a:off x="9390888" y="1737360"/>
+            <a:ext cx="2322576" cy="3730752"/>
           </a:xfrm>
           <a:prstGeom prst="rect">
             <a:avLst/>
@@ -10808,35 +14344,35 @@
           <a:p>
             <a:pPr algn="l"/>
             <a:r>
-              <a:rPr sz="1080" b="0">
+              <a:rPr sz="1100" b="0">
                 <a:solidFill>
                   <a:srgbClr val="334155"/>
                 </a:solidFill>
                 <a:latin typeface="Arial"/>
               </a:rPr>
-              <a:t>Stock y movimientos</a:t>
-            </a:r>
-          </a:p>
-        </p:txBody>
-      </p:sp>
-      <p:sp>
-        <p:nvSpPr>
-          <p:cNvPr id="24" name="Rounded Rectangle 23"/>
+              <a:t/>
+            </a:r>
+          </a:p>
+        </p:txBody>
+      </p:sp>
+      <p:sp>
+        <p:nvSpPr>
+          <p:cNvPr id="45" name="Rounded Rectangle 44"/>
           <p:cNvSpPr/>
           <p:nvPr/>
         </p:nvSpPr>
         <p:spPr>
           <a:xfrm>
-            <a:off x="685800" y="3291840"/>
-            <a:ext cx="2468880" cy="1417320"/>
+            <a:off x="9445752" y="1874519"/>
+            <a:ext cx="2121408" cy="658368"/>
           </a:xfrm>
           <a:prstGeom prst="roundRect">
             <a:avLst/>
           </a:prstGeom>
           <a:solidFill>
-            <a:srgbClr val="FFFFFF"/>
-          </a:solidFill>
-          <a:ln w="15240">
+            <a:srgbClr val="F8FAFC"/>
+          </a:solidFill>
+          <a:ln>
             <a:solidFill>
               <a:srgbClr val="CBD5E1"/>
             </a:solidFill>
@@ -10866,57 +14402,14 @@
       </p:sp>
       <p:sp>
         <p:nvSpPr>
-          <p:cNvPr id="25" name="Rectangle 24"/>
-          <p:cNvSpPr/>
-          <p:nvPr/>
-        </p:nvSpPr>
-        <p:spPr>
-          <a:xfrm>
-            <a:off x="685800" y="3291840"/>
-            <a:ext cx="73152" cy="1417320"/>
-          </a:xfrm>
-          <a:prstGeom prst="rect">
-            <a:avLst/>
-          </a:prstGeom>
-          <a:solidFill>
-            <a:srgbClr val="D97706"/>
-          </a:solidFill>
-          <a:ln>
-            <a:noFill/>
-          </a:ln>
-        </p:spPr>
-        <p:style>
-          <a:lnRef idx="1">
-            <a:schemeClr val="accent1"/>
-          </a:lnRef>
-          <a:fillRef idx="3">
-            <a:schemeClr val="accent1"/>
-          </a:fillRef>
-          <a:effectRef idx="2">
-            <a:schemeClr val="accent1"/>
-          </a:effectRef>
-          <a:fontRef idx="minor">
-            <a:schemeClr val="lt1"/>
-          </a:fontRef>
-        </p:style>
-        <p:txBody>
-          <a:bodyPr rtlCol="0" anchor="ctr"/>
-          <a:lstStyle/>
-          <a:p>
-            <a:pPr algn="ctr"/>
-          </a:p>
-        </p:txBody>
-      </p:sp>
-      <p:sp>
-        <p:nvSpPr>
-          <p:cNvPr id="26" name="TextBox 25"/>
-          <p:cNvSpPr txBox="1"/>
-          <p:nvPr/>
-        </p:nvSpPr>
-        <p:spPr>
-          <a:xfrm>
-            <a:off x="886968" y="3456432"/>
-            <a:ext cx="2148840" cy="274320"/>
+          <p:cNvPr id="46" name="TextBox 45"/>
+          <p:cNvSpPr txBox="1"/>
+          <p:nvPr/>
+        </p:nvSpPr>
+        <p:spPr>
+          <a:xfrm>
+            <a:off x="9601200" y="1984248"/>
+            <a:ext cx="1828800" cy="201168"/>
           </a:xfrm>
           <a:prstGeom prst="rect">
             <a:avLst/>
@@ -10931,27 +14424,27 @@
           <a:p>
             <a:pPr algn="l"/>
             <a:r>
-              <a:rPr sz="1500" b="1">
+              <a:rPr sz="1200" b="1">
                 <a:solidFill>
                   <a:srgbClr val="0F172A"/>
                 </a:solidFill>
                 <a:latin typeface="Arial"/>
               </a:rPr>
-              <a:t>Clientes</a:t>
-            </a:r>
-          </a:p>
-        </p:txBody>
-      </p:sp>
-      <p:sp>
-        <p:nvSpPr>
-          <p:cNvPr id="27" name="TextBox 26"/>
-          <p:cNvSpPr txBox="1"/>
-          <p:nvPr/>
-        </p:nvSpPr>
-        <p:spPr>
-          <a:xfrm>
-            <a:off x="886968" y="3794760"/>
-            <a:ext cx="2148840" cy="822960"/>
+              <a:t>Reportes</a:t>
+            </a:r>
+          </a:p>
+        </p:txBody>
+      </p:sp>
+      <p:sp>
+        <p:nvSpPr>
+          <p:cNvPr id="47" name="TextBox 46"/>
+          <p:cNvSpPr txBox="1"/>
+          <p:nvPr/>
+        </p:nvSpPr>
+        <p:spPr>
+          <a:xfrm>
+            <a:off x="9601200" y="2231136"/>
+            <a:ext cx="1828800" cy="164592"/>
           </a:xfrm>
           <a:prstGeom prst="rect">
             <a:avLst/>
@@ -10966,483 +14459,9 @@
           <a:p>
             <a:pPr algn="l"/>
             <a:r>
-              <a:rPr sz="1080" b="0">
-                <a:solidFill>
-                  <a:srgbClr val="334155"/>
-                </a:solidFill>
-                <a:latin typeface="Arial"/>
-              </a:rPr>
-              <a:t>Registro y consulta</a:t>
-            </a:r>
-          </a:p>
-        </p:txBody>
-      </p:sp>
-      <p:sp>
-        <p:nvSpPr>
-          <p:cNvPr id="28" name="Rounded Rectangle 27"/>
-          <p:cNvSpPr/>
-          <p:nvPr/>
-        </p:nvSpPr>
-        <p:spPr>
-          <a:xfrm>
-            <a:off x="3474720" y="3291840"/>
-            <a:ext cx="2468880" cy="1417320"/>
-          </a:xfrm>
-          <a:prstGeom prst="roundRect">
-            <a:avLst/>
-          </a:prstGeom>
-          <a:solidFill>
-            <a:srgbClr val="FFFFFF"/>
-          </a:solidFill>
-          <a:ln w="15240">
-            <a:solidFill>
-              <a:srgbClr val="CBD5E1"/>
-            </a:solidFill>
-          </a:ln>
-        </p:spPr>
-        <p:style>
-          <a:lnRef idx="1">
-            <a:schemeClr val="accent1"/>
-          </a:lnRef>
-          <a:fillRef idx="3">
-            <a:schemeClr val="accent1"/>
-          </a:fillRef>
-          <a:effectRef idx="2">
-            <a:schemeClr val="accent1"/>
-          </a:effectRef>
-          <a:fontRef idx="minor">
-            <a:schemeClr val="lt1"/>
-          </a:fontRef>
-        </p:style>
-        <p:txBody>
-          <a:bodyPr rtlCol="0" anchor="ctr"/>
-          <a:lstStyle/>
-          <a:p>
-            <a:pPr algn="ctr"/>
-          </a:p>
-        </p:txBody>
-      </p:sp>
-      <p:sp>
-        <p:nvSpPr>
-          <p:cNvPr id="29" name="Rectangle 28"/>
-          <p:cNvSpPr/>
-          <p:nvPr/>
-        </p:nvSpPr>
-        <p:spPr>
-          <a:xfrm>
-            <a:off x="3474720" y="3291840"/>
-            <a:ext cx="73152" cy="1417320"/>
-          </a:xfrm>
-          <a:prstGeom prst="rect">
-            <a:avLst/>
-          </a:prstGeom>
-          <a:solidFill>
-            <a:srgbClr val="E11D48"/>
-          </a:solidFill>
-          <a:ln>
-            <a:noFill/>
-          </a:ln>
-        </p:spPr>
-        <p:style>
-          <a:lnRef idx="1">
-            <a:schemeClr val="accent1"/>
-          </a:lnRef>
-          <a:fillRef idx="3">
-            <a:schemeClr val="accent1"/>
-          </a:fillRef>
-          <a:effectRef idx="2">
-            <a:schemeClr val="accent1"/>
-          </a:effectRef>
-          <a:fontRef idx="minor">
-            <a:schemeClr val="lt1"/>
-          </a:fontRef>
-        </p:style>
-        <p:txBody>
-          <a:bodyPr rtlCol="0" anchor="ctr"/>
-          <a:lstStyle/>
-          <a:p>
-            <a:pPr algn="ctr"/>
-          </a:p>
-        </p:txBody>
-      </p:sp>
-      <p:sp>
-        <p:nvSpPr>
-          <p:cNvPr id="30" name="TextBox 29"/>
-          <p:cNvSpPr txBox="1"/>
-          <p:nvPr/>
-        </p:nvSpPr>
-        <p:spPr>
-          <a:xfrm>
-            <a:off x="3675887" y="3456432"/>
-            <a:ext cx="2148840" cy="274320"/>
-          </a:xfrm>
-          <a:prstGeom prst="rect">
-            <a:avLst/>
-          </a:prstGeom>
-          <a:noFill/>
-        </p:spPr>
-        <p:txBody>
-          <a:bodyPr wrap="square">
-            <a:spAutoFit/>
-          </a:bodyPr>
-          <a:lstStyle/>
-          <a:p>
-            <a:pPr algn="l"/>
-            <a:r>
-              <a:rPr sz="1500" b="1">
-                <a:solidFill>
-                  <a:srgbClr val="0F172A"/>
-                </a:solidFill>
-                <a:latin typeface="Arial"/>
-              </a:rPr>
-              <a:t>Pedidos</a:t>
-            </a:r>
-          </a:p>
-        </p:txBody>
-      </p:sp>
-      <p:sp>
-        <p:nvSpPr>
-          <p:cNvPr id="31" name="TextBox 30"/>
-          <p:cNvSpPr txBox="1"/>
-          <p:nvPr/>
-        </p:nvSpPr>
-        <p:spPr>
-          <a:xfrm>
-            <a:off x="3675887" y="3794760"/>
-            <a:ext cx="2148840" cy="822960"/>
-          </a:xfrm>
-          <a:prstGeom prst="rect">
-            <a:avLst/>
-          </a:prstGeom>
-          <a:noFill/>
-        </p:spPr>
-        <p:txBody>
-          <a:bodyPr wrap="square">
-            <a:spAutoFit/>
-          </a:bodyPr>
-          <a:lstStyle/>
-          <a:p>
-            <a:pPr algn="l"/>
-            <a:r>
-              <a:rPr sz="1080" b="0">
-                <a:solidFill>
-                  <a:srgbClr val="334155"/>
-                </a:solidFill>
-                <a:latin typeface="Arial"/>
-              </a:rPr>
-              <a:t>Detalle y totales</a:t>
-            </a:r>
-          </a:p>
-        </p:txBody>
-      </p:sp>
-      <p:sp>
-        <p:nvSpPr>
-          <p:cNvPr id="32" name="Rounded Rectangle 31"/>
-          <p:cNvSpPr/>
-          <p:nvPr/>
-        </p:nvSpPr>
-        <p:spPr>
-          <a:xfrm>
-            <a:off x="6263640" y="3291840"/>
-            <a:ext cx="2468880" cy="1417320"/>
-          </a:xfrm>
-          <a:prstGeom prst="roundRect">
-            <a:avLst/>
-          </a:prstGeom>
-          <a:solidFill>
-            <a:srgbClr val="FFFFFF"/>
-          </a:solidFill>
-          <a:ln w="15240">
-            <a:solidFill>
-              <a:srgbClr val="CBD5E1"/>
-            </a:solidFill>
-          </a:ln>
-        </p:spPr>
-        <p:style>
-          <a:lnRef idx="1">
-            <a:schemeClr val="accent1"/>
-          </a:lnRef>
-          <a:fillRef idx="3">
-            <a:schemeClr val="accent1"/>
-          </a:fillRef>
-          <a:effectRef idx="2">
-            <a:schemeClr val="accent1"/>
-          </a:effectRef>
-          <a:fontRef idx="minor">
-            <a:schemeClr val="lt1"/>
-          </a:fontRef>
-        </p:style>
-        <p:txBody>
-          <a:bodyPr rtlCol="0" anchor="ctr"/>
-          <a:lstStyle/>
-          <a:p>
-            <a:pPr algn="ctr"/>
-          </a:p>
-        </p:txBody>
-      </p:sp>
-      <p:sp>
-        <p:nvSpPr>
-          <p:cNvPr id="33" name="Rectangle 32"/>
-          <p:cNvSpPr/>
-          <p:nvPr/>
-        </p:nvSpPr>
-        <p:spPr>
-          <a:xfrm>
-            <a:off x="6263640" y="3291840"/>
-            <a:ext cx="73152" cy="1417320"/>
-          </a:xfrm>
-          <a:prstGeom prst="rect">
-            <a:avLst/>
-          </a:prstGeom>
-          <a:solidFill>
-            <a:srgbClr val="2563EB"/>
-          </a:solidFill>
-          <a:ln>
-            <a:noFill/>
-          </a:ln>
-        </p:spPr>
-        <p:style>
-          <a:lnRef idx="1">
-            <a:schemeClr val="accent1"/>
-          </a:lnRef>
-          <a:fillRef idx="3">
-            <a:schemeClr val="accent1"/>
-          </a:fillRef>
-          <a:effectRef idx="2">
-            <a:schemeClr val="accent1"/>
-          </a:effectRef>
-          <a:fontRef idx="minor">
-            <a:schemeClr val="lt1"/>
-          </a:fontRef>
-        </p:style>
-        <p:txBody>
-          <a:bodyPr rtlCol="0" anchor="ctr"/>
-          <a:lstStyle/>
-          <a:p>
-            <a:pPr algn="ctr"/>
-          </a:p>
-        </p:txBody>
-      </p:sp>
-      <p:sp>
-        <p:nvSpPr>
-          <p:cNvPr id="34" name="TextBox 33"/>
-          <p:cNvSpPr txBox="1"/>
-          <p:nvPr/>
-        </p:nvSpPr>
-        <p:spPr>
-          <a:xfrm>
-            <a:off x="6464807" y="3456432"/>
-            <a:ext cx="2148840" cy="274320"/>
-          </a:xfrm>
-          <a:prstGeom prst="rect">
-            <a:avLst/>
-          </a:prstGeom>
-          <a:noFill/>
-        </p:spPr>
-        <p:txBody>
-          <a:bodyPr wrap="square">
-            <a:spAutoFit/>
-          </a:bodyPr>
-          <a:lstStyle/>
-          <a:p>
-            <a:pPr algn="l"/>
-            <a:r>
-              <a:rPr sz="1500" b="1">
-                <a:solidFill>
-                  <a:srgbClr val="0F172A"/>
-                </a:solidFill>
-                <a:latin typeface="Arial"/>
-              </a:rPr>
-              <a:t>Ventas</a:t>
-            </a:r>
-          </a:p>
-        </p:txBody>
-      </p:sp>
-      <p:sp>
-        <p:nvSpPr>
-          <p:cNvPr id="35" name="TextBox 34"/>
-          <p:cNvSpPr txBox="1"/>
-          <p:nvPr/>
-        </p:nvSpPr>
-        <p:spPr>
-          <a:xfrm>
-            <a:off x="6464807" y="3794760"/>
-            <a:ext cx="2148840" cy="822960"/>
-          </a:xfrm>
-          <a:prstGeom prst="rect">
-            <a:avLst/>
-          </a:prstGeom>
-          <a:noFill/>
-        </p:spPr>
-        <p:txBody>
-          <a:bodyPr wrap="square">
-            <a:spAutoFit/>
-          </a:bodyPr>
-          <a:lstStyle/>
-          <a:p>
-            <a:pPr algn="l"/>
-            <a:r>
-              <a:rPr sz="1080" b="0">
-                <a:solidFill>
-                  <a:srgbClr val="334155"/>
-                </a:solidFill>
-                <a:latin typeface="Arial"/>
-              </a:rPr>
-              <a:t>Comprobante y pedido</a:t>
-            </a:r>
-          </a:p>
-        </p:txBody>
-      </p:sp>
-      <p:sp>
-        <p:nvSpPr>
-          <p:cNvPr id="36" name="Rounded Rectangle 35"/>
-          <p:cNvSpPr/>
-          <p:nvPr/>
-        </p:nvSpPr>
-        <p:spPr>
-          <a:xfrm>
-            <a:off x="9052559" y="3291840"/>
-            <a:ext cx="2468880" cy="1417320"/>
-          </a:xfrm>
-          <a:prstGeom prst="roundRect">
-            <a:avLst/>
-          </a:prstGeom>
-          <a:solidFill>
-            <a:srgbClr val="FFFFFF"/>
-          </a:solidFill>
-          <a:ln w="15240">
-            <a:solidFill>
-              <a:srgbClr val="CBD5E1"/>
-            </a:solidFill>
-          </a:ln>
-        </p:spPr>
-        <p:style>
-          <a:lnRef idx="1">
-            <a:schemeClr val="accent1"/>
-          </a:lnRef>
-          <a:fillRef idx="3">
-            <a:schemeClr val="accent1"/>
-          </a:fillRef>
-          <a:effectRef idx="2">
-            <a:schemeClr val="accent1"/>
-          </a:effectRef>
-          <a:fontRef idx="minor">
-            <a:schemeClr val="lt1"/>
-          </a:fontRef>
-        </p:style>
-        <p:txBody>
-          <a:bodyPr rtlCol="0" anchor="ctr"/>
-          <a:lstStyle/>
-          <a:p>
-            <a:pPr algn="ctr"/>
-          </a:p>
-        </p:txBody>
-      </p:sp>
-      <p:sp>
-        <p:nvSpPr>
-          <p:cNvPr id="37" name="Rectangle 36"/>
-          <p:cNvSpPr/>
-          <p:nvPr/>
-        </p:nvSpPr>
-        <p:spPr>
-          <a:xfrm>
-            <a:off x="9052559" y="3291840"/>
-            <a:ext cx="73152" cy="1417320"/>
-          </a:xfrm>
-          <a:prstGeom prst="rect">
-            <a:avLst/>
-          </a:prstGeom>
-          <a:solidFill>
-            <a:srgbClr val="059669"/>
-          </a:solidFill>
-          <a:ln>
-            <a:noFill/>
-          </a:ln>
-        </p:spPr>
-        <p:style>
-          <a:lnRef idx="1">
-            <a:schemeClr val="accent1"/>
-          </a:lnRef>
-          <a:fillRef idx="3">
-            <a:schemeClr val="accent1"/>
-          </a:fillRef>
-          <a:effectRef idx="2">
-            <a:schemeClr val="accent1"/>
-          </a:effectRef>
-          <a:fontRef idx="minor">
-            <a:schemeClr val="lt1"/>
-          </a:fontRef>
-        </p:style>
-        <p:txBody>
-          <a:bodyPr rtlCol="0" anchor="ctr"/>
-          <a:lstStyle/>
-          <a:p>
-            <a:pPr algn="ctr"/>
-          </a:p>
-        </p:txBody>
-      </p:sp>
-      <p:sp>
-        <p:nvSpPr>
-          <p:cNvPr id="38" name="TextBox 37"/>
-          <p:cNvSpPr txBox="1"/>
-          <p:nvPr/>
-        </p:nvSpPr>
-        <p:spPr>
-          <a:xfrm>
-            <a:off x="9253728" y="3456432"/>
-            <a:ext cx="2148840" cy="274320"/>
-          </a:xfrm>
-          <a:prstGeom prst="rect">
-            <a:avLst/>
-          </a:prstGeom>
-          <a:noFill/>
-        </p:spPr>
-        <p:txBody>
-          <a:bodyPr wrap="square">
-            <a:spAutoFit/>
-          </a:bodyPr>
-          <a:lstStyle/>
-          <a:p>
-            <a:pPr algn="l"/>
-            <a:r>
-              <a:rPr sz="1500" b="1">
-                <a:solidFill>
-                  <a:srgbClr val="0F172A"/>
-                </a:solidFill>
-                <a:latin typeface="Arial"/>
-              </a:rPr>
-              <a:t>Reportes</a:t>
-            </a:r>
-          </a:p>
-        </p:txBody>
-      </p:sp>
-      <p:sp>
-        <p:nvSpPr>
-          <p:cNvPr id="39" name="TextBox 38"/>
-          <p:cNvSpPr txBox="1"/>
-          <p:nvPr/>
-        </p:nvSpPr>
-        <p:spPr>
-          <a:xfrm>
-            <a:off x="9253728" y="3794760"/>
-            <a:ext cx="2148840" cy="822960"/>
-          </a:xfrm>
-          <a:prstGeom prst="rect">
-            <a:avLst/>
-          </a:prstGeom>
-          <a:noFill/>
-        </p:spPr>
-        <p:txBody>
-          <a:bodyPr wrap="square">
-            <a:spAutoFit/>
-          </a:bodyPr>
-          <a:lstStyle/>
-          <a:p>
-            <a:pPr algn="l"/>
-            <a:r>
-              <a:rPr sz="1080" b="0">
-                <a:solidFill>
-                  <a:srgbClr val="334155"/>
+              <a:rPr sz="880" b="0">
+                <a:solidFill>
+                  <a:srgbClr val="64748B"/>
                 </a:solidFill>
                 <a:latin typeface="Arial"/>
               </a:rPr>
